--- a/courses/tom-economics/lessons/lesson-05/slides.pptx
+++ b/courses/tom-economics/lessons/lesson-05/slides.pptx
@@ -22,9 +22,13 @@
     <p:sldId id="270" r:id="rId16"/>
     <p:sldId id="271" r:id="rId17"/>
     <p:sldId id="272" r:id="rId18"/>
+    <p:sldId id="273" r:id="rId19"/>
+    <p:sldId id="274" r:id="rId20"/>
+    <p:sldId id="275" r:id="rId21"/>
+    <p:sldId id="276" r:id="rId22"/>
   </p:sldIdLst>
   <p:notesMasterIdLst>
-    <p:notesMasterId r:id="rId19"/>
+    <p:notesMasterId r:id="rId23"/>
   </p:notesMasterIdLst>
   <p:sldSz cx="12192000" cy="6858000"/>
   <p:notesSz cx="6858000" cy="12192000"/>
@@ -1264,6 +1268,182 @@
 </p:notes>
 </file>
 
+<file path=ppt/notesSlides/notesSlide18.xml><?xml version="1.0" encoding="utf-8"?>
+<p:notes xmlns:a="http://schemas.openxmlformats.org/drawingml/2006/main" xmlns:r="http://schemas.openxmlformats.org/officeDocument/2006/relationships" xmlns:p="http://schemas.openxmlformats.org/presentationml/2006/main">
+  <p:cSld>
+    <p:spTree>
+      <p:nvGrpSpPr>
+        <p:cNvPr id="1" name=""/>
+        <p:cNvGrpSpPr/>
+        <p:nvPr/>
+      </p:nvGrpSpPr>
+      <p:grpSpPr>
+        <a:xfrm>
+          <a:off x="0" y="0"/>
+          <a:ext cx="0" cy="0"/>
+          <a:chOff x="0" y="0"/>
+          <a:chExt cx="0" cy="0"/>
+        </a:xfrm>
+      </p:grpSpPr>
+      <p:sp>
+        <p:nvSpPr>
+          <p:cNvPr id="2" name="Slide Image Placeholder 1"/>
+          <p:cNvSpPr>
+            <a:spLocks noGrp="1" noRot="1" noChangeAspect="1"/>
+          </p:cNvSpPr>
+          <p:nvPr>
+            <p:ph type="sldImg"/>
+          </p:nvPr>
+        </p:nvSpPr>
+        <p:spPr/>
+      </p:sp>
+      <p:sp>
+        <p:nvSpPr>
+          <p:cNvPr id="3" name="Notes Placeholder 2"/>
+          <p:cNvSpPr>
+            <a:spLocks noGrp="1"/>
+          </p:cNvSpPr>
+          <p:nvPr>
+            <p:ph type="body" idx="1"/>
+          </p:nvPr>
+        </p:nvSpPr>
+        <p:spPr/>
+        <p:txBody>
+          <a:bodyPr/>
+          <a:lstStyle/>
+          <a:p>
+            <a:r>
+              <a:rPr lang="en-US" dirty="0"/>
+              <a:t/>
+            </a:r>
+            <a:endParaRPr lang="en-US" dirty="0"/>
+          </a:p>
+        </p:txBody>
+      </p:sp>
+      <p:sp>
+        <p:nvSpPr>
+          <p:cNvPr id="4" name="Slide Number Placeholder 3"/>
+          <p:cNvSpPr>
+            <a:spLocks noGrp="1"/>
+          </p:cNvSpPr>
+          <p:nvPr>
+            <p:ph type="sldNum" sz="quarter" idx="10"/>
+          </p:nvPr>
+        </p:nvSpPr>
+        <p:spPr/>
+        <p:txBody>
+          <a:bodyPr/>
+          <a:lstStyle/>
+          <a:p>
+            <a:fld id="{F7021451-1387-4CA6-816F-3879F97B5CBC}" type="slidenum">
+              <a:rPr lang="en-US"/>
+              <a:t>18</a:t>
+            </a:fld>
+            <a:endParaRPr lang="en-US"/>
+          </a:p>
+        </p:txBody>
+      </p:sp>
+    </p:spTree>
+    <p:extLst>
+      <p:ext uri="{BB962C8B-B14F-4D97-AF65-F5344CB8AC3E}">
+        <p14:creationId xmlns:p14="http://schemas.microsoft.com/office/powerpoint/2010/main" val="1024086991"/>
+      </p:ext>
+    </p:extLst>
+  </p:cSld>
+  <p:clrMapOvr>
+    <a:masterClrMapping/>
+  </p:clrMapOvr>
+</p:notes>
+</file>
+
+<file path=ppt/notesSlides/notesSlide19.xml><?xml version="1.0" encoding="utf-8"?>
+<p:notes xmlns:a="http://schemas.openxmlformats.org/drawingml/2006/main" xmlns:r="http://schemas.openxmlformats.org/officeDocument/2006/relationships" xmlns:p="http://schemas.openxmlformats.org/presentationml/2006/main">
+  <p:cSld>
+    <p:spTree>
+      <p:nvGrpSpPr>
+        <p:cNvPr id="1" name=""/>
+        <p:cNvGrpSpPr/>
+        <p:nvPr/>
+      </p:nvGrpSpPr>
+      <p:grpSpPr>
+        <a:xfrm>
+          <a:off x="0" y="0"/>
+          <a:ext cx="0" cy="0"/>
+          <a:chOff x="0" y="0"/>
+          <a:chExt cx="0" cy="0"/>
+        </a:xfrm>
+      </p:grpSpPr>
+      <p:sp>
+        <p:nvSpPr>
+          <p:cNvPr id="2" name="Slide Image Placeholder 1"/>
+          <p:cNvSpPr>
+            <a:spLocks noGrp="1" noRot="1" noChangeAspect="1"/>
+          </p:cNvSpPr>
+          <p:nvPr>
+            <p:ph type="sldImg"/>
+          </p:nvPr>
+        </p:nvSpPr>
+        <p:spPr/>
+      </p:sp>
+      <p:sp>
+        <p:nvSpPr>
+          <p:cNvPr id="3" name="Notes Placeholder 2"/>
+          <p:cNvSpPr>
+            <a:spLocks noGrp="1"/>
+          </p:cNvSpPr>
+          <p:nvPr>
+            <p:ph type="body" idx="1"/>
+          </p:nvPr>
+        </p:nvSpPr>
+        <p:spPr/>
+        <p:txBody>
+          <a:bodyPr/>
+          <a:lstStyle/>
+          <a:p>
+            <a:r>
+              <a:rPr lang="en-US" dirty="0"/>
+              <a:t/>
+            </a:r>
+            <a:endParaRPr lang="en-US" dirty="0"/>
+          </a:p>
+        </p:txBody>
+      </p:sp>
+      <p:sp>
+        <p:nvSpPr>
+          <p:cNvPr id="4" name="Slide Number Placeholder 3"/>
+          <p:cNvSpPr>
+            <a:spLocks noGrp="1"/>
+          </p:cNvSpPr>
+          <p:nvPr>
+            <p:ph type="sldNum" sz="quarter" idx="10"/>
+          </p:nvPr>
+        </p:nvSpPr>
+        <p:spPr/>
+        <p:txBody>
+          <a:bodyPr/>
+          <a:lstStyle/>
+          <a:p>
+            <a:fld id="{F7021451-1387-4CA6-816F-3879F97B5CBC}" type="slidenum">
+              <a:rPr lang="en-US"/>
+              <a:t>19</a:t>
+            </a:fld>
+            <a:endParaRPr lang="en-US"/>
+          </a:p>
+        </p:txBody>
+      </p:sp>
+    </p:spTree>
+    <p:extLst>
+      <p:ext uri="{BB962C8B-B14F-4D97-AF65-F5344CB8AC3E}">
+        <p14:creationId xmlns:p14="http://schemas.microsoft.com/office/powerpoint/2010/main" val="1024086991"/>
+      </p:ext>
+    </p:extLst>
+  </p:cSld>
+  <p:clrMapOvr>
+    <a:masterClrMapping/>
+  </p:clrMapOvr>
+</p:notes>
+</file>
+
 <file path=ppt/notesSlides/notesSlide2.xml><?xml version="1.0" encoding="utf-8"?>
 <p:notes xmlns:a="http://schemas.openxmlformats.org/drawingml/2006/main" xmlns:r="http://schemas.openxmlformats.org/officeDocument/2006/relationships" xmlns:p="http://schemas.openxmlformats.org/presentationml/2006/main">
   <p:cSld>
@@ -1334,6 +1514,182 @@
             <a:fld id="{F7021451-1387-4CA6-816F-3879F97B5CBC}" type="slidenum">
               <a:rPr lang="en-US"/>
               <a:t>2</a:t>
+            </a:fld>
+            <a:endParaRPr lang="en-US"/>
+          </a:p>
+        </p:txBody>
+      </p:sp>
+    </p:spTree>
+    <p:extLst>
+      <p:ext uri="{BB962C8B-B14F-4D97-AF65-F5344CB8AC3E}">
+        <p14:creationId xmlns:p14="http://schemas.microsoft.com/office/powerpoint/2010/main" val="1024086991"/>
+      </p:ext>
+    </p:extLst>
+  </p:cSld>
+  <p:clrMapOvr>
+    <a:masterClrMapping/>
+  </p:clrMapOvr>
+</p:notes>
+</file>
+
+<file path=ppt/notesSlides/notesSlide20.xml><?xml version="1.0" encoding="utf-8"?>
+<p:notes xmlns:a="http://schemas.openxmlformats.org/drawingml/2006/main" xmlns:r="http://schemas.openxmlformats.org/officeDocument/2006/relationships" xmlns:p="http://schemas.openxmlformats.org/presentationml/2006/main">
+  <p:cSld>
+    <p:spTree>
+      <p:nvGrpSpPr>
+        <p:cNvPr id="1" name=""/>
+        <p:cNvGrpSpPr/>
+        <p:nvPr/>
+      </p:nvGrpSpPr>
+      <p:grpSpPr>
+        <a:xfrm>
+          <a:off x="0" y="0"/>
+          <a:ext cx="0" cy="0"/>
+          <a:chOff x="0" y="0"/>
+          <a:chExt cx="0" cy="0"/>
+        </a:xfrm>
+      </p:grpSpPr>
+      <p:sp>
+        <p:nvSpPr>
+          <p:cNvPr id="2" name="Slide Image Placeholder 1"/>
+          <p:cNvSpPr>
+            <a:spLocks noGrp="1" noRot="1" noChangeAspect="1"/>
+          </p:cNvSpPr>
+          <p:nvPr>
+            <p:ph type="sldImg"/>
+          </p:nvPr>
+        </p:nvSpPr>
+        <p:spPr/>
+      </p:sp>
+      <p:sp>
+        <p:nvSpPr>
+          <p:cNvPr id="3" name="Notes Placeholder 2"/>
+          <p:cNvSpPr>
+            <a:spLocks noGrp="1"/>
+          </p:cNvSpPr>
+          <p:nvPr>
+            <p:ph type="body" idx="1"/>
+          </p:nvPr>
+        </p:nvSpPr>
+        <p:spPr/>
+        <p:txBody>
+          <a:bodyPr/>
+          <a:lstStyle/>
+          <a:p>
+            <a:r>
+              <a:rPr lang="en-US" dirty="0"/>
+              <a:t/>
+            </a:r>
+            <a:endParaRPr lang="en-US" dirty="0"/>
+          </a:p>
+        </p:txBody>
+      </p:sp>
+      <p:sp>
+        <p:nvSpPr>
+          <p:cNvPr id="4" name="Slide Number Placeholder 3"/>
+          <p:cNvSpPr>
+            <a:spLocks noGrp="1"/>
+          </p:cNvSpPr>
+          <p:nvPr>
+            <p:ph type="sldNum" sz="quarter" idx="10"/>
+          </p:nvPr>
+        </p:nvSpPr>
+        <p:spPr/>
+        <p:txBody>
+          <a:bodyPr/>
+          <a:lstStyle/>
+          <a:p>
+            <a:fld id="{F7021451-1387-4CA6-816F-3879F97B5CBC}" type="slidenum">
+              <a:rPr lang="en-US"/>
+              <a:t>20</a:t>
+            </a:fld>
+            <a:endParaRPr lang="en-US"/>
+          </a:p>
+        </p:txBody>
+      </p:sp>
+    </p:spTree>
+    <p:extLst>
+      <p:ext uri="{BB962C8B-B14F-4D97-AF65-F5344CB8AC3E}">
+        <p14:creationId xmlns:p14="http://schemas.microsoft.com/office/powerpoint/2010/main" val="1024086991"/>
+      </p:ext>
+    </p:extLst>
+  </p:cSld>
+  <p:clrMapOvr>
+    <a:masterClrMapping/>
+  </p:clrMapOvr>
+</p:notes>
+</file>
+
+<file path=ppt/notesSlides/notesSlide21.xml><?xml version="1.0" encoding="utf-8"?>
+<p:notes xmlns:a="http://schemas.openxmlformats.org/drawingml/2006/main" xmlns:r="http://schemas.openxmlformats.org/officeDocument/2006/relationships" xmlns:p="http://schemas.openxmlformats.org/presentationml/2006/main">
+  <p:cSld>
+    <p:spTree>
+      <p:nvGrpSpPr>
+        <p:cNvPr id="1" name=""/>
+        <p:cNvGrpSpPr/>
+        <p:nvPr/>
+      </p:nvGrpSpPr>
+      <p:grpSpPr>
+        <a:xfrm>
+          <a:off x="0" y="0"/>
+          <a:ext cx="0" cy="0"/>
+          <a:chOff x="0" y="0"/>
+          <a:chExt cx="0" cy="0"/>
+        </a:xfrm>
+      </p:grpSpPr>
+      <p:sp>
+        <p:nvSpPr>
+          <p:cNvPr id="2" name="Slide Image Placeholder 1"/>
+          <p:cNvSpPr>
+            <a:spLocks noGrp="1" noRot="1" noChangeAspect="1"/>
+          </p:cNvSpPr>
+          <p:nvPr>
+            <p:ph type="sldImg"/>
+          </p:nvPr>
+        </p:nvSpPr>
+        <p:spPr/>
+      </p:sp>
+      <p:sp>
+        <p:nvSpPr>
+          <p:cNvPr id="3" name="Notes Placeholder 2"/>
+          <p:cNvSpPr>
+            <a:spLocks noGrp="1"/>
+          </p:cNvSpPr>
+          <p:nvPr>
+            <p:ph type="body" idx="1"/>
+          </p:nvPr>
+        </p:nvSpPr>
+        <p:spPr/>
+        <p:txBody>
+          <a:bodyPr/>
+          <a:lstStyle/>
+          <a:p>
+            <a:r>
+              <a:rPr lang="en-US" dirty="0"/>
+              <a:t/>
+            </a:r>
+            <a:endParaRPr lang="en-US" dirty="0"/>
+          </a:p>
+        </p:txBody>
+      </p:sp>
+      <p:sp>
+        <p:nvSpPr>
+          <p:cNvPr id="4" name="Slide Number Placeholder 3"/>
+          <p:cNvSpPr>
+            <a:spLocks noGrp="1"/>
+          </p:cNvSpPr>
+          <p:nvPr>
+            <p:ph type="sldNum" sz="quarter" idx="10"/>
+          </p:nvPr>
+        </p:nvSpPr>
+        <p:spPr/>
+        <p:txBody>
+          <a:bodyPr/>
+          <a:lstStyle/>
+          <a:p>
+            <a:fld id="{F7021451-1387-4CA6-816F-3879F97B5CBC}" type="slidenum">
+              <a:rPr lang="en-US"/>
+              <a:t>21</a:t>
             </a:fld>
             <a:endParaRPr lang="en-US"/>
           </a:p>
@@ -2544,7 +2900,7 @@
                 <a:ea typeface="Calibri" pitchFamily="34" charset="-122"/>
                 <a:cs typeface="Calibri" pitchFamily="34" charset="-120"/>
               </a:rPr>
-              <a:t>🕹️ Retired Lego set (resale)</a:t>
+              <a:t>🎾 Padel courts this summer</a:t>
             </a:r>
             <a:endParaRPr lang="en-US" sz="2200" dirty="0"/>
           </a:p>
@@ -2647,7 +3003,7 @@
                 <a:ea typeface="Calibri" pitchFamily="34" charset="-122"/>
                 <a:cs typeface="Calibri" pitchFamily="34" charset="-120"/>
               </a:rPr>
-              <a:t>Price: +50%</a:t>
+              <a:t>Price: court hire +20%</a:t>
             </a:r>
             <a:endParaRPr lang="en-US" sz="1500" dirty="0"/>
           </a:p>
@@ -2667,7 +3023,7 @@
                 <a:ea typeface="Calibri" pitchFamily="34" charset="-122"/>
                 <a:cs typeface="Calibri" pitchFamily="34" charset="-120"/>
               </a:rPr>
-              <a:t>Quantity supplied: fixed — no more will ever be made</a:t>
+              <a:t>Quantity supplied: fixed — no new courts before autumn</a:t>
             </a:r>
             <a:endParaRPr lang="en-US" sz="1500" dirty="0"/>
           </a:p>
@@ -2925,7 +3281,7 @@
                 <a:ea typeface="Calibri" pitchFamily="34" charset="-122"/>
                 <a:cs typeface="Calibri" pitchFamily="34" charset="-120"/>
               </a:rPr>
-              <a:t>🕹️ Retired Lego set — answer</a:t>
+              <a:t>🎾 Padel courts — answer</a:t>
             </a:r>
             <a:endParaRPr lang="en-US" sz="2200" dirty="0"/>
           </a:p>
@@ -3028,7 +3384,7 @@
                 <a:ea typeface="Calibri" pitchFamily="34" charset="-122"/>
                 <a:cs typeface="Calibri" pitchFamily="34" charset="-120"/>
               </a:rPr>
-              <a:t>% change in price = +50%</a:t>
+              <a:t>% change in price = +20%</a:t>
             </a:r>
             <a:endParaRPr lang="en-US" sz="1500" dirty="0"/>
           </a:p>
@@ -3087,7 +3443,7 @@
                 <a:ea typeface="Cambria" pitchFamily="34" charset="-122"/>
                 <a:cs typeface="Cambria" pitchFamily="34" charset="-120"/>
               </a:rPr>
-              <a:t>PES = 0 ÷ 50 = 0 → Perfectly inelastic</a:t>
+              <a:t>PES = 0 ÷ 20 = 0 → Perfectly inelastic</a:t>
             </a:r>
             <a:endParaRPr lang="en-US" sz="1800" dirty="0"/>
           </a:p>
@@ -3127,14 +3483,38 @@
       </p:grpSpPr>
       <p:sp>
         <p:nvSpPr>
-          <p:cNvPr id="2" name="Text 0"/>
-          <p:cNvSpPr/>
-          <p:nvPr/>
-        </p:nvSpPr>
-        <p:spPr>
-          <a:xfrm>
-            <a:off x="640080" y="548640"/>
-            <a:ext cx="10881360" cy="731520"/>
+          <p:cNvPr id="2" name="Shape 0"/>
+          <p:cNvSpPr/>
+          <p:nvPr/>
+        </p:nvSpPr>
+        <p:spPr>
+          <a:xfrm>
+            <a:off x="640080" y="502920"/>
+            <a:ext cx="1527048" cy="365760"/>
+          </a:xfrm>
+          <a:prstGeom prst="roundRect">
+            <a:avLst>
+              <a:gd name="adj" fmla="val 50000"/>
+            </a:avLst>
+          </a:prstGeom>
+          <a:solidFill>
+            <a:srgbClr val="F96167">
+              <a:alpha val="18000"/>
+            </a:srgbClr>
+          </a:solidFill>
+          <a:ln/>
+        </p:spPr>
+      </p:sp>
+      <p:sp>
+        <p:nvSpPr>
+          <p:cNvPr id="3" name="Text 1"/>
+          <p:cNvSpPr/>
+          <p:nvPr/>
+        </p:nvSpPr>
+        <p:spPr>
+          <a:xfrm>
+            <a:off x="640080" y="502920"/>
+            <a:ext cx="1527048" cy="365760"/>
           </a:xfrm>
           <a:prstGeom prst="rect">
             <a:avLst/>
@@ -3146,42 +3526,204 @@
           <a:bodyPr wrap="square" rtlCol="0" anchor="ctr"/>
           <a:lstStyle/>
           <a:p>
-            <a:pPr indent="0" marL="0">
-              <a:buNone/>
-            </a:pPr>
-            <a:r>
-              <a:rPr lang="en-US" sz="3200" b="1" dirty="0">
+            <a:pPr algn="ctr" indent="0" marL="0">
+              <a:buNone/>
+            </a:pPr>
+            <a:r>
+              <a:rPr lang="en-US" sz="1200" b="1" dirty="0">
+                <a:solidFill>
+                  <a:srgbClr val="F96167"/>
+                </a:solidFill>
+                <a:latin typeface="Calibri" pitchFamily="34" charset="0"/>
+                <a:ea typeface="Calibri" pitchFamily="34" charset="-122"/>
+                <a:cs typeface="Calibri" pitchFamily="34" charset="-120"/>
+              </a:rPr>
+              <a:t>✍️ Your turn</a:t>
+            </a:r>
+            <a:endParaRPr lang="en-US" sz="1200" dirty="0"/>
+          </a:p>
+        </p:txBody>
+      </p:sp>
+      <p:sp>
+        <p:nvSpPr>
+          <p:cNvPr id="4" name="Text 2"/>
+          <p:cNvSpPr/>
+          <p:nvPr/>
+        </p:nvSpPr>
+        <p:spPr>
+          <a:xfrm>
+            <a:off x="640080" y="1051560"/>
+            <a:ext cx="10881360" cy="548640"/>
+          </a:xfrm>
+          <a:prstGeom prst="rect">
+            <a:avLst/>
+          </a:prstGeom>
+          <a:noFill/>
+          <a:ln/>
+        </p:spPr>
+        <p:txBody>
+          <a:bodyPr wrap="square" rtlCol="0" anchor="ctr"/>
+          <a:lstStyle/>
+          <a:p>
+            <a:pPr indent="0" marL="0">
+              <a:buNone/>
+            </a:pPr>
+            <a:r>
+              <a:rPr lang="en-US" sz="2200" b="1" dirty="0">
                 <a:solidFill>
                   <a:srgbClr val="1E2761"/>
                 </a:solidFill>
-                <a:latin typeface="Cambria" pitchFamily="34" charset="0"/>
-                <a:ea typeface="Cambria" pitchFamily="34" charset="-122"/>
-                <a:cs typeface="Cambria" pitchFamily="34" charset="-120"/>
-              </a:rPr>
-              <a:t>The PES spectrum</a:t>
-            </a:r>
-            <a:endParaRPr lang="en-US" sz="3200" dirty="0"/>
-          </a:p>
-        </p:txBody>
-      </p:sp>
-      <p:sp>
-        <p:nvSpPr>
-          <p:cNvPr id="3" name="Shape 1"/>
-          <p:cNvSpPr/>
-          <p:nvPr/>
-        </p:nvSpPr>
-        <p:spPr>
-          <a:xfrm>
-            <a:off x="1293876" y="2011680"/>
-            <a:ext cx="0" cy="1554480"/>
+                <a:latin typeface="Calibri" pitchFamily="34" charset="0"/>
+                <a:ea typeface="Calibri" pitchFamily="34" charset="-122"/>
+                <a:cs typeface="Calibri" pitchFamily="34" charset="-120"/>
+              </a:rPr>
+              <a:t>🧩 Custom Lego accessories</a:t>
+            </a:r>
+            <a:endParaRPr lang="en-US" sz="2200" dirty="0"/>
+          </a:p>
+        </p:txBody>
+      </p:sp>
+      <p:sp>
+        <p:nvSpPr>
+          <p:cNvPr id="5" name="Shape 3"/>
+          <p:cNvSpPr/>
+          <p:nvPr/>
+        </p:nvSpPr>
+        <p:spPr>
+          <a:xfrm>
+            <a:off x="3566160" y="1920240"/>
+            <a:ext cx="5029200" cy="3108960"/>
+          </a:xfrm>
+          <a:prstGeom prst="roundRect">
+            <a:avLst>
+              <a:gd name="adj" fmla="val 4118"/>
+            </a:avLst>
+          </a:prstGeom>
+          <a:solidFill>
+            <a:srgbClr val="F4F5F7"/>
+          </a:solidFill>
+          <a:ln/>
+        </p:spPr>
+      </p:sp>
+      <p:sp>
+        <p:nvSpPr>
+          <p:cNvPr id="6" name="Text 4"/>
+          <p:cNvSpPr/>
+          <p:nvPr/>
+        </p:nvSpPr>
+        <p:spPr>
+          <a:xfrm>
+            <a:off x="3840480" y="2194560"/>
+            <a:ext cx="4480560" cy="365760"/>
+          </a:xfrm>
+          <a:prstGeom prst="rect">
+            <a:avLst/>
+          </a:prstGeom>
+          <a:noFill/>
+          <a:ln/>
+        </p:spPr>
+        <p:txBody>
+          <a:bodyPr wrap="square" rtlCol="0" anchor="ctr"/>
+          <a:lstStyle/>
+          <a:p>
+            <a:pPr indent="0" marL="0">
+              <a:buNone/>
+            </a:pPr>
+            <a:r>
+              <a:rPr lang="en-US" sz="1400" b="1" dirty="0">
+                <a:solidFill>
+                  <a:srgbClr val="5B5B5B"/>
+                </a:solidFill>
+                <a:latin typeface="Calibri" pitchFamily="34" charset="0"/>
+                <a:ea typeface="Calibri" pitchFamily="34" charset="-122"/>
+                <a:cs typeface="Calibri" pitchFamily="34" charset="-120"/>
+              </a:rPr>
+              <a:t>Your turn — work it out</a:t>
+            </a:r>
+            <a:endParaRPr lang="en-US" sz="1400" dirty="0"/>
+          </a:p>
+        </p:txBody>
+      </p:sp>
+      <p:sp>
+        <p:nvSpPr>
+          <p:cNvPr id="7" name="Text 5"/>
+          <p:cNvSpPr/>
+          <p:nvPr/>
+        </p:nvSpPr>
+        <p:spPr>
+          <a:xfrm>
+            <a:off x="3840480" y="2651760"/>
+            <a:ext cx="4480560" cy="1280160"/>
+          </a:xfrm>
+          <a:prstGeom prst="rect">
+            <a:avLst/>
+          </a:prstGeom>
+          <a:noFill/>
+          <a:ln/>
+        </p:spPr>
+        <p:txBody>
+          <a:bodyPr wrap="square" rtlCol="0" anchor="t"/>
+          <a:lstStyle/>
+          <a:p>
+            <a:pPr indent="0" marL="0">
+              <a:spcAft>
+                <a:spcPts val="800"/>
+              </a:spcAft>
+              <a:buNone/>
+            </a:pPr>
+            <a:r>
+              <a:rPr lang="en-US" sz="1500" dirty="0">
+                <a:solidFill>
+                  <a:srgbClr val="1A1A1A"/>
+                </a:solidFill>
+                <a:latin typeface="Calibri" pitchFamily="34" charset="0"/>
+                <a:ea typeface="Calibri" pitchFamily="34" charset="-122"/>
+                <a:cs typeface="Calibri" pitchFamily="34" charset="-120"/>
+              </a:rPr>
+              <a:t>Price: +10%</a:t>
+            </a:r>
+            <a:endParaRPr lang="en-US" sz="1500" dirty="0"/>
+          </a:p>
+          <a:p>
+            <a:pPr indent="0" marL="0">
+              <a:spcAft>
+                <a:spcPts val="800"/>
+              </a:spcAft>
+              <a:buNone/>
+            </a:pPr>
+            <a:r>
+              <a:rPr lang="en-US" sz="1500" dirty="0">
+                <a:solidFill>
+                  <a:srgbClr val="1A1A1A"/>
+                </a:solidFill>
+                <a:latin typeface="Calibri" pitchFamily="34" charset="0"/>
+                <a:ea typeface="Calibri" pitchFamily="34" charset="-122"/>
+                <a:cs typeface="Calibri" pitchFamily="34" charset="-120"/>
+              </a:rPr>
+              <a:t>Quantity supplied: +30% (spare printer capacity)</a:t>
+            </a:r>
+            <a:endParaRPr lang="en-US" sz="1500" dirty="0"/>
+          </a:p>
+        </p:txBody>
+      </p:sp>
+      <p:sp>
+        <p:nvSpPr>
+          <p:cNvPr id="8" name="Shape 6"/>
+          <p:cNvSpPr/>
+          <p:nvPr/>
+        </p:nvSpPr>
+        <p:spPr>
+          <a:xfrm>
+            <a:off x="3840480" y="4343400"/>
+            <a:ext cx="1828800" cy="0"/>
           </a:xfrm>
           <a:prstGeom prst="line">
             <a:avLst/>
           </a:prstGeom>
           <a:noFill/>
-          <a:ln w="15875">
+          <a:ln w="19050">
             <a:solidFill>
-              <a:srgbClr val="1A1A1A"/>
+              <a:srgbClr val="5B5B5B"/>
             </a:solidFill>
             <a:prstDash val="solid"/>
           </a:ln>
@@ -3189,22 +3731,61 @@
       </p:sp>
       <p:sp>
         <p:nvSpPr>
-          <p:cNvPr id="4" name="Shape 2"/>
-          <p:cNvSpPr/>
-          <p:nvPr/>
-        </p:nvSpPr>
-        <p:spPr>
-          <a:xfrm>
-            <a:off x="1293876" y="3566160"/>
-            <a:ext cx="1554480" cy="0"/>
+          <p:cNvPr id="9" name="Text 7"/>
+          <p:cNvSpPr/>
+          <p:nvPr/>
+        </p:nvSpPr>
+        <p:spPr>
+          <a:xfrm>
+            <a:off x="3840480" y="3977640"/>
+            <a:ext cx="4206240" cy="320040"/>
+          </a:xfrm>
+          <a:prstGeom prst="rect">
+            <a:avLst/>
+          </a:prstGeom>
+          <a:noFill/>
+          <a:ln/>
+        </p:spPr>
+        <p:txBody>
+          <a:bodyPr wrap="square" rtlCol="0" anchor="ctr"/>
+          <a:lstStyle/>
+          <a:p>
+            <a:pPr indent="0" marL="0">
+              <a:buNone/>
+            </a:pPr>
+            <a:r>
+              <a:rPr lang="en-US" sz="1400" dirty="0">
+                <a:solidFill>
+                  <a:srgbClr val="1A1A1A"/>
+                </a:solidFill>
+                <a:latin typeface="Calibri" pitchFamily="34" charset="0"/>
+                <a:ea typeface="Calibri" pitchFamily="34" charset="-122"/>
+                <a:cs typeface="Calibri" pitchFamily="34" charset="-120"/>
+              </a:rPr>
+              <a:t>TR before = $____</a:t>
+            </a:r>
+            <a:endParaRPr lang="en-US" sz="1400" dirty="0"/>
+          </a:p>
+        </p:txBody>
+      </p:sp>
+      <p:sp>
+        <p:nvSpPr>
+          <p:cNvPr id="10" name="Shape 8"/>
+          <p:cNvSpPr/>
+          <p:nvPr/>
+        </p:nvSpPr>
+        <p:spPr>
+          <a:xfrm>
+            <a:off x="3840480" y="4709160"/>
+            <a:ext cx="1828800" cy="0"/>
           </a:xfrm>
           <a:prstGeom prst="line">
             <a:avLst/>
           </a:prstGeom>
           <a:noFill/>
-          <a:ln w="15875">
+          <a:ln w="19050">
             <a:solidFill>
-              <a:srgbClr val="1A1A1A"/>
+              <a:srgbClr val="5B5B5B"/>
             </a:solidFill>
             <a:prstDash val="solid"/>
           </a:ln>
@@ -3212,37 +3793,14 @@
       </p:sp>
       <p:sp>
         <p:nvSpPr>
-          <p:cNvPr id="5" name="Shape 3"/>
-          <p:cNvSpPr/>
-          <p:nvPr/>
-        </p:nvSpPr>
-        <p:spPr>
-          <a:xfrm>
-            <a:off x="2071116" y="2244852"/>
-            <a:ext cx="0" cy="1088136"/>
-          </a:xfrm>
-          <a:prstGeom prst="line">
-            <a:avLst/>
-          </a:prstGeom>
-          <a:noFill/>
-          <a:ln w="31750">
-            <a:solidFill>
-              <a:srgbClr val="1E2761"/>
-            </a:solidFill>
-            <a:prstDash val="solid"/>
-          </a:ln>
-        </p:spPr>
-      </p:sp>
-      <p:sp>
-        <p:nvSpPr>
-          <p:cNvPr id="6" name="Text 4"/>
-          <p:cNvSpPr/>
-          <p:nvPr/>
-        </p:nvSpPr>
-        <p:spPr>
-          <a:xfrm>
-            <a:off x="1019556" y="3703320"/>
-            <a:ext cx="2103120" cy="320040"/>
+          <p:cNvPr id="11" name="Text 9"/>
+          <p:cNvSpPr/>
+          <p:nvPr/>
+        </p:nvSpPr>
+        <p:spPr>
+          <a:xfrm>
+            <a:off x="3840480" y="4343400"/>
+            <a:ext cx="4206240" cy="320040"/>
           </a:xfrm>
           <a:prstGeom prst="rect">
             <a:avLst/>
@@ -3254,648 +3812,21 @@
           <a:bodyPr wrap="square" rtlCol="0" anchor="ctr"/>
           <a:lstStyle/>
           <a:p>
-            <a:pPr algn="ctr" indent="0" marL="0">
-              <a:buNone/>
-            </a:pPr>
-            <a:r>
-              <a:rPr lang="en-US" sz="1200" b="1" dirty="0">
-                <a:solidFill>
-                  <a:srgbClr val="1E2761"/>
-                </a:solidFill>
-                <a:latin typeface="Calibri" pitchFamily="34" charset="0"/>
-                <a:ea typeface="Calibri" pitchFamily="34" charset="-122"/>
-                <a:cs typeface="Calibri" pitchFamily="34" charset="-120"/>
-              </a:rPr>
-              <a:t>Perfectly inelastic</a:t>
-            </a:r>
-            <a:endParaRPr lang="en-US" sz="1200" dirty="0"/>
-          </a:p>
-        </p:txBody>
-      </p:sp>
-      <p:sp>
-        <p:nvSpPr>
-          <p:cNvPr id="7" name="Text 5"/>
-          <p:cNvSpPr/>
-          <p:nvPr/>
-        </p:nvSpPr>
-        <p:spPr>
-          <a:xfrm>
-            <a:off x="1019556" y="4023360"/>
-            <a:ext cx="2103120" cy="274320"/>
-          </a:xfrm>
-          <a:prstGeom prst="rect">
-            <a:avLst/>
-          </a:prstGeom>
-          <a:noFill/>
-          <a:ln/>
-        </p:spPr>
-        <p:txBody>
-          <a:bodyPr wrap="square" rtlCol="0" anchor="ctr"/>
-          <a:lstStyle/>
-          <a:p>
-            <a:pPr algn="ctr" indent="0" marL="0">
-              <a:buNone/>
-            </a:pPr>
-            <a:r>
-              <a:rPr lang="en-US" sz="1100" dirty="0">
-                <a:solidFill>
-                  <a:srgbClr val="5B5B5B"/>
-                </a:solidFill>
-                <a:latin typeface="Calibri" pitchFamily="34" charset="0"/>
-                <a:ea typeface="Calibri" pitchFamily="34" charset="-122"/>
-                <a:cs typeface="Calibri" pitchFamily="34" charset="-120"/>
-              </a:rPr>
-              <a:t>PES = 0</a:t>
-            </a:r>
-            <a:endParaRPr lang="en-US" sz="1100" dirty="0"/>
-          </a:p>
-        </p:txBody>
-      </p:sp>
-      <p:sp>
-        <p:nvSpPr>
-          <p:cNvPr id="8" name="Shape 6"/>
-          <p:cNvSpPr/>
-          <p:nvPr/>
-        </p:nvSpPr>
-        <p:spPr>
-          <a:xfrm>
-            <a:off x="3305556" y="2011680"/>
-            <a:ext cx="0" cy="1554480"/>
-          </a:xfrm>
-          <a:prstGeom prst="line">
-            <a:avLst/>
-          </a:prstGeom>
-          <a:noFill/>
-          <a:ln w="15875">
-            <a:solidFill>
-              <a:srgbClr val="1A1A1A"/>
-            </a:solidFill>
-            <a:prstDash val="solid"/>
-          </a:ln>
-        </p:spPr>
-      </p:sp>
-      <p:sp>
-        <p:nvSpPr>
-          <p:cNvPr id="9" name="Shape 7"/>
-          <p:cNvSpPr/>
-          <p:nvPr/>
-        </p:nvSpPr>
-        <p:spPr>
-          <a:xfrm>
-            <a:off x="3305556" y="3566160"/>
-            <a:ext cx="1554480" cy="0"/>
-          </a:xfrm>
-          <a:prstGeom prst="line">
-            <a:avLst/>
-          </a:prstGeom>
-          <a:noFill/>
-          <a:ln w="15875">
-            <a:solidFill>
-              <a:srgbClr val="1A1A1A"/>
-            </a:solidFill>
-            <a:prstDash val="solid"/>
-          </a:ln>
-        </p:spPr>
-      </p:sp>
-      <p:sp>
-        <p:nvSpPr>
-          <p:cNvPr id="10" name="Shape 8"/>
-          <p:cNvSpPr/>
-          <p:nvPr/>
-        </p:nvSpPr>
-        <p:spPr>
-          <a:xfrm flipV="1">
-            <a:off x="3802990" y="2244852"/>
-            <a:ext cx="559613" cy="1088136"/>
-          </a:xfrm>
-          <a:prstGeom prst="line">
-            <a:avLst/>
-          </a:prstGeom>
-          <a:noFill/>
-          <a:ln w="31750">
-            <a:solidFill>
-              <a:srgbClr val="1E2761"/>
-            </a:solidFill>
-            <a:prstDash val="solid"/>
-          </a:ln>
-        </p:spPr>
-      </p:sp>
-      <p:sp>
-        <p:nvSpPr>
-          <p:cNvPr id="11" name="Text 9"/>
-          <p:cNvSpPr/>
-          <p:nvPr/>
-        </p:nvSpPr>
-        <p:spPr>
-          <a:xfrm>
-            <a:off x="3031236" y="3703320"/>
-            <a:ext cx="2103120" cy="320040"/>
-          </a:xfrm>
-          <a:prstGeom prst="rect">
-            <a:avLst/>
-          </a:prstGeom>
-          <a:noFill/>
-          <a:ln/>
-        </p:spPr>
-        <p:txBody>
-          <a:bodyPr wrap="square" rtlCol="0" anchor="ctr"/>
-          <a:lstStyle/>
-          <a:p>
-            <a:pPr algn="ctr" indent="0" marL="0">
-              <a:buNone/>
-            </a:pPr>
-            <a:r>
-              <a:rPr lang="en-US" sz="1200" b="1" dirty="0">
-                <a:solidFill>
-                  <a:srgbClr val="1E2761"/>
-                </a:solidFill>
-                <a:latin typeface="Calibri" pitchFamily="34" charset="0"/>
-                <a:ea typeface="Calibri" pitchFamily="34" charset="-122"/>
-                <a:cs typeface="Calibri" pitchFamily="34" charset="-120"/>
-              </a:rPr>
-              <a:t>Inelastic</a:t>
-            </a:r>
-            <a:endParaRPr lang="en-US" sz="1200" dirty="0"/>
-          </a:p>
-        </p:txBody>
-      </p:sp>
-      <p:sp>
-        <p:nvSpPr>
-          <p:cNvPr id="12" name="Text 10"/>
-          <p:cNvSpPr/>
-          <p:nvPr/>
-        </p:nvSpPr>
-        <p:spPr>
-          <a:xfrm>
-            <a:off x="3031236" y="4023360"/>
-            <a:ext cx="2103120" cy="274320"/>
-          </a:xfrm>
-          <a:prstGeom prst="rect">
-            <a:avLst/>
-          </a:prstGeom>
-          <a:noFill/>
-          <a:ln/>
-        </p:spPr>
-        <p:txBody>
-          <a:bodyPr wrap="square" rtlCol="0" anchor="ctr"/>
-          <a:lstStyle/>
-          <a:p>
-            <a:pPr algn="ctr" indent="0" marL="0">
-              <a:buNone/>
-            </a:pPr>
-            <a:r>
-              <a:rPr lang="en-US" sz="1100" dirty="0">
-                <a:solidFill>
-                  <a:srgbClr val="5B5B5B"/>
-                </a:solidFill>
-                <a:latin typeface="Calibri" pitchFamily="34" charset="0"/>
-                <a:ea typeface="Calibri" pitchFamily="34" charset="-122"/>
-                <a:cs typeface="Calibri" pitchFamily="34" charset="-120"/>
-              </a:rPr>
-              <a:t>0 &lt; PES &lt; 1</a:t>
-            </a:r>
-            <a:endParaRPr lang="en-US" sz="1100" dirty="0"/>
-          </a:p>
-        </p:txBody>
-      </p:sp>
-      <p:sp>
-        <p:nvSpPr>
-          <p:cNvPr id="13" name="Shape 11"/>
-          <p:cNvSpPr/>
-          <p:nvPr/>
-        </p:nvSpPr>
-        <p:spPr>
-          <a:xfrm>
-            <a:off x="5317236" y="2011680"/>
-            <a:ext cx="0" cy="1554480"/>
-          </a:xfrm>
-          <a:prstGeom prst="line">
-            <a:avLst/>
-          </a:prstGeom>
-          <a:noFill/>
-          <a:ln w="15875">
-            <a:solidFill>
-              <a:srgbClr val="1A1A1A"/>
-            </a:solidFill>
-            <a:prstDash val="solid"/>
-          </a:ln>
-        </p:spPr>
-      </p:sp>
-      <p:sp>
-        <p:nvSpPr>
-          <p:cNvPr id="14" name="Shape 12"/>
-          <p:cNvSpPr/>
-          <p:nvPr/>
-        </p:nvSpPr>
-        <p:spPr>
-          <a:xfrm>
-            <a:off x="5317236" y="3566160"/>
-            <a:ext cx="1554480" cy="0"/>
-          </a:xfrm>
-          <a:prstGeom prst="line">
-            <a:avLst/>
-          </a:prstGeom>
-          <a:noFill/>
-          <a:ln w="15875">
-            <a:solidFill>
-              <a:srgbClr val="1A1A1A"/>
-            </a:solidFill>
-            <a:prstDash val="solid"/>
-          </a:ln>
-        </p:spPr>
-      </p:sp>
-      <p:sp>
-        <p:nvSpPr>
-          <p:cNvPr id="15" name="Shape 13"/>
-          <p:cNvSpPr/>
-          <p:nvPr/>
-        </p:nvSpPr>
-        <p:spPr>
-          <a:xfrm flipV="1">
-            <a:off x="5550408" y="2244852"/>
-            <a:ext cx="1088136" cy="1088136"/>
-          </a:xfrm>
-          <a:prstGeom prst="line">
-            <a:avLst/>
-          </a:prstGeom>
-          <a:noFill/>
-          <a:ln w="31750">
-            <a:solidFill>
-              <a:srgbClr val="F96167"/>
-            </a:solidFill>
-            <a:prstDash val="solid"/>
-          </a:ln>
-        </p:spPr>
-      </p:sp>
-      <p:sp>
-        <p:nvSpPr>
-          <p:cNvPr id="16" name="Text 14"/>
-          <p:cNvSpPr/>
-          <p:nvPr/>
-        </p:nvSpPr>
-        <p:spPr>
-          <a:xfrm>
-            <a:off x="5042916" y="3703320"/>
-            <a:ext cx="2103120" cy="320040"/>
-          </a:xfrm>
-          <a:prstGeom prst="rect">
-            <a:avLst/>
-          </a:prstGeom>
-          <a:noFill/>
-          <a:ln/>
-        </p:spPr>
-        <p:txBody>
-          <a:bodyPr wrap="square" rtlCol="0" anchor="ctr"/>
-          <a:lstStyle/>
-          <a:p>
-            <a:pPr algn="ctr" indent="0" marL="0">
-              <a:buNone/>
-            </a:pPr>
-            <a:r>
-              <a:rPr lang="en-US" sz="1200" b="1" dirty="0">
-                <a:solidFill>
-                  <a:srgbClr val="1E2761"/>
-                </a:solidFill>
-                <a:latin typeface="Calibri" pitchFamily="34" charset="0"/>
-                <a:ea typeface="Calibri" pitchFamily="34" charset="-122"/>
-                <a:cs typeface="Calibri" pitchFamily="34" charset="-120"/>
-              </a:rPr>
-              <a:t>Unitary</a:t>
-            </a:r>
-            <a:endParaRPr lang="en-US" sz="1200" dirty="0"/>
-          </a:p>
-        </p:txBody>
-      </p:sp>
-      <p:sp>
-        <p:nvSpPr>
-          <p:cNvPr id="17" name="Text 15"/>
-          <p:cNvSpPr/>
-          <p:nvPr/>
-        </p:nvSpPr>
-        <p:spPr>
-          <a:xfrm>
-            <a:off x="5042916" y="4023360"/>
-            <a:ext cx="2103120" cy="274320"/>
-          </a:xfrm>
-          <a:prstGeom prst="rect">
-            <a:avLst/>
-          </a:prstGeom>
-          <a:noFill/>
-          <a:ln/>
-        </p:spPr>
-        <p:txBody>
-          <a:bodyPr wrap="square" rtlCol="0" anchor="ctr"/>
-          <a:lstStyle/>
-          <a:p>
-            <a:pPr algn="ctr" indent="0" marL="0">
-              <a:buNone/>
-            </a:pPr>
-            <a:r>
-              <a:rPr lang="en-US" sz="1100" dirty="0">
-                <a:solidFill>
-                  <a:srgbClr val="5B5B5B"/>
-                </a:solidFill>
-                <a:latin typeface="Calibri" pitchFamily="34" charset="0"/>
-                <a:ea typeface="Calibri" pitchFamily="34" charset="-122"/>
-                <a:cs typeface="Calibri" pitchFamily="34" charset="-120"/>
-              </a:rPr>
-              <a:t>PES = 1</a:t>
-            </a:r>
-            <a:endParaRPr lang="en-US" sz="1100" dirty="0"/>
-          </a:p>
-        </p:txBody>
-      </p:sp>
-      <p:sp>
-        <p:nvSpPr>
-          <p:cNvPr id="18" name="Shape 16"/>
-          <p:cNvSpPr/>
-          <p:nvPr/>
-        </p:nvSpPr>
-        <p:spPr>
-          <a:xfrm>
-            <a:off x="7328916" y="2011680"/>
-            <a:ext cx="0" cy="1554480"/>
-          </a:xfrm>
-          <a:prstGeom prst="line">
-            <a:avLst/>
-          </a:prstGeom>
-          <a:noFill/>
-          <a:ln w="15875">
-            <a:solidFill>
-              <a:srgbClr val="1A1A1A"/>
-            </a:solidFill>
-            <a:prstDash val="solid"/>
-          </a:ln>
-        </p:spPr>
-      </p:sp>
-      <p:sp>
-        <p:nvSpPr>
-          <p:cNvPr id="19" name="Shape 17"/>
-          <p:cNvSpPr/>
-          <p:nvPr/>
-        </p:nvSpPr>
-        <p:spPr>
-          <a:xfrm>
-            <a:off x="7328916" y="3566160"/>
-            <a:ext cx="1554480" cy="0"/>
-          </a:xfrm>
-          <a:prstGeom prst="line">
-            <a:avLst/>
-          </a:prstGeom>
-          <a:noFill/>
-          <a:ln w="15875">
-            <a:solidFill>
-              <a:srgbClr val="1A1A1A"/>
-            </a:solidFill>
-            <a:prstDash val="solid"/>
-          </a:ln>
-        </p:spPr>
-      </p:sp>
-      <p:sp>
-        <p:nvSpPr>
-          <p:cNvPr id="20" name="Shape 18"/>
-          <p:cNvSpPr/>
-          <p:nvPr/>
-        </p:nvSpPr>
-        <p:spPr>
-          <a:xfrm>
-            <a:off x="7562088" y="2555748"/>
-            <a:ext cx="1088136" cy="466344"/>
-          </a:xfrm>
-          <a:prstGeom prst="line">
-            <a:avLst/>
-          </a:prstGeom>
-          <a:noFill/>
-          <a:ln w="31750">
-            <a:solidFill>
-              <a:srgbClr val="1BAF7A"/>
-            </a:solidFill>
-            <a:prstDash val="solid"/>
-          </a:ln>
-        </p:spPr>
-      </p:sp>
-      <p:sp>
-        <p:nvSpPr>
-          <p:cNvPr id="21" name="Text 19"/>
-          <p:cNvSpPr/>
-          <p:nvPr/>
-        </p:nvSpPr>
-        <p:spPr>
-          <a:xfrm>
-            <a:off x="7054596" y="3703320"/>
-            <a:ext cx="2103120" cy="320040"/>
-          </a:xfrm>
-          <a:prstGeom prst="rect">
-            <a:avLst/>
-          </a:prstGeom>
-          <a:noFill/>
-          <a:ln/>
-        </p:spPr>
-        <p:txBody>
-          <a:bodyPr wrap="square" rtlCol="0" anchor="ctr"/>
-          <a:lstStyle/>
-          <a:p>
-            <a:pPr algn="ctr" indent="0" marL="0">
-              <a:buNone/>
-            </a:pPr>
-            <a:r>
-              <a:rPr lang="en-US" sz="1200" b="1" dirty="0">
-                <a:solidFill>
-                  <a:srgbClr val="1E2761"/>
-                </a:solidFill>
-                <a:latin typeface="Calibri" pitchFamily="34" charset="0"/>
-                <a:ea typeface="Calibri" pitchFamily="34" charset="-122"/>
-                <a:cs typeface="Calibri" pitchFamily="34" charset="-120"/>
-              </a:rPr>
-              <a:t>Elastic</a:t>
-            </a:r>
-            <a:endParaRPr lang="en-US" sz="1200" dirty="0"/>
-          </a:p>
-        </p:txBody>
-      </p:sp>
-      <p:sp>
-        <p:nvSpPr>
-          <p:cNvPr id="22" name="Text 20"/>
-          <p:cNvSpPr/>
-          <p:nvPr/>
-        </p:nvSpPr>
-        <p:spPr>
-          <a:xfrm>
-            <a:off x="7054596" y="4023360"/>
-            <a:ext cx="2103120" cy="274320"/>
-          </a:xfrm>
-          <a:prstGeom prst="rect">
-            <a:avLst/>
-          </a:prstGeom>
-          <a:noFill/>
-          <a:ln/>
-        </p:spPr>
-        <p:txBody>
-          <a:bodyPr wrap="square" rtlCol="0" anchor="ctr"/>
-          <a:lstStyle/>
-          <a:p>
-            <a:pPr algn="ctr" indent="0" marL="0">
-              <a:buNone/>
-            </a:pPr>
-            <a:r>
-              <a:rPr lang="en-US" sz="1100" dirty="0">
-                <a:solidFill>
-                  <a:srgbClr val="5B5B5B"/>
-                </a:solidFill>
-                <a:latin typeface="Calibri" pitchFamily="34" charset="0"/>
-                <a:ea typeface="Calibri" pitchFamily="34" charset="-122"/>
-                <a:cs typeface="Calibri" pitchFamily="34" charset="-120"/>
-              </a:rPr>
-              <a:t>PES &gt; 1</a:t>
-            </a:r>
-            <a:endParaRPr lang="en-US" sz="1100" dirty="0"/>
-          </a:p>
-        </p:txBody>
-      </p:sp>
-      <p:sp>
-        <p:nvSpPr>
-          <p:cNvPr id="23" name="Shape 21"/>
-          <p:cNvSpPr/>
-          <p:nvPr/>
-        </p:nvSpPr>
-        <p:spPr>
-          <a:xfrm>
-            <a:off x="9340596" y="2011680"/>
-            <a:ext cx="0" cy="1554480"/>
-          </a:xfrm>
-          <a:prstGeom prst="line">
-            <a:avLst/>
-          </a:prstGeom>
-          <a:noFill/>
-          <a:ln w="15875">
-            <a:solidFill>
-              <a:srgbClr val="1A1A1A"/>
-            </a:solidFill>
-            <a:prstDash val="solid"/>
-          </a:ln>
-        </p:spPr>
-      </p:sp>
-      <p:sp>
-        <p:nvSpPr>
-          <p:cNvPr id="24" name="Shape 22"/>
-          <p:cNvSpPr/>
-          <p:nvPr/>
-        </p:nvSpPr>
-        <p:spPr>
-          <a:xfrm>
-            <a:off x="9340596" y="3566160"/>
-            <a:ext cx="1554480" cy="0"/>
-          </a:xfrm>
-          <a:prstGeom prst="line">
-            <a:avLst/>
-          </a:prstGeom>
-          <a:noFill/>
-          <a:ln w="15875">
-            <a:solidFill>
-              <a:srgbClr val="1A1A1A"/>
-            </a:solidFill>
-            <a:prstDash val="solid"/>
-          </a:ln>
-        </p:spPr>
-      </p:sp>
-      <p:sp>
-        <p:nvSpPr>
-          <p:cNvPr id="25" name="Shape 23"/>
-          <p:cNvSpPr/>
-          <p:nvPr/>
-        </p:nvSpPr>
-        <p:spPr>
-          <a:xfrm>
-            <a:off x="9573768" y="2788920"/>
-            <a:ext cx="1088136" cy="0"/>
-          </a:xfrm>
-          <a:prstGeom prst="line">
-            <a:avLst/>
-          </a:prstGeom>
-          <a:noFill/>
-          <a:ln w="31750">
-            <a:solidFill>
-              <a:srgbClr val="1BAF7A"/>
-            </a:solidFill>
-            <a:prstDash val="solid"/>
-          </a:ln>
-        </p:spPr>
-      </p:sp>
-      <p:sp>
-        <p:nvSpPr>
-          <p:cNvPr id="26" name="Text 24"/>
-          <p:cNvSpPr/>
-          <p:nvPr/>
-        </p:nvSpPr>
-        <p:spPr>
-          <a:xfrm>
-            <a:off x="9066276" y="3703320"/>
-            <a:ext cx="2103120" cy="320040"/>
-          </a:xfrm>
-          <a:prstGeom prst="rect">
-            <a:avLst/>
-          </a:prstGeom>
-          <a:noFill/>
-          <a:ln/>
-        </p:spPr>
-        <p:txBody>
-          <a:bodyPr wrap="square" rtlCol="0" anchor="ctr"/>
-          <a:lstStyle/>
-          <a:p>
-            <a:pPr algn="ctr" indent="0" marL="0">
-              <a:buNone/>
-            </a:pPr>
-            <a:r>
-              <a:rPr lang="en-US" sz="1200" b="1" dirty="0">
-                <a:solidFill>
-                  <a:srgbClr val="1E2761"/>
-                </a:solidFill>
-                <a:latin typeface="Calibri" pitchFamily="34" charset="0"/>
-                <a:ea typeface="Calibri" pitchFamily="34" charset="-122"/>
-                <a:cs typeface="Calibri" pitchFamily="34" charset="-120"/>
-              </a:rPr>
-              <a:t>Perfectly elastic</a:t>
-            </a:r>
-            <a:endParaRPr lang="en-US" sz="1200" dirty="0"/>
-          </a:p>
-        </p:txBody>
-      </p:sp>
-      <p:sp>
-        <p:nvSpPr>
-          <p:cNvPr id="27" name="Text 25"/>
-          <p:cNvSpPr/>
-          <p:nvPr/>
-        </p:nvSpPr>
-        <p:spPr>
-          <a:xfrm>
-            <a:off x="9066276" y="4023360"/>
-            <a:ext cx="2103120" cy="274320"/>
-          </a:xfrm>
-          <a:prstGeom prst="rect">
-            <a:avLst/>
-          </a:prstGeom>
-          <a:noFill/>
-          <a:ln/>
-        </p:spPr>
-        <p:txBody>
-          <a:bodyPr wrap="square" rtlCol="0" anchor="ctr"/>
-          <a:lstStyle/>
-          <a:p>
-            <a:pPr algn="ctr" indent="0" marL="0">
-              <a:buNone/>
-            </a:pPr>
-            <a:r>
-              <a:rPr lang="en-US" sz="1100" dirty="0">
-                <a:solidFill>
-                  <a:srgbClr val="5B5B5B"/>
-                </a:solidFill>
-                <a:latin typeface="Calibri" pitchFamily="34" charset="0"/>
-                <a:ea typeface="Calibri" pitchFamily="34" charset="-122"/>
-                <a:cs typeface="Calibri" pitchFamily="34" charset="-120"/>
-              </a:rPr>
-              <a:t>PES = ∞</a:t>
-            </a:r>
-            <a:endParaRPr lang="en-US" sz="1100" dirty="0"/>
+            <a:pPr indent="0" marL="0">
+              <a:buNone/>
+            </a:pPr>
+            <a:r>
+              <a:rPr lang="en-US" sz="1400" dirty="0">
+                <a:solidFill>
+                  <a:srgbClr val="1A1A1A"/>
+                </a:solidFill>
+                <a:latin typeface="Calibri" pitchFamily="34" charset="0"/>
+                <a:ea typeface="Calibri" pitchFamily="34" charset="-122"/>
+                <a:cs typeface="Calibri" pitchFamily="34" charset="-120"/>
+              </a:rPr>
+              <a:t>TR after = $____</a:t>
+            </a:r>
+            <a:endParaRPr lang="en-US" sz="1400" dirty="0"/>
           </a:p>
         </p:txBody>
       </p:sp>
@@ -3933,14 +3864,38 @@
       </p:grpSpPr>
       <p:sp>
         <p:nvSpPr>
-          <p:cNvPr id="2" name="Text 0"/>
-          <p:cNvSpPr/>
-          <p:nvPr/>
-        </p:nvSpPr>
-        <p:spPr>
-          <a:xfrm>
-            <a:off x="640080" y="548640"/>
-            <a:ext cx="10881360" cy="731520"/>
+          <p:cNvPr id="2" name="Shape 0"/>
+          <p:cNvSpPr/>
+          <p:nvPr/>
+        </p:nvSpPr>
+        <p:spPr>
+          <a:xfrm>
+            <a:off x="640080" y="502920"/>
+            <a:ext cx="1325880" cy="365760"/>
+          </a:xfrm>
+          <a:prstGeom prst="roundRect">
+            <a:avLst>
+              <a:gd name="adj" fmla="val 50000"/>
+            </a:avLst>
+          </a:prstGeom>
+          <a:solidFill>
+            <a:srgbClr val="1BAF7A">
+              <a:alpha val="18000"/>
+            </a:srgbClr>
+          </a:solidFill>
+          <a:ln/>
+        </p:spPr>
+      </p:sp>
+      <p:sp>
+        <p:nvSpPr>
+          <p:cNvPr id="3" name="Text 1"/>
+          <p:cNvSpPr/>
+          <p:nvPr/>
+        </p:nvSpPr>
+        <p:spPr>
+          <a:xfrm>
+            <a:off x="640080" y="502920"/>
+            <a:ext cx="1325880" cy="365760"/>
           </a:xfrm>
           <a:prstGeom prst="rect">
             <a:avLst/>
@@ -3952,330 +3907,222 @@
           <a:bodyPr wrap="square" rtlCol="0" anchor="ctr"/>
           <a:lstStyle/>
           <a:p>
-            <a:pPr indent="0" marL="0">
-              <a:buNone/>
-            </a:pPr>
-            <a:r>
-              <a:rPr lang="en-US" sz="3000" b="1" dirty="0">
+            <a:pPr algn="ctr" indent="0" marL="0">
+              <a:buNone/>
+            </a:pPr>
+            <a:r>
+              <a:rPr lang="en-US" sz="1200" b="1" dirty="0">
+                <a:solidFill>
+                  <a:srgbClr val="1BAF7A"/>
+                </a:solidFill>
+                <a:latin typeface="Calibri" pitchFamily="34" charset="0"/>
+                <a:ea typeface="Calibri" pitchFamily="34" charset="-122"/>
+                <a:cs typeface="Calibri" pitchFamily="34" charset="-120"/>
+              </a:rPr>
+              <a:t>✅ Revealed</a:t>
+            </a:r>
+            <a:endParaRPr lang="en-US" sz="1200" dirty="0"/>
+          </a:p>
+        </p:txBody>
+      </p:sp>
+      <p:sp>
+        <p:nvSpPr>
+          <p:cNvPr id="4" name="Text 2"/>
+          <p:cNvSpPr/>
+          <p:nvPr/>
+        </p:nvSpPr>
+        <p:spPr>
+          <a:xfrm>
+            <a:off x="640080" y="1051560"/>
+            <a:ext cx="10881360" cy="548640"/>
+          </a:xfrm>
+          <a:prstGeom prst="rect">
+            <a:avLst/>
+          </a:prstGeom>
+          <a:noFill/>
+          <a:ln/>
+        </p:spPr>
+        <p:txBody>
+          <a:bodyPr wrap="square" rtlCol="0" anchor="ctr"/>
+          <a:lstStyle/>
+          <a:p>
+            <a:pPr indent="0" marL="0">
+              <a:buNone/>
+            </a:pPr>
+            <a:r>
+              <a:rPr lang="en-US" sz="2200" b="1" dirty="0">
                 <a:solidFill>
                   <a:srgbClr val="1E2761"/>
+                </a:solidFill>
+                <a:latin typeface="Calibri" pitchFamily="34" charset="0"/>
+                <a:ea typeface="Calibri" pitchFamily="34" charset="-122"/>
+                <a:cs typeface="Calibri" pitchFamily="34" charset="-120"/>
+              </a:rPr>
+              <a:t>🧩 Custom Lego accessories — answer</a:t>
+            </a:r>
+            <a:endParaRPr lang="en-US" sz="2200" dirty="0"/>
+          </a:p>
+        </p:txBody>
+      </p:sp>
+      <p:sp>
+        <p:nvSpPr>
+          <p:cNvPr id="5" name="Shape 3"/>
+          <p:cNvSpPr/>
+          <p:nvPr/>
+        </p:nvSpPr>
+        <p:spPr>
+          <a:xfrm>
+            <a:off x="3566160" y="1920240"/>
+            <a:ext cx="5029200" cy="3108960"/>
+          </a:xfrm>
+          <a:prstGeom prst="roundRect">
+            <a:avLst>
+              <a:gd name="adj" fmla="val 4118"/>
+            </a:avLst>
+          </a:prstGeom>
+          <a:solidFill>
+            <a:srgbClr val="F4F5F7"/>
+          </a:solidFill>
+          <a:ln/>
+        </p:spPr>
+      </p:sp>
+      <p:sp>
+        <p:nvSpPr>
+          <p:cNvPr id="6" name="Text 4"/>
+          <p:cNvSpPr/>
+          <p:nvPr/>
+        </p:nvSpPr>
+        <p:spPr>
+          <a:xfrm>
+            <a:off x="3840480" y="2194560"/>
+            <a:ext cx="4480560" cy="365760"/>
+          </a:xfrm>
+          <a:prstGeom prst="rect">
+            <a:avLst/>
+          </a:prstGeom>
+          <a:noFill/>
+          <a:ln/>
+        </p:spPr>
+        <p:txBody>
+          <a:bodyPr wrap="square" rtlCol="0" anchor="ctr"/>
+          <a:lstStyle/>
+          <a:p>
+            <a:pPr indent="0" marL="0">
+              <a:buNone/>
+            </a:pPr>
+            <a:r>
+              <a:rPr lang="en-US" sz="1400" b="1" dirty="0">
+                <a:solidFill>
+                  <a:srgbClr val="5B5B5B"/>
+                </a:solidFill>
+                <a:latin typeface="Calibri" pitchFamily="34" charset="0"/>
+                <a:ea typeface="Calibri" pitchFamily="34" charset="-122"/>
+                <a:cs typeface="Calibri" pitchFamily="34" charset="-120"/>
+              </a:rPr>
+              <a:t>Check your answer</a:t>
+            </a:r>
+            <a:endParaRPr lang="en-US" sz="1400" dirty="0"/>
+          </a:p>
+        </p:txBody>
+      </p:sp>
+      <p:sp>
+        <p:nvSpPr>
+          <p:cNvPr id="7" name="Text 5"/>
+          <p:cNvSpPr/>
+          <p:nvPr/>
+        </p:nvSpPr>
+        <p:spPr>
+          <a:xfrm>
+            <a:off x="3840480" y="2651760"/>
+            <a:ext cx="4480560" cy="1463040"/>
+          </a:xfrm>
+          <a:prstGeom prst="rect">
+            <a:avLst/>
+          </a:prstGeom>
+          <a:noFill/>
+          <a:ln/>
+        </p:spPr>
+        <p:txBody>
+          <a:bodyPr wrap="square" rtlCol="0" anchor="t"/>
+          <a:lstStyle/>
+          <a:p>
+            <a:pPr indent="0" marL="0">
+              <a:spcAft>
+                <a:spcPts val="600"/>
+              </a:spcAft>
+              <a:buNone/>
+            </a:pPr>
+            <a:r>
+              <a:rPr lang="en-US" sz="1500" dirty="0">
+                <a:solidFill>
+                  <a:srgbClr val="1A1A1A"/>
+                </a:solidFill>
+                <a:latin typeface="Calibri" pitchFamily="34" charset="0"/>
+                <a:ea typeface="Calibri" pitchFamily="34" charset="-122"/>
+                <a:cs typeface="Calibri" pitchFamily="34" charset="-120"/>
+              </a:rPr>
+              <a:t>% change in price = +10%</a:t>
+            </a:r>
+            <a:endParaRPr lang="en-US" sz="1500" dirty="0"/>
+          </a:p>
+          <a:p>
+            <a:pPr indent="0" marL="0">
+              <a:spcAft>
+                <a:spcPts val="600"/>
+              </a:spcAft>
+              <a:buNone/>
+            </a:pPr>
+            <a:r>
+              <a:rPr lang="en-US" sz="1500" dirty="0">
+                <a:solidFill>
+                  <a:srgbClr val="1A1A1A"/>
+                </a:solidFill>
+                <a:latin typeface="Calibri" pitchFamily="34" charset="0"/>
+                <a:ea typeface="Calibri" pitchFamily="34" charset="-122"/>
+                <a:cs typeface="Calibri" pitchFamily="34" charset="-120"/>
+              </a:rPr>
+              <a:t>% change in quantity supplied = +30%</a:t>
+            </a:r>
+            <a:endParaRPr lang="en-US" sz="1500" dirty="0"/>
+          </a:p>
+        </p:txBody>
+      </p:sp>
+      <p:sp>
+        <p:nvSpPr>
+          <p:cNvPr id="8" name="Text 6"/>
+          <p:cNvSpPr/>
+          <p:nvPr/>
+        </p:nvSpPr>
+        <p:spPr>
+          <a:xfrm>
+            <a:off x="3840480" y="4206240"/>
+            <a:ext cx="4480560" cy="731520"/>
+          </a:xfrm>
+          <a:prstGeom prst="rect">
+            <a:avLst/>
+          </a:prstGeom>
+          <a:noFill/>
+          <a:ln/>
+        </p:spPr>
+        <p:txBody>
+          <a:bodyPr wrap="square" rtlCol="0" anchor="ctr"/>
+          <a:lstStyle/>
+          <a:p>
+            <a:pPr indent="0" marL="0">
+              <a:buNone/>
+            </a:pPr>
+            <a:r>
+              <a:rPr lang="en-US" sz="1800" b="1" dirty="0">
+                <a:solidFill>
+                  <a:srgbClr val="1BAF7A"/>
                 </a:solidFill>
                 <a:latin typeface="Cambria" pitchFamily="34" charset="0"/>
                 <a:ea typeface="Cambria" pitchFamily="34" charset="-122"/>
                 <a:cs typeface="Cambria" pitchFamily="34" charset="-120"/>
               </a:rPr>
-              <a:t>Determinants of PES (1/2)</a:t>
-            </a:r>
-            <a:endParaRPr lang="en-US" sz="3000" dirty="0"/>
-          </a:p>
-        </p:txBody>
-      </p:sp>
-      <p:sp>
-        <p:nvSpPr>
-          <p:cNvPr id="3" name="Shape 1"/>
-          <p:cNvSpPr/>
-          <p:nvPr/>
-        </p:nvSpPr>
-        <p:spPr>
-          <a:xfrm>
-            <a:off x="790956" y="1828800"/>
-            <a:ext cx="3291840" cy="3108960"/>
-          </a:xfrm>
-          <a:prstGeom prst="roundRect">
-            <a:avLst>
-              <a:gd name="adj" fmla="val 3529"/>
-            </a:avLst>
-          </a:prstGeom>
-          <a:solidFill>
-            <a:srgbClr val="F4F5F7"/>
-          </a:solidFill>
-          <a:ln/>
-        </p:spPr>
-      </p:sp>
-      <p:sp>
-        <p:nvSpPr>
-          <p:cNvPr id="4" name="Text 2"/>
-          <p:cNvSpPr/>
-          <p:nvPr/>
-        </p:nvSpPr>
-        <p:spPr>
-          <a:xfrm>
-            <a:off x="1065276" y="2103120"/>
-            <a:ext cx="2743200" cy="548640"/>
-          </a:xfrm>
-          <a:prstGeom prst="rect">
-            <a:avLst/>
-          </a:prstGeom>
-          <a:noFill/>
-          <a:ln/>
-        </p:spPr>
-        <p:txBody>
-          <a:bodyPr wrap="square" rtlCol="0" anchor="ctr"/>
-          <a:lstStyle/>
-          <a:p>
-            <a:pPr indent="0" marL="0">
-              <a:buNone/>
-            </a:pPr>
-            <a:r>
-              <a:rPr lang="en-US" sz="1600" b="1" dirty="0">
-                <a:solidFill>
-                  <a:srgbClr val="1E2761"/>
-                </a:solidFill>
-                <a:latin typeface="Calibri" pitchFamily="34" charset="0"/>
-                <a:ea typeface="Calibri" pitchFamily="34" charset="-122"/>
-                <a:cs typeface="Calibri" pitchFamily="34" charset="-120"/>
-              </a:rPr>
-              <a:t>Spare capacity</a:t>
-            </a:r>
-            <a:endParaRPr lang="en-US" sz="1600" dirty="0"/>
-          </a:p>
-        </p:txBody>
-      </p:sp>
-      <p:sp>
-        <p:nvSpPr>
-          <p:cNvPr id="5" name="Text 3"/>
-          <p:cNvSpPr/>
-          <p:nvPr/>
-        </p:nvSpPr>
-        <p:spPr>
-          <a:xfrm>
-            <a:off x="1065276" y="2697480"/>
-            <a:ext cx="2743200" cy="2011680"/>
-          </a:xfrm>
-          <a:prstGeom prst="rect">
-            <a:avLst/>
-          </a:prstGeom>
-          <a:noFill/>
-          <a:ln/>
-        </p:spPr>
-        <p:txBody>
-          <a:bodyPr wrap="square" rtlCol="0" anchor="t"/>
-          <a:lstStyle/>
-          <a:p>
-            <a:pPr indent="0" marL="0">
-              <a:lnSpc>
-                <a:spcPct val="125000"/>
-              </a:lnSpc>
-              <a:buNone/>
-            </a:pPr>
-            <a:r>
-              <a:rPr lang="en-US" sz="1250" dirty="0">
-                <a:solidFill>
-                  <a:srgbClr val="1A1A1A"/>
-                </a:solidFill>
-                <a:latin typeface="Calibri" pitchFamily="34" charset="0"/>
-                <a:ea typeface="Calibri" pitchFamily="34" charset="-122"/>
-                <a:cs typeface="Calibri" pitchFamily="34" charset="-120"/>
-              </a:rPr>
-              <a:t>Unused machinery/staff time = more elastic. Tom's idle second printer can start immediately.</a:t>
-            </a:r>
-            <a:endParaRPr lang="en-US" sz="1250" dirty="0"/>
-          </a:p>
-        </p:txBody>
-      </p:sp>
-      <p:sp>
-        <p:nvSpPr>
-          <p:cNvPr id="6" name="Shape 4"/>
-          <p:cNvSpPr/>
-          <p:nvPr/>
-        </p:nvSpPr>
-        <p:spPr>
-          <a:xfrm>
-            <a:off x="4448556" y="1828800"/>
-            <a:ext cx="3291840" cy="3108960"/>
-          </a:xfrm>
-          <a:prstGeom prst="roundRect">
-            <a:avLst>
-              <a:gd name="adj" fmla="val 3529"/>
-            </a:avLst>
-          </a:prstGeom>
-          <a:solidFill>
-            <a:srgbClr val="F4F5F7"/>
-          </a:solidFill>
-          <a:ln/>
-        </p:spPr>
-      </p:sp>
-      <p:sp>
-        <p:nvSpPr>
-          <p:cNvPr id="7" name="Text 5"/>
-          <p:cNvSpPr/>
-          <p:nvPr/>
-        </p:nvSpPr>
-        <p:spPr>
-          <a:xfrm>
-            <a:off x="4722876" y="2103120"/>
-            <a:ext cx="2743200" cy="548640"/>
-          </a:xfrm>
-          <a:prstGeom prst="rect">
-            <a:avLst/>
-          </a:prstGeom>
-          <a:noFill/>
-          <a:ln/>
-        </p:spPr>
-        <p:txBody>
-          <a:bodyPr wrap="square" rtlCol="0" anchor="ctr"/>
-          <a:lstStyle/>
-          <a:p>
-            <a:pPr indent="0" marL="0">
-              <a:buNone/>
-            </a:pPr>
-            <a:r>
-              <a:rPr lang="en-US" sz="1600" b="1" dirty="0">
-                <a:solidFill>
-                  <a:srgbClr val="1E2761"/>
-                </a:solidFill>
-                <a:latin typeface="Calibri" pitchFamily="34" charset="0"/>
-                <a:ea typeface="Calibri" pitchFamily="34" charset="-122"/>
-                <a:cs typeface="Calibri" pitchFamily="34" charset="-120"/>
-              </a:rPr>
-              <a:t>Factor mobility</a:t>
-            </a:r>
-            <a:endParaRPr lang="en-US" sz="1600" dirty="0"/>
-          </a:p>
-        </p:txBody>
-      </p:sp>
-      <p:sp>
-        <p:nvSpPr>
-          <p:cNvPr id="8" name="Text 6"/>
-          <p:cNvSpPr/>
-          <p:nvPr/>
-        </p:nvSpPr>
-        <p:spPr>
-          <a:xfrm>
-            <a:off x="4722876" y="2697480"/>
-            <a:ext cx="2743200" cy="2011680"/>
-          </a:xfrm>
-          <a:prstGeom prst="rect">
-            <a:avLst/>
-          </a:prstGeom>
-          <a:noFill/>
-          <a:ln/>
-        </p:spPr>
-        <p:txBody>
-          <a:bodyPr wrap="square" rtlCol="0" anchor="t"/>
-          <a:lstStyle/>
-          <a:p>
-            <a:pPr indent="0" marL="0">
-              <a:lnSpc>
-                <a:spcPct val="125000"/>
-              </a:lnSpc>
-              <a:buNone/>
-            </a:pPr>
-            <a:r>
-              <a:rPr lang="en-US" sz="1250" dirty="0">
-                <a:solidFill>
-                  <a:srgbClr val="1A1A1A"/>
-                </a:solidFill>
-                <a:latin typeface="Calibri" pitchFamily="34" charset="0"/>
-                <a:ea typeface="Calibri" pitchFamily="34" charset="-122"/>
-                <a:cs typeface="Calibri" pitchFamily="34" charset="-120"/>
-              </a:rPr>
-              <a:t>Easy for labour/capital to switch tasks = more elastic. Hard-to-retrain specialist staff = more inelastic.</a:t>
-            </a:r>
-            <a:endParaRPr lang="en-US" sz="1250" dirty="0"/>
-          </a:p>
-        </p:txBody>
-      </p:sp>
-      <p:sp>
-        <p:nvSpPr>
-          <p:cNvPr id="9" name="Shape 7"/>
-          <p:cNvSpPr/>
-          <p:nvPr/>
-        </p:nvSpPr>
-        <p:spPr>
-          <a:xfrm>
-            <a:off x="8106156" y="1828800"/>
-            <a:ext cx="3291840" cy="3108960"/>
-          </a:xfrm>
-          <a:prstGeom prst="roundRect">
-            <a:avLst>
-              <a:gd name="adj" fmla="val 3529"/>
-            </a:avLst>
-          </a:prstGeom>
-          <a:solidFill>
-            <a:srgbClr val="F4F5F7"/>
-          </a:solidFill>
-          <a:ln/>
-        </p:spPr>
-      </p:sp>
-      <p:sp>
-        <p:nvSpPr>
-          <p:cNvPr id="10" name="Text 8"/>
-          <p:cNvSpPr/>
-          <p:nvPr/>
-        </p:nvSpPr>
-        <p:spPr>
-          <a:xfrm>
-            <a:off x="8380476" y="2103120"/>
-            <a:ext cx="2743200" cy="548640"/>
-          </a:xfrm>
-          <a:prstGeom prst="rect">
-            <a:avLst/>
-          </a:prstGeom>
-          <a:noFill/>
-          <a:ln/>
-        </p:spPr>
-        <p:txBody>
-          <a:bodyPr wrap="square" rtlCol="0" anchor="ctr"/>
-          <a:lstStyle/>
-          <a:p>
-            <a:pPr indent="0" marL="0">
-              <a:buNone/>
-            </a:pPr>
-            <a:r>
-              <a:rPr lang="en-US" sz="1600" b="1" dirty="0">
-                <a:solidFill>
-                  <a:srgbClr val="1E2761"/>
-                </a:solidFill>
-                <a:latin typeface="Calibri" pitchFamily="34" charset="0"/>
-                <a:ea typeface="Calibri" pitchFamily="34" charset="-122"/>
-                <a:cs typeface="Calibri" pitchFamily="34" charset="-120"/>
-              </a:rPr>
-              <a:t>Time period</a:t>
-            </a:r>
-            <a:endParaRPr lang="en-US" sz="1600" dirty="0"/>
-          </a:p>
-        </p:txBody>
-      </p:sp>
-      <p:sp>
-        <p:nvSpPr>
-          <p:cNvPr id="11" name="Text 9"/>
-          <p:cNvSpPr/>
-          <p:nvPr/>
-        </p:nvSpPr>
-        <p:spPr>
-          <a:xfrm>
-            <a:off x="8380476" y="2697480"/>
-            <a:ext cx="2743200" cy="2011680"/>
-          </a:xfrm>
-          <a:prstGeom prst="rect">
-            <a:avLst/>
-          </a:prstGeom>
-          <a:noFill/>
-          <a:ln/>
-        </p:spPr>
-        <p:txBody>
-          <a:bodyPr wrap="square" rtlCol="0" anchor="t"/>
-          <a:lstStyle/>
-          <a:p>
-            <a:pPr indent="0" marL="0">
-              <a:lnSpc>
-                <a:spcPct val="125000"/>
-              </a:lnSpc>
-              <a:buNone/>
-            </a:pPr>
-            <a:r>
-              <a:rPr lang="en-US" sz="1250" dirty="0">
-                <a:solidFill>
-                  <a:srgbClr val="1A1A1A"/>
-                </a:solidFill>
-                <a:latin typeface="Calibri" pitchFamily="34" charset="0"/>
-                <a:ea typeface="Calibri" pitchFamily="34" charset="-122"/>
-                <a:cs typeface="Calibri" pitchFamily="34" charset="-120"/>
-              </a:rPr>
-              <a:t>More elastic in the long run — more time to build capacity, hire staff, or build new courts.</a:t>
-            </a:r>
-            <a:endParaRPr lang="en-US" sz="1250" dirty="0"/>
+              <a:t>PES = 30 ÷ 10 = 3 → Elastic</a:t>
+            </a:r>
+            <a:endParaRPr lang="en-US" sz="1800" dirty="0"/>
           </a:p>
         </p:txBody>
       </p:sp>
@@ -4313,57 +4160,120 @@
       </p:grpSpPr>
       <p:sp>
         <p:nvSpPr>
-          <p:cNvPr id="2" name="Text 0"/>
-          <p:cNvSpPr/>
-          <p:nvPr/>
-        </p:nvSpPr>
-        <p:spPr>
-          <a:xfrm>
-            <a:off x="640080" y="548640"/>
-            <a:ext cx="10881360" cy="731520"/>
-          </a:xfrm>
-          <a:prstGeom prst="rect">
-            <a:avLst/>
-          </a:prstGeom>
-          <a:noFill/>
-          <a:ln/>
-        </p:spPr>
-        <p:txBody>
-          <a:bodyPr wrap="square" rtlCol="0" anchor="ctr"/>
-          <a:lstStyle/>
-          <a:p>
-            <a:pPr indent="0" marL="0">
-              <a:buNone/>
-            </a:pPr>
-            <a:r>
-              <a:rPr lang="en-US" sz="3000" b="1" dirty="0">
-                <a:solidFill>
-                  <a:srgbClr val="1E2761"/>
-                </a:solidFill>
-                <a:latin typeface="Cambria" pitchFamily="34" charset="0"/>
-                <a:ea typeface="Cambria" pitchFamily="34" charset="-122"/>
-                <a:cs typeface="Cambria" pitchFamily="34" charset="-120"/>
-              </a:rPr>
-              <a:t>Determinants of PES (2/2)</a:t>
-            </a:r>
-            <a:endParaRPr lang="en-US" sz="3000" dirty="0"/>
-          </a:p>
-        </p:txBody>
-      </p:sp>
-      <p:sp>
-        <p:nvSpPr>
-          <p:cNvPr id="3" name="Shape 1"/>
-          <p:cNvSpPr/>
-          <p:nvPr/>
-        </p:nvSpPr>
-        <p:spPr>
-          <a:xfrm>
-            <a:off x="790956" y="1828800"/>
-            <a:ext cx="3291840" cy="3108960"/>
+          <p:cNvPr id="2" name="Shape 0"/>
+          <p:cNvSpPr/>
+          <p:nvPr/>
+        </p:nvSpPr>
+        <p:spPr>
+          <a:xfrm>
+            <a:off x="640080" y="502920"/>
+            <a:ext cx="1527048" cy="365760"/>
           </a:xfrm>
           <a:prstGeom prst="roundRect">
             <a:avLst>
-              <a:gd name="adj" fmla="val 3529"/>
+              <a:gd name="adj" fmla="val 50000"/>
+            </a:avLst>
+          </a:prstGeom>
+          <a:solidFill>
+            <a:srgbClr val="F96167">
+              <a:alpha val="18000"/>
+            </a:srgbClr>
+          </a:solidFill>
+          <a:ln/>
+        </p:spPr>
+      </p:sp>
+      <p:sp>
+        <p:nvSpPr>
+          <p:cNvPr id="3" name="Text 1"/>
+          <p:cNvSpPr/>
+          <p:nvPr/>
+        </p:nvSpPr>
+        <p:spPr>
+          <a:xfrm>
+            <a:off x="640080" y="502920"/>
+            <a:ext cx="1527048" cy="365760"/>
+          </a:xfrm>
+          <a:prstGeom prst="rect">
+            <a:avLst/>
+          </a:prstGeom>
+          <a:noFill/>
+          <a:ln/>
+        </p:spPr>
+        <p:txBody>
+          <a:bodyPr wrap="square" rtlCol="0" anchor="ctr"/>
+          <a:lstStyle/>
+          <a:p>
+            <a:pPr algn="ctr" indent="0" marL="0">
+              <a:buNone/>
+            </a:pPr>
+            <a:r>
+              <a:rPr lang="en-US" sz="1200" b="1" dirty="0">
+                <a:solidFill>
+                  <a:srgbClr val="F96167"/>
+                </a:solidFill>
+                <a:latin typeface="Calibri" pitchFamily="34" charset="0"/>
+                <a:ea typeface="Calibri" pitchFamily="34" charset="-122"/>
+                <a:cs typeface="Calibri" pitchFamily="34" charset="-120"/>
+              </a:rPr>
+              <a:t>✍️ Your turn</a:t>
+            </a:r>
+            <a:endParaRPr lang="en-US" sz="1200" dirty="0"/>
+          </a:p>
+        </p:txBody>
+      </p:sp>
+      <p:sp>
+        <p:nvSpPr>
+          <p:cNvPr id="4" name="Text 2"/>
+          <p:cNvSpPr/>
+          <p:nvPr/>
+        </p:nvSpPr>
+        <p:spPr>
+          <a:xfrm>
+            <a:off x="640080" y="1051560"/>
+            <a:ext cx="10881360" cy="548640"/>
+          </a:xfrm>
+          <a:prstGeom prst="rect">
+            <a:avLst/>
+          </a:prstGeom>
+          <a:noFill/>
+          <a:ln/>
+        </p:spPr>
+        <p:txBody>
+          <a:bodyPr wrap="square" rtlCol="0" anchor="ctr"/>
+          <a:lstStyle/>
+          <a:p>
+            <a:pPr indent="0" marL="0">
+              <a:buNone/>
+            </a:pPr>
+            <a:r>
+              <a:rPr lang="en-US" sz="2200" b="1" dirty="0">
+                <a:solidFill>
+                  <a:srgbClr val="1E2761"/>
+                </a:solidFill>
+                <a:latin typeface="Calibri" pitchFamily="34" charset="0"/>
+                <a:ea typeface="Calibri" pitchFamily="34" charset="-122"/>
+                <a:cs typeface="Calibri" pitchFamily="34" charset="-120"/>
+              </a:rPr>
+              <a:t>🕹️ Retired Lego set (resale)</a:t>
+            </a:r>
+            <a:endParaRPr lang="en-US" sz="2200" dirty="0"/>
+          </a:p>
+        </p:txBody>
+      </p:sp>
+      <p:sp>
+        <p:nvSpPr>
+          <p:cNvPr id="5" name="Shape 3"/>
+          <p:cNvSpPr/>
+          <p:nvPr/>
+        </p:nvSpPr>
+        <p:spPr>
+          <a:xfrm>
+            <a:off x="3566160" y="1920240"/>
+            <a:ext cx="5029200" cy="3108960"/>
+          </a:xfrm>
+          <a:prstGeom prst="roundRect">
+            <a:avLst>
+              <a:gd name="adj" fmla="val 4118"/>
             </a:avLst>
           </a:prstGeom>
           <a:solidFill>
@@ -4374,14 +4284,14 @@
       </p:sp>
       <p:sp>
         <p:nvSpPr>
-          <p:cNvPr id="4" name="Text 2"/>
-          <p:cNvSpPr/>
-          <p:nvPr/>
-        </p:nvSpPr>
-        <p:spPr>
-          <a:xfrm>
-            <a:off x="1065276" y="2103120"/>
-            <a:ext cx="2743200" cy="548640"/>
+          <p:cNvPr id="6" name="Text 4"/>
+          <p:cNvSpPr/>
+          <p:nvPr/>
+        </p:nvSpPr>
+        <p:spPr>
+          <a:xfrm>
+            <a:off x="3840480" y="2194560"/>
+            <a:ext cx="4480560" cy="365760"/>
           </a:xfrm>
           <a:prstGeom prst="rect">
             <a:avLst/>
@@ -4397,30 +4307,30 @@
               <a:buNone/>
             </a:pPr>
             <a:r>
-              <a:rPr lang="en-US" sz="1600" b="1" dirty="0">
-                <a:solidFill>
-                  <a:srgbClr val="1E2761"/>
-                </a:solidFill>
-                <a:latin typeface="Calibri" pitchFamily="34" charset="0"/>
-                <a:ea typeface="Calibri" pitchFamily="34" charset="-122"/>
-                <a:cs typeface="Calibri" pitchFamily="34" charset="-120"/>
-              </a:rPr>
-              <a:t>Ability to store stock</a:t>
-            </a:r>
-            <a:endParaRPr lang="en-US" sz="1600" dirty="0"/>
-          </a:p>
-        </p:txBody>
-      </p:sp>
-      <p:sp>
-        <p:nvSpPr>
-          <p:cNvPr id="5" name="Text 3"/>
-          <p:cNvSpPr/>
-          <p:nvPr/>
-        </p:nvSpPr>
-        <p:spPr>
-          <a:xfrm>
-            <a:off x="1065276" y="2697480"/>
-            <a:ext cx="2743200" cy="2011680"/>
+              <a:rPr lang="en-US" sz="1400" b="1" dirty="0">
+                <a:solidFill>
+                  <a:srgbClr val="5B5B5B"/>
+                </a:solidFill>
+                <a:latin typeface="Calibri" pitchFamily="34" charset="0"/>
+                <a:ea typeface="Calibri" pitchFamily="34" charset="-122"/>
+                <a:cs typeface="Calibri" pitchFamily="34" charset="-120"/>
+              </a:rPr>
+              <a:t>Your turn — work it out</a:t>
+            </a:r>
+            <a:endParaRPr lang="en-US" sz="1400" dirty="0"/>
+          </a:p>
+        </p:txBody>
+      </p:sp>
+      <p:sp>
+        <p:nvSpPr>
+          <p:cNvPr id="7" name="Text 5"/>
+          <p:cNvSpPr/>
+          <p:nvPr/>
+        </p:nvSpPr>
+        <p:spPr>
+          <a:xfrm>
+            <a:off x="3840480" y="2651760"/>
+            <a:ext cx="4480560" cy="1280160"/>
           </a:xfrm>
           <a:prstGeom prst="rect">
             <a:avLst/>
@@ -4433,13 +4343,13 @@
           <a:lstStyle/>
           <a:p>
             <a:pPr indent="0" marL="0">
-              <a:lnSpc>
-                <a:spcPct val="125000"/>
-              </a:lnSpc>
-              <a:buNone/>
-            </a:pPr>
-            <a:r>
-              <a:rPr lang="en-US" sz="1250" dirty="0">
+              <a:spcAft>
+                <a:spcPts val="800"/>
+              </a:spcAft>
+              <a:buNone/>
+            </a:pPr>
+            <a:r>
+              <a:rPr lang="en-US" sz="1500" dirty="0">
                 <a:solidFill>
                   <a:srgbClr val="1A1A1A"/>
                 </a:solidFill>
@@ -4447,44 +4357,65 @@
                 <a:ea typeface="Calibri" pitchFamily="34" charset="-122"/>
                 <a:cs typeface="Calibri" pitchFamily="34" charset="-120"/>
               </a:rPr>
-              <a:t>Goods that can be stockpiled and released later = more elastic. A padel lesson (a service) can't be stored — more inelastic.</a:t>
-            </a:r>
-            <a:endParaRPr lang="en-US" sz="1250" dirty="0"/>
-          </a:p>
-        </p:txBody>
-      </p:sp>
-      <p:sp>
-        <p:nvSpPr>
-          <p:cNvPr id="6" name="Shape 4"/>
-          <p:cNvSpPr/>
-          <p:nvPr/>
-        </p:nvSpPr>
-        <p:spPr>
-          <a:xfrm>
-            <a:off x="4448556" y="1828800"/>
-            <a:ext cx="3291840" cy="3108960"/>
-          </a:xfrm>
-          <a:prstGeom prst="roundRect">
-            <a:avLst>
-              <a:gd name="adj" fmla="val 3529"/>
-            </a:avLst>
-          </a:prstGeom>
-          <a:solidFill>
-            <a:srgbClr val="F4F5F7"/>
-          </a:solidFill>
-          <a:ln/>
-        </p:spPr>
-      </p:sp>
-      <p:sp>
-        <p:nvSpPr>
-          <p:cNvPr id="7" name="Text 5"/>
-          <p:cNvSpPr/>
-          <p:nvPr/>
-        </p:nvSpPr>
-        <p:spPr>
-          <a:xfrm>
-            <a:off x="4722876" y="2103120"/>
-            <a:ext cx="2743200" cy="548640"/>
+              <a:t>Price: +50%</a:t>
+            </a:r>
+            <a:endParaRPr lang="en-US" sz="1500" dirty="0"/>
+          </a:p>
+          <a:p>
+            <a:pPr indent="0" marL="0">
+              <a:spcAft>
+                <a:spcPts val="800"/>
+              </a:spcAft>
+              <a:buNone/>
+            </a:pPr>
+            <a:r>
+              <a:rPr lang="en-US" sz="1500" dirty="0">
+                <a:solidFill>
+                  <a:srgbClr val="1A1A1A"/>
+                </a:solidFill>
+                <a:latin typeface="Calibri" pitchFamily="34" charset="0"/>
+                <a:ea typeface="Calibri" pitchFamily="34" charset="-122"/>
+                <a:cs typeface="Calibri" pitchFamily="34" charset="-120"/>
+              </a:rPr>
+              <a:t>Quantity supplied: fixed — no more will ever be made</a:t>
+            </a:r>
+            <a:endParaRPr lang="en-US" sz="1500" dirty="0"/>
+          </a:p>
+        </p:txBody>
+      </p:sp>
+      <p:sp>
+        <p:nvSpPr>
+          <p:cNvPr id="8" name="Shape 6"/>
+          <p:cNvSpPr/>
+          <p:nvPr/>
+        </p:nvSpPr>
+        <p:spPr>
+          <a:xfrm>
+            <a:off x="3840480" y="4343400"/>
+            <a:ext cx="1828800" cy="0"/>
+          </a:xfrm>
+          <a:prstGeom prst="line">
+            <a:avLst/>
+          </a:prstGeom>
+          <a:noFill/>
+          <a:ln w="19050">
+            <a:solidFill>
+              <a:srgbClr val="5B5B5B"/>
+            </a:solidFill>
+            <a:prstDash val="solid"/>
+          </a:ln>
+        </p:spPr>
+      </p:sp>
+      <p:sp>
+        <p:nvSpPr>
+          <p:cNvPr id="9" name="Text 7"/>
+          <p:cNvSpPr/>
+          <p:nvPr/>
+        </p:nvSpPr>
+        <p:spPr>
+          <a:xfrm>
+            <a:off x="3840480" y="3977640"/>
+            <a:ext cx="4206240" cy="320040"/>
           </a:xfrm>
           <a:prstGeom prst="rect">
             <a:avLst/>
@@ -4500,49 +4431,7 @@
               <a:buNone/>
             </a:pPr>
             <a:r>
-              <a:rPr lang="en-US" sz="1600" b="1" dirty="0">
-                <a:solidFill>
-                  <a:srgbClr val="1E2761"/>
-                </a:solidFill>
-                <a:latin typeface="Calibri" pitchFamily="34" charset="0"/>
-                <a:ea typeface="Calibri" pitchFamily="34" charset="-122"/>
-                <a:cs typeface="Calibri" pitchFamily="34" charset="-120"/>
-              </a:rPr>
-              <a:t>Production period</a:t>
-            </a:r>
-            <a:endParaRPr lang="en-US" sz="1600" dirty="0"/>
-          </a:p>
-        </p:txBody>
-      </p:sp>
-      <p:sp>
-        <p:nvSpPr>
-          <p:cNvPr id="8" name="Text 6"/>
-          <p:cNvSpPr/>
-          <p:nvPr/>
-        </p:nvSpPr>
-        <p:spPr>
-          <a:xfrm>
-            <a:off x="4722876" y="2697480"/>
-            <a:ext cx="2743200" cy="2011680"/>
-          </a:xfrm>
-          <a:prstGeom prst="rect">
-            <a:avLst/>
-          </a:prstGeom>
-          <a:noFill/>
-          <a:ln/>
-        </p:spPr>
-        <p:txBody>
-          <a:bodyPr wrap="square" rtlCol="0" anchor="t"/>
-          <a:lstStyle/>
-          <a:p>
-            <a:pPr indent="0" marL="0">
-              <a:lnSpc>
-                <a:spcPct val="125000"/>
-              </a:lnSpc>
-              <a:buNone/>
-            </a:pPr>
-            <a:r>
-              <a:rPr lang="en-US" sz="1250" dirty="0">
+              <a:rPr lang="en-US" sz="1400" dirty="0">
                 <a:solidFill>
                   <a:srgbClr val="1A1A1A"/>
                 </a:solidFill>
@@ -4550,44 +4439,45 @@
                 <a:ea typeface="Calibri" pitchFamily="34" charset="-122"/>
                 <a:cs typeface="Calibri" pitchFamily="34" charset="-120"/>
               </a:rPr>
-              <a:t>Quick to make = more elastic (a grip prints in minutes). Slow to make = more inelastic (a new court takes months).</a:t>
-            </a:r>
-            <a:endParaRPr lang="en-US" sz="1250" dirty="0"/>
-          </a:p>
-        </p:txBody>
-      </p:sp>
-      <p:sp>
-        <p:nvSpPr>
-          <p:cNvPr id="9" name="Shape 7"/>
-          <p:cNvSpPr/>
-          <p:nvPr/>
-        </p:nvSpPr>
-        <p:spPr>
-          <a:xfrm>
-            <a:off x="8106156" y="1828800"/>
-            <a:ext cx="3291840" cy="3108960"/>
-          </a:xfrm>
-          <a:prstGeom prst="roundRect">
-            <a:avLst>
-              <a:gd name="adj" fmla="val 3529"/>
-            </a:avLst>
-          </a:prstGeom>
-          <a:solidFill>
-            <a:srgbClr val="F4F5F7"/>
-          </a:solidFill>
-          <a:ln/>
-        </p:spPr>
-      </p:sp>
-      <p:sp>
-        <p:nvSpPr>
-          <p:cNvPr id="10" name="Text 8"/>
-          <p:cNvSpPr/>
-          <p:nvPr/>
-        </p:nvSpPr>
-        <p:spPr>
-          <a:xfrm>
-            <a:off x="8380476" y="2103120"/>
-            <a:ext cx="2743200" cy="548640"/>
+              <a:t>TR before = $____</a:t>
+            </a:r>
+            <a:endParaRPr lang="en-US" sz="1400" dirty="0"/>
+          </a:p>
+        </p:txBody>
+      </p:sp>
+      <p:sp>
+        <p:nvSpPr>
+          <p:cNvPr id="10" name="Shape 8"/>
+          <p:cNvSpPr/>
+          <p:nvPr/>
+        </p:nvSpPr>
+        <p:spPr>
+          <a:xfrm>
+            <a:off x="3840480" y="4709160"/>
+            <a:ext cx="1828800" cy="0"/>
+          </a:xfrm>
+          <a:prstGeom prst="line">
+            <a:avLst/>
+          </a:prstGeom>
+          <a:noFill/>
+          <a:ln w="19050">
+            <a:solidFill>
+              <a:srgbClr val="5B5B5B"/>
+            </a:solidFill>
+            <a:prstDash val="solid"/>
+          </a:ln>
+        </p:spPr>
+      </p:sp>
+      <p:sp>
+        <p:nvSpPr>
+          <p:cNvPr id="11" name="Text 9"/>
+          <p:cNvSpPr/>
+          <p:nvPr/>
+        </p:nvSpPr>
+        <p:spPr>
+          <a:xfrm>
+            <a:off x="3840480" y="4343400"/>
+            <a:ext cx="4206240" cy="320040"/>
           </a:xfrm>
           <a:prstGeom prst="rect">
             <a:avLst/>
@@ -4603,49 +4493,7 @@
               <a:buNone/>
             </a:pPr>
             <a:r>
-              <a:rPr lang="en-US" sz="1600" b="1" dirty="0">
-                <a:solidFill>
-                  <a:srgbClr val="1E2761"/>
-                </a:solidFill>
-                <a:latin typeface="Calibri" pitchFamily="34" charset="0"/>
-                <a:ea typeface="Calibri" pitchFamily="34" charset="-122"/>
-                <a:cs typeface="Calibri" pitchFamily="34" charset="-120"/>
-              </a:rPr>
-              <a:t>Number of producers</a:t>
-            </a:r>
-            <a:endParaRPr lang="en-US" sz="1600" dirty="0"/>
-          </a:p>
-        </p:txBody>
-      </p:sp>
-      <p:sp>
-        <p:nvSpPr>
-          <p:cNvPr id="11" name="Text 9"/>
-          <p:cNvSpPr/>
-          <p:nvPr/>
-        </p:nvSpPr>
-        <p:spPr>
-          <a:xfrm>
-            <a:off x="8380476" y="2697480"/>
-            <a:ext cx="2743200" cy="2011680"/>
-          </a:xfrm>
-          <a:prstGeom prst="rect">
-            <a:avLst/>
-          </a:prstGeom>
-          <a:noFill/>
-          <a:ln/>
-        </p:spPr>
-        <p:txBody>
-          <a:bodyPr wrap="square" rtlCol="0" anchor="t"/>
-          <a:lstStyle/>
-          <a:p>
-            <a:pPr indent="0" marL="0">
-              <a:lnSpc>
-                <a:spcPct val="125000"/>
-              </a:lnSpc>
-              <a:buNone/>
-            </a:pPr>
-            <a:r>
-              <a:rPr lang="en-US" sz="1250" dirty="0">
+              <a:rPr lang="en-US" sz="1400" dirty="0">
                 <a:solidFill>
                   <a:srgbClr val="1A1A1A"/>
                 </a:solidFill>
@@ -4653,9 +4501,9 @@
                 <a:ea typeface="Calibri" pitchFamily="34" charset="-122"/>
                 <a:cs typeface="Calibri" pitchFamily="34" charset="-120"/>
               </a:rPr>
-              <a:t>More producers able to enter the market = more elastic supply, especially in the long run.</a:t>
-            </a:r>
-            <a:endParaRPr lang="en-US" sz="1250" dirty="0"/>
+              <a:t>TR after = $____</a:t>
+            </a:r>
+            <a:endParaRPr lang="en-US" sz="1400" dirty="0"/>
           </a:p>
         </p:txBody>
       </p:sp>
@@ -4693,14 +4541,38 @@
       </p:grpSpPr>
       <p:sp>
         <p:nvSpPr>
-          <p:cNvPr id="2" name="Text 0"/>
-          <p:cNvSpPr/>
-          <p:nvPr/>
-        </p:nvSpPr>
-        <p:spPr>
-          <a:xfrm>
-            <a:off x="640080" y="548640"/>
-            <a:ext cx="10881360" cy="822960"/>
+          <p:cNvPr id="2" name="Shape 0"/>
+          <p:cNvSpPr/>
+          <p:nvPr/>
+        </p:nvSpPr>
+        <p:spPr>
+          <a:xfrm>
+            <a:off x="640080" y="502920"/>
+            <a:ext cx="1325880" cy="365760"/>
+          </a:xfrm>
+          <a:prstGeom prst="roundRect">
+            <a:avLst>
+              <a:gd name="adj" fmla="val 50000"/>
+            </a:avLst>
+          </a:prstGeom>
+          <a:solidFill>
+            <a:srgbClr val="1BAF7A">
+              <a:alpha val="18000"/>
+            </a:srgbClr>
+          </a:solidFill>
+          <a:ln/>
+        </p:spPr>
+      </p:sp>
+      <p:sp>
+        <p:nvSpPr>
+          <p:cNvPr id="3" name="Text 1"/>
+          <p:cNvSpPr/>
+          <p:nvPr/>
+        </p:nvSpPr>
+        <p:spPr>
+          <a:xfrm>
+            <a:off x="640080" y="502920"/>
+            <a:ext cx="1325880" cy="365760"/>
           </a:xfrm>
           <a:prstGeom prst="rect">
             <a:avLst/>
@@ -4712,87 +4584,220 @@
           <a:bodyPr wrap="square" rtlCol="0" anchor="ctr"/>
           <a:lstStyle/>
           <a:p>
-            <a:pPr indent="0" marL="0">
-              <a:buNone/>
-            </a:pPr>
-            <a:r>
-              <a:rPr lang="en-US" sz="3200" b="1" dirty="0">
+            <a:pPr algn="ctr" indent="0" marL="0">
+              <a:buNone/>
+            </a:pPr>
+            <a:r>
+              <a:rPr lang="en-US" sz="1200" b="1" dirty="0">
+                <a:solidFill>
+                  <a:srgbClr val="1BAF7A"/>
+                </a:solidFill>
+                <a:latin typeface="Calibri" pitchFamily="34" charset="0"/>
+                <a:ea typeface="Calibri" pitchFamily="34" charset="-122"/>
+                <a:cs typeface="Calibri" pitchFamily="34" charset="-120"/>
+              </a:rPr>
+              <a:t>✅ Revealed</a:t>
+            </a:r>
+            <a:endParaRPr lang="en-US" sz="1200" dirty="0"/>
+          </a:p>
+        </p:txBody>
+      </p:sp>
+      <p:sp>
+        <p:nvSpPr>
+          <p:cNvPr id="4" name="Text 2"/>
+          <p:cNvSpPr/>
+          <p:nvPr/>
+        </p:nvSpPr>
+        <p:spPr>
+          <a:xfrm>
+            <a:off x="640080" y="1051560"/>
+            <a:ext cx="10881360" cy="548640"/>
+          </a:xfrm>
+          <a:prstGeom prst="rect">
+            <a:avLst/>
+          </a:prstGeom>
+          <a:noFill/>
+          <a:ln/>
+        </p:spPr>
+        <p:txBody>
+          <a:bodyPr wrap="square" rtlCol="0" anchor="ctr"/>
+          <a:lstStyle/>
+          <a:p>
+            <a:pPr indent="0" marL="0">
+              <a:buNone/>
+            </a:pPr>
+            <a:r>
+              <a:rPr lang="en-US" sz="2200" b="1" dirty="0">
                 <a:solidFill>
                   <a:srgbClr val="1E2761"/>
+                </a:solidFill>
+                <a:latin typeface="Calibri" pitchFamily="34" charset="0"/>
+                <a:ea typeface="Calibri" pitchFamily="34" charset="-122"/>
+                <a:cs typeface="Calibri" pitchFamily="34" charset="-120"/>
+              </a:rPr>
+              <a:t>🕹️ Retired Lego set — answer</a:t>
+            </a:r>
+            <a:endParaRPr lang="en-US" sz="2200" dirty="0"/>
+          </a:p>
+        </p:txBody>
+      </p:sp>
+      <p:sp>
+        <p:nvSpPr>
+          <p:cNvPr id="5" name="Shape 3"/>
+          <p:cNvSpPr/>
+          <p:nvPr/>
+        </p:nvSpPr>
+        <p:spPr>
+          <a:xfrm>
+            <a:off x="3566160" y="1920240"/>
+            <a:ext cx="5029200" cy="3108960"/>
+          </a:xfrm>
+          <a:prstGeom prst="roundRect">
+            <a:avLst>
+              <a:gd name="adj" fmla="val 4118"/>
+            </a:avLst>
+          </a:prstGeom>
+          <a:solidFill>
+            <a:srgbClr val="F4F5F7"/>
+          </a:solidFill>
+          <a:ln/>
+        </p:spPr>
+      </p:sp>
+      <p:sp>
+        <p:nvSpPr>
+          <p:cNvPr id="6" name="Text 4"/>
+          <p:cNvSpPr/>
+          <p:nvPr/>
+        </p:nvSpPr>
+        <p:spPr>
+          <a:xfrm>
+            <a:off x="3840480" y="2194560"/>
+            <a:ext cx="4480560" cy="365760"/>
+          </a:xfrm>
+          <a:prstGeom prst="rect">
+            <a:avLst/>
+          </a:prstGeom>
+          <a:noFill/>
+          <a:ln/>
+        </p:spPr>
+        <p:txBody>
+          <a:bodyPr wrap="square" rtlCol="0" anchor="ctr"/>
+          <a:lstStyle/>
+          <a:p>
+            <a:pPr indent="0" marL="0">
+              <a:buNone/>
+            </a:pPr>
+            <a:r>
+              <a:rPr lang="en-US" sz="1400" b="1" dirty="0">
+                <a:solidFill>
+                  <a:srgbClr val="5B5B5B"/>
+                </a:solidFill>
+                <a:latin typeface="Calibri" pitchFamily="34" charset="0"/>
+                <a:ea typeface="Calibri" pitchFamily="34" charset="-122"/>
+                <a:cs typeface="Calibri" pitchFamily="34" charset="-120"/>
+              </a:rPr>
+              <a:t>Check your answer</a:t>
+            </a:r>
+            <a:endParaRPr lang="en-US" sz="1400" dirty="0"/>
+          </a:p>
+        </p:txBody>
+      </p:sp>
+      <p:sp>
+        <p:nvSpPr>
+          <p:cNvPr id="7" name="Text 5"/>
+          <p:cNvSpPr/>
+          <p:nvPr/>
+        </p:nvSpPr>
+        <p:spPr>
+          <a:xfrm>
+            <a:off x="3840480" y="2651760"/>
+            <a:ext cx="4480560" cy="1463040"/>
+          </a:xfrm>
+          <a:prstGeom prst="rect">
+            <a:avLst/>
+          </a:prstGeom>
+          <a:noFill/>
+          <a:ln/>
+        </p:spPr>
+        <p:txBody>
+          <a:bodyPr wrap="square" rtlCol="0" anchor="t"/>
+          <a:lstStyle/>
+          <a:p>
+            <a:pPr indent="0" marL="0">
+              <a:spcAft>
+                <a:spcPts val="600"/>
+              </a:spcAft>
+              <a:buNone/>
+            </a:pPr>
+            <a:r>
+              <a:rPr lang="en-US" sz="1500" dirty="0">
+                <a:solidFill>
+                  <a:srgbClr val="1A1A1A"/>
+                </a:solidFill>
+                <a:latin typeface="Calibri" pitchFamily="34" charset="0"/>
+                <a:ea typeface="Calibri" pitchFamily="34" charset="-122"/>
+                <a:cs typeface="Calibri" pitchFamily="34" charset="-120"/>
+              </a:rPr>
+              <a:t>% change in price = +50%</a:t>
+            </a:r>
+            <a:endParaRPr lang="en-US" sz="1500" dirty="0"/>
+          </a:p>
+          <a:p>
+            <a:pPr indent="0" marL="0">
+              <a:spcAft>
+                <a:spcPts val="600"/>
+              </a:spcAft>
+              <a:buNone/>
+            </a:pPr>
+            <a:r>
+              <a:rPr lang="en-US" sz="1500" dirty="0">
+                <a:solidFill>
+                  <a:srgbClr val="1A1A1A"/>
+                </a:solidFill>
+                <a:latin typeface="Calibri" pitchFamily="34" charset="0"/>
+                <a:ea typeface="Calibri" pitchFamily="34" charset="-122"/>
+                <a:cs typeface="Calibri" pitchFamily="34" charset="-120"/>
+              </a:rPr>
+              <a:t>% change in quantity supplied = 0%</a:t>
+            </a:r>
+            <a:endParaRPr lang="en-US" sz="1500" dirty="0"/>
+          </a:p>
+        </p:txBody>
+      </p:sp>
+      <p:sp>
+        <p:nvSpPr>
+          <p:cNvPr id="8" name="Text 6"/>
+          <p:cNvSpPr/>
+          <p:nvPr/>
+        </p:nvSpPr>
+        <p:spPr>
+          <a:xfrm>
+            <a:off x="3840480" y="4206240"/>
+            <a:ext cx="4480560" cy="731520"/>
+          </a:xfrm>
+          <a:prstGeom prst="rect">
+            <a:avLst/>
+          </a:prstGeom>
+          <a:noFill/>
+          <a:ln/>
+        </p:spPr>
+        <p:txBody>
+          <a:bodyPr wrap="square" rtlCol="0" anchor="ctr"/>
+          <a:lstStyle/>
+          <a:p>
+            <a:pPr indent="0" marL="0">
+              <a:buNone/>
+            </a:pPr>
+            <a:r>
+              <a:rPr lang="en-US" sz="1800" b="1" dirty="0">
+                <a:solidFill>
+                  <a:srgbClr val="1BAF7A"/>
                 </a:solidFill>
                 <a:latin typeface="Cambria" pitchFamily="34" charset="0"/>
                 <a:ea typeface="Cambria" pitchFamily="34" charset="-122"/>
                 <a:cs typeface="Cambria" pitchFamily="34" charset="-120"/>
               </a:rPr>
-              <a:t>Quick check</a:t>
-            </a:r>
-            <a:endParaRPr lang="en-US" sz="3200" dirty="0"/>
-          </a:p>
-        </p:txBody>
-      </p:sp>
-      <p:sp>
-        <p:nvSpPr>
-          <p:cNvPr id="3" name="Text 1"/>
-          <p:cNvSpPr/>
-          <p:nvPr/>
-        </p:nvSpPr>
-        <p:spPr>
-          <a:xfrm>
-            <a:off x="822960" y="1828800"/>
-            <a:ext cx="9875520" cy="4114800"/>
-          </a:xfrm>
-          <a:prstGeom prst="rect">
-            <a:avLst/>
-          </a:prstGeom>
-          <a:noFill/>
-          <a:ln/>
-        </p:spPr>
-        <p:txBody>
-          <a:bodyPr wrap="square" rtlCol="0" anchor="t"/>
-          <a:lstStyle/>
-          <a:p>
-            <a:pPr indent="0" marL="0">
-              <a:lnSpc>
-                <a:spcPct val="130000"/>
-              </a:lnSpc>
-              <a:spcAft>
-                <a:spcPts val="1400"/>
-              </a:spcAft>
-              <a:buNone/>
-            </a:pPr>
-            <a:r>
-              <a:rPr lang="en-US" sz="1800" dirty="0">
-                <a:solidFill>
-                  <a:srgbClr val="1A1A1A"/>
-                </a:solidFill>
-                <a:latin typeface="Calibri" pitchFamily="34" charset="0"/>
-                <a:ea typeface="Calibri" pitchFamily="34" charset="-122"/>
-                <a:cs typeface="Calibri" pitchFamily="34" charset="-120"/>
-              </a:rPr>
-              <a:t>A padel club can't add courts this season no matter the price. What's its PES this season?</a:t>
-            </a:r>
-            <a:endParaRPr lang="en-US" sz="1800" dirty="0"/>
-          </a:p>
-          <a:p>
-            <a:pPr indent="0" marL="0">
-              <a:lnSpc>
-                <a:spcPct val="130000"/>
-              </a:lnSpc>
-              <a:spcAft>
-                <a:spcPts val="1400"/>
-              </a:spcAft>
-              <a:buNone/>
-            </a:pPr>
-            <a:r>
-              <a:rPr lang="en-US" sz="1800" dirty="0">
-                <a:solidFill>
-                  <a:srgbClr val="1A1A1A"/>
-                </a:solidFill>
-                <a:latin typeface="Calibri" pitchFamily="34" charset="0"/>
-                <a:ea typeface="Calibri" pitchFamily="34" charset="-122"/>
-                <a:cs typeface="Calibri" pitchFamily="34" charset="-120"/>
-              </a:rPr>
-              <a:t>Which makes Tom's grip supply MORE elastic: running at full capacity, or having a spare idle printer?</a:t>
+              <a:t>PES = 0 ÷ 50 = 0 → Perfectly inelastic</a:t>
             </a:r>
             <a:endParaRPr lang="en-US" sz="1800" dirty="0"/>
           </a:p>
@@ -4839,7 +4844,7 @@
         <p:spPr>
           <a:xfrm>
             <a:off x="640080" y="548640"/>
-            <a:ext cx="10881360" cy="822960"/>
+            <a:ext cx="10881360" cy="731520"/>
           </a:xfrm>
           <a:prstGeom prst="rect">
             <a:avLst/>
@@ -4863,7 +4868,7 @@
                 <a:ea typeface="Cambria" pitchFamily="34" charset="-122"/>
                 <a:cs typeface="Cambria" pitchFamily="34" charset="-120"/>
               </a:rPr>
-              <a:t>Recap</a:t>
+              <a:t>The PES spectrum</a:t>
             </a:r>
             <a:endParaRPr lang="en-US" sz="3200" dirty="0"/>
           </a:p>
@@ -4871,92 +4876,736 @@
       </p:sp>
       <p:sp>
         <p:nvSpPr>
-          <p:cNvPr id="3" name="Text 1"/>
-          <p:cNvSpPr/>
-          <p:nvPr/>
-        </p:nvSpPr>
-        <p:spPr>
-          <a:xfrm>
-            <a:off x="822960" y="1828800"/>
-            <a:ext cx="9875520" cy="4114800"/>
-          </a:xfrm>
-          <a:prstGeom prst="rect">
-            <a:avLst/>
-          </a:prstGeom>
-          <a:noFill/>
-          <a:ln/>
-        </p:spPr>
-        <p:txBody>
-          <a:bodyPr wrap="square" rtlCol="0" anchor="t"/>
-          <a:lstStyle/>
-          <a:p>
-            <a:pPr indent="0" marL="0">
-              <a:lnSpc>
-                <a:spcPct val="130000"/>
-              </a:lnSpc>
-              <a:spcAft>
-                <a:spcPts val="1400"/>
-              </a:spcAft>
-              <a:buNone/>
-            </a:pPr>
-            <a:r>
-              <a:rPr lang="en-US" sz="1800" dirty="0">
-                <a:solidFill>
-                  <a:srgbClr val="1A1A1A"/>
-                </a:solidFill>
-                <a:latin typeface="Calibri" pitchFamily="34" charset="0"/>
-                <a:ea typeface="Calibri" pitchFamily="34" charset="-122"/>
-                <a:cs typeface="Calibri" pitchFamily="34" charset="-120"/>
-              </a:rPr>
-              <a:t>PES = %ΔQs ÷ %ΔP — almost always positive.</a:t>
-            </a:r>
-            <a:endParaRPr lang="en-US" sz="1800" dirty="0"/>
-          </a:p>
-          <a:p>
-            <a:pPr indent="0" marL="0">
-              <a:lnSpc>
-                <a:spcPct val="130000"/>
-              </a:lnSpc>
-              <a:spcAft>
-                <a:spcPts val="1400"/>
-              </a:spcAft>
-              <a:buNone/>
-            </a:pPr>
-            <a:r>
-              <a:rPr lang="en-US" sz="1800" dirty="0">
-                <a:solidFill>
-                  <a:srgbClr val="1A1A1A"/>
-                </a:solidFill>
-                <a:latin typeface="Calibri" pitchFamily="34" charset="0"/>
-                <a:ea typeface="Calibri" pitchFamily="34" charset="-122"/>
-                <a:cs typeface="Calibri" pitchFamily="34" charset="-120"/>
-              </a:rPr>
-              <a:t>0 → perfectly inelastic  ·  0–1 → inelastic  ·  1 → unitary  ·  &gt;1 → elastic  ·  ∞ → perfectly elastic</a:t>
-            </a:r>
-            <a:endParaRPr lang="en-US" sz="1800" dirty="0"/>
-          </a:p>
-          <a:p>
-            <a:pPr indent="0" marL="0">
-              <a:lnSpc>
-                <a:spcPct val="130000"/>
-              </a:lnSpc>
-              <a:spcAft>
-                <a:spcPts val="1400"/>
-              </a:spcAft>
-              <a:buNone/>
-            </a:pPr>
-            <a:r>
-              <a:rPr lang="en-US" sz="1800" dirty="0">
-                <a:solidFill>
-                  <a:srgbClr val="1A1A1A"/>
-                </a:solidFill>
-                <a:latin typeface="Calibri" pitchFamily="34" charset="0"/>
-                <a:ea typeface="Calibri" pitchFamily="34" charset="-122"/>
-                <a:cs typeface="Calibri" pitchFamily="34" charset="-120"/>
-              </a:rPr>
-              <a:t>Determinants: spare capacity, factor mobility, time period, ability to store stock, production period, number of producers.</a:t>
-            </a:r>
-            <a:endParaRPr lang="en-US" sz="1800" dirty="0"/>
+          <p:cNvPr id="3" name="Shape 1"/>
+          <p:cNvSpPr/>
+          <p:nvPr/>
+        </p:nvSpPr>
+        <p:spPr>
+          <a:xfrm>
+            <a:off x="1293876" y="2011680"/>
+            <a:ext cx="0" cy="1554480"/>
+          </a:xfrm>
+          <a:prstGeom prst="line">
+            <a:avLst/>
+          </a:prstGeom>
+          <a:noFill/>
+          <a:ln w="15875">
+            <a:solidFill>
+              <a:srgbClr val="1A1A1A"/>
+            </a:solidFill>
+            <a:prstDash val="solid"/>
+          </a:ln>
+        </p:spPr>
+      </p:sp>
+      <p:sp>
+        <p:nvSpPr>
+          <p:cNvPr id="4" name="Shape 2"/>
+          <p:cNvSpPr/>
+          <p:nvPr/>
+        </p:nvSpPr>
+        <p:spPr>
+          <a:xfrm>
+            <a:off x="1293876" y="3566160"/>
+            <a:ext cx="1554480" cy="0"/>
+          </a:xfrm>
+          <a:prstGeom prst="line">
+            <a:avLst/>
+          </a:prstGeom>
+          <a:noFill/>
+          <a:ln w="15875">
+            <a:solidFill>
+              <a:srgbClr val="1A1A1A"/>
+            </a:solidFill>
+            <a:prstDash val="solid"/>
+          </a:ln>
+        </p:spPr>
+      </p:sp>
+      <p:sp>
+        <p:nvSpPr>
+          <p:cNvPr id="5" name="Shape 3"/>
+          <p:cNvSpPr/>
+          <p:nvPr/>
+        </p:nvSpPr>
+        <p:spPr>
+          <a:xfrm>
+            <a:off x="2071116" y="2244852"/>
+            <a:ext cx="0" cy="1088136"/>
+          </a:xfrm>
+          <a:prstGeom prst="line">
+            <a:avLst/>
+          </a:prstGeom>
+          <a:noFill/>
+          <a:ln w="31750">
+            <a:solidFill>
+              <a:srgbClr val="1E2761"/>
+            </a:solidFill>
+            <a:prstDash val="solid"/>
+          </a:ln>
+        </p:spPr>
+      </p:sp>
+      <p:sp>
+        <p:nvSpPr>
+          <p:cNvPr id="6" name="Text 4"/>
+          <p:cNvSpPr/>
+          <p:nvPr/>
+        </p:nvSpPr>
+        <p:spPr>
+          <a:xfrm>
+            <a:off x="1019556" y="3703320"/>
+            <a:ext cx="2103120" cy="320040"/>
+          </a:xfrm>
+          <a:prstGeom prst="rect">
+            <a:avLst/>
+          </a:prstGeom>
+          <a:noFill/>
+          <a:ln/>
+        </p:spPr>
+        <p:txBody>
+          <a:bodyPr wrap="square" rtlCol="0" anchor="ctr"/>
+          <a:lstStyle/>
+          <a:p>
+            <a:pPr algn="ctr" indent="0" marL="0">
+              <a:buNone/>
+            </a:pPr>
+            <a:r>
+              <a:rPr lang="en-US" sz="1200" b="1" dirty="0">
+                <a:solidFill>
+                  <a:srgbClr val="1E2761"/>
+                </a:solidFill>
+                <a:latin typeface="Calibri" pitchFamily="34" charset="0"/>
+                <a:ea typeface="Calibri" pitchFamily="34" charset="-122"/>
+                <a:cs typeface="Calibri" pitchFamily="34" charset="-120"/>
+              </a:rPr>
+              <a:t>Perfectly inelastic</a:t>
+            </a:r>
+            <a:endParaRPr lang="en-US" sz="1200" dirty="0"/>
+          </a:p>
+        </p:txBody>
+      </p:sp>
+      <p:sp>
+        <p:nvSpPr>
+          <p:cNvPr id="7" name="Text 5"/>
+          <p:cNvSpPr/>
+          <p:nvPr/>
+        </p:nvSpPr>
+        <p:spPr>
+          <a:xfrm>
+            <a:off x="1019556" y="4023360"/>
+            <a:ext cx="2103120" cy="274320"/>
+          </a:xfrm>
+          <a:prstGeom prst="rect">
+            <a:avLst/>
+          </a:prstGeom>
+          <a:noFill/>
+          <a:ln/>
+        </p:spPr>
+        <p:txBody>
+          <a:bodyPr wrap="square" rtlCol="0" anchor="ctr"/>
+          <a:lstStyle/>
+          <a:p>
+            <a:pPr algn="ctr" indent="0" marL="0">
+              <a:buNone/>
+            </a:pPr>
+            <a:r>
+              <a:rPr lang="en-US" sz="1100" dirty="0">
+                <a:solidFill>
+                  <a:srgbClr val="5B5B5B"/>
+                </a:solidFill>
+                <a:latin typeface="Calibri" pitchFamily="34" charset="0"/>
+                <a:ea typeface="Calibri" pitchFamily="34" charset="-122"/>
+                <a:cs typeface="Calibri" pitchFamily="34" charset="-120"/>
+              </a:rPr>
+              <a:t>PES = 0</a:t>
+            </a:r>
+            <a:endParaRPr lang="en-US" sz="1100" dirty="0"/>
+          </a:p>
+        </p:txBody>
+      </p:sp>
+      <p:sp>
+        <p:nvSpPr>
+          <p:cNvPr id="8" name="Shape 6"/>
+          <p:cNvSpPr/>
+          <p:nvPr/>
+        </p:nvSpPr>
+        <p:spPr>
+          <a:xfrm>
+            <a:off x="3305556" y="2011680"/>
+            <a:ext cx="0" cy="1554480"/>
+          </a:xfrm>
+          <a:prstGeom prst="line">
+            <a:avLst/>
+          </a:prstGeom>
+          <a:noFill/>
+          <a:ln w="15875">
+            <a:solidFill>
+              <a:srgbClr val="1A1A1A"/>
+            </a:solidFill>
+            <a:prstDash val="solid"/>
+          </a:ln>
+        </p:spPr>
+      </p:sp>
+      <p:sp>
+        <p:nvSpPr>
+          <p:cNvPr id="9" name="Shape 7"/>
+          <p:cNvSpPr/>
+          <p:nvPr/>
+        </p:nvSpPr>
+        <p:spPr>
+          <a:xfrm>
+            <a:off x="3305556" y="3566160"/>
+            <a:ext cx="1554480" cy="0"/>
+          </a:xfrm>
+          <a:prstGeom prst="line">
+            <a:avLst/>
+          </a:prstGeom>
+          <a:noFill/>
+          <a:ln w="15875">
+            <a:solidFill>
+              <a:srgbClr val="1A1A1A"/>
+            </a:solidFill>
+            <a:prstDash val="solid"/>
+          </a:ln>
+        </p:spPr>
+      </p:sp>
+      <p:sp>
+        <p:nvSpPr>
+          <p:cNvPr id="10" name="Shape 8"/>
+          <p:cNvSpPr/>
+          <p:nvPr/>
+        </p:nvSpPr>
+        <p:spPr>
+          <a:xfrm flipV="1">
+            <a:off x="3802990" y="2244852"/>
+            <a:ext cx="559613" cy="1088136"/>
+          </a:xfrm>
+          <a:prstGeom prst="line">
+            <a:avLst/>
+          </a:prstGeom>
+          <a:noFill/>
+          <a:ln w="31750">
+            <a:solidFill>
+              <a:srgbClr val="1E2761"/>
+            </a:solidFill>
+            <a:prstDash val="solid"/>
+          </a:ln>
+        </p:spPr>
+      </p:sp>
+      <p:sp>
+        <p:nvSpPr>
+          <p:cNvPr id="11" name="Text 9"/>
+          <p:cNvSpPr/>
+          <p:nvPr/>
+        </p:nvSpPr>
+        <p:spPr>
+          <a:xfrm>
+            <a:off x="3031236" y="3703320"/>
+            <a:ext cx="2103120" cy="320040"/>
+          </a:xfrm>
+          <a:prstGeom prst="rect">
+            <a:avLst/>
+          </a:prstGeom>
+          <a:noFill/>
+          <a:ln/>
+        </p:spPr>
+        <p:txBody>
+          <a:bodyPr wrap="square" rtlCol="0" anchor="ctr"/>
+          <a:lstStyle/>
+          <a:p>
+            <a:pPr algn="ctr" indent="0" marL="0">
+              <a:buNone/>
+            </a:pPr>
+            <a:r>
+              <a:rPr lang="en-US" sz="1200" b="1" dirty="0">
+                <a:solidFill>
+                  <a:srgbClr val="1E2761"/>
+                </a:solidFill>
+                <a:latin typeface="Calibri" pitchFamily="34" charset="0"/>
+                <a:ea typeface="Calibri" pitchFamily="34" charset="-122"/>
+                <a:cs typeface="Calibri" pitchFamily="34" charset="-120"/>
+              </a:rPr>
+              <a:t>Inelastic</a:t>
+            </a:r>
+            <a:endParaRPr lang="en-US" sz="1200" dirty="0"/>
+          </a:p>
+        </p:txBody>
+      </p:sp>
+      <p:sp>
+        <p:nvSpPr>
+          <p:cNvPr id="12" name="Text 10"/>
+          <p:cNvSpPr/>
+          <p:nvPr/>
+        </p:nvSpPr>
+        <p:spPr>
+          <a:xfrm>
+            <a:off x="3031236" y="4023360"/>
+            <a:ext cx="2103120" cy="274320"/>
+          </a:xfrm>
+          <a:prstGeom prst="rect">
+            <a:avLst/>
+          </a:prstGeom>
+          <a:noFill/>
+          <a:ln/>
+        </p:spPr>
+        <p:txBody>
+          <a:bodyPr wrap="square" rtlCol="0" anchor="ctr"/>
+          <a:lstStyle/>
+          <a:p>
+            <a:pPr algn="ctr" indent="0" marL="0">
+              <a:buNone/>
+            </a:pPr>
+            <a:r>
+              <a:rPr lang="en-US" sz="1100" dirty="0">
+                <a:solidFill>
+                  <a:srgbClr val="5B5B5B"/>
+                </a:solidFill>
+                <a:latin typeface="Calibri" pitchFamily="34" charset="0"/>
+                <a:ea typeface="Calibri" pitchFamily="34" charset="-122"/>
+                <a:cs typeface="Calibri" pitchFamily="34" charset="-120"/>
+              </a:rPr>
+              <a:t>0 &lt; PES &lt; 1</a:t>
+            </a:r>
+            <a:endParaRPr lang="en-US" sz="1100" dirty="0"/>
+          </a:p>
+        </p:txBody>
+      </p:sp>
+      <p:sp>
+        <p:nvSpPr>
+          <p:cNvPr id="13" name="Shape 11"/>
+          <p:cNvSpPr/>
+          <p:nvPr/>
+        </p:nvSpPr>
+        <p:spPr>
+          <a:xfrm>
+            <a:off x="5317236" y="2011680"/>
+            <a:ext cx="0" cy="1554480"/>
+          </a:xfrm>
+          <a:prstGeom prst="line">
+            <a:avLst/>
+          </a:prstGeom>
+          <a:noFill/>
+          <a:ln w="15875">
+            <a:solidFill>
+              <a:srgbClr val="1A1A1A"/>
+            </a:solidFill>
+            <a:prstDash val="solid"/>
+          </a:ln>
+        </p:spPr>
+      </p:sp>
+      <p:sp>
+        <p:nvSpPr>
+          <p:cNvPr id="14" name="Shape 12"/>
+          <p:cNvSpPr/>
+          <p:nvPr/>
+        </p:nvSpPr>
+        <p:spPr>
+          <a:xfrm>
+            <a:off x="5317236" y="3566160"/>
+            <a:ext cx="1554480" cy="0"/>
+          </a:xfrm>
+          <a:prstGeom prst="line">
+            <a:avLst/>
+          </a:prstGeom>
+          <a:noFill/>
+          <a:ln w="15875">
+            <a:solidFill>
+              <a:srgbClr val="1A1A1A"/>
+            </a:solidFill>
+            <a:prstDash val="solid"/>
+          </a:ln>
+        </p:spPr>
+      </p:sp>
+      <p:sp>
+        <p:nvSpPr>
+          <p:cNvPr id="15" name="Shape 13"/>
+          <p:cNvSpPr/>
+          <p:nvPr/>
+        </p:nvSpPr>
+        <p:spPr>
+          <a:xfrm flipV="1">
+            <a:off x="5550408" y="2244852"/>
+            <a:ext cx="1088136" cy="1088136"/>
+          </a:xfrm>
+          <a:prstGeom prst="line">
+            <a:avLst/>
+          </a:prstGeom>
+          <a:noFill/>
+          <a:ln w="31750">
+            <a:solidFill>
+              <a:srgbClr val="F96167"/>
+            </a:solidFill>
+            <a:prstDash val="solid"/>
+          </a:ln>
+        </p:spPr>
+      </p:sp>
+      <p:sp>
+        <p:nvSpPr>
+          <p:cNvPr id="16" name="Text 14"/>
+          <p:cNvSpPr/>
+          <p:nvPr/>
+        </p:nvSpPr>
+        <p:spPr>
+          <a:xfrm>
+            <a:off x="5042916" y="3703320"/>
+            <a:ext cx="2103120" cy="320040"/>
+          </a:xfrm>
+          <a:prstGeom prst="rect">
+            <a:avLst/>
+          </a:prstGeom>
+          <a:noFill/>
+          <a:ln/>
+        </p:spPr>
+        <p:txBody>
+          <a:bodyPr wrap="square" rtlCol="0" anchor="ctr"/>
+          <a:lstStyle/>
+          <a:p>
+            <a:pPr algn="ctr" indent="0" marL="0">
+              <a:buNone/>
+            </a:pPr>
+            <a:r>
+              <a:rPr lang="en-US" sz="1200" b="1" dirty="0">
+                <a:solidFill>
+                  <a:srgbClr val="1E2761"/>
+                </a:solidFill>
+                <a:latin typeface="Calibri" pitchFamily="34" charset="0"/>
+                <a:ea typeface="Calibri" pitchFamily="34" charset="-122"/>
+                <a:cs typeface="Calibri" pitchFamily="34" charset="-120"/>
+              </a:rPr>
+              <a:t>Unitary</a:t>
+            </a:r>
+            <a:endParaRPr lang="en-US" sz="1200" dirty="0"/>
+          </a:p>
+        </p:txBody>
+      </p:sp>
+      <p:sp>
+        <p:nvSpPr>
+          <p:cNvPr id="17" name="Text 15"/>
+          <p:cNvSpPr/>
+          <p:nvPr/>
+        </p:nvSpPr>
+        <p:spPr>
+          <a:xfrm>
+            <a:off x="5042916" y="4023360"/>
+            <a:ext cx="2103120" cy="274320"/>
+          </a:xfrm>
+          <a:prstGeom prst="rect">
+            <a:avLst/>
+          </a:prstGeom>
+          <a:noFill/>
+          <a:ln/>
+        </p:spPr>
+        <p:txBody>
+          <a:bodyPr wrap="square" rtlCol="0" anchor="ctr"/>
+          <a:lstStyle/>
+          <a:p>
+            <a:pPr algn="ctr" indent="0" marL="0">
+              <a:buNone/>
+            </a:pPr>
+            <a:r>
+              <a:rPr lang="en-US" sz="1100" dirty="0">
+                <a:solidFill>
+                  <a:srgbClr val="5B5B5B"/>
+                </a:solidFill>
+                <a:latin typeface="Calibri" pitchFamily="34" charset="0"/>
+                <a:ea typeface="Calibri" pitchFamily="34" charset="-122"/>
+                <a:cs typeface="Calibri" pitchFamily="34" charset="-120"/>
+              </a:rPr>
+              <a:t>PES = 1</a:t>
+            </a:r>
+            <a:endParaRPr lang="en-US" sz="1100" dirty="0"/>
+          </a:p>
+        </p:txBody>
+      </p:sp>
+      <p:sp>
+        <p:nvSpPr>
+          <p:cNvPr id="18" name="Shape 16"/>
+          <p:cNvSpPr/>
+          <p:nvPr/>
+        </p:nvSpPr>
+        <p:spPr>
+          <a:xfrm>
+            <a:off x="7328916" y="2011680"/>
+            <a:ext cx="0" cy="1554480"/>
+          </a:xfrm>
+          <a:prstGeom prst="line">
+            <a:avLst/>
+          </a:prstGeom>
+          <a:noFill/>
+          <a:ln w="15875">
+            <a:solidFill>
+              <a:srgbClr val="1A1A1A"/>
+            </a:solidFill>
+            <a:prstDash val="solid"/>
+          </a:ln>
+        </p:spPr>
+      </p:sp>
+      <p:sp>
+        <p:nvSpPr>
+          <p:cNvPr id="19" name="Shape 17"/>
+          <p:cNvSpPr/>
+          <p:nvPr/>
+        </p:nvSpPr>
+        <p:spPr>
+          <a:xfrm>
+            <a:off x="7328916" y="3566160"/>
+            <a:ext cx="1554480" cy="0"/>
+          </a:xfrm>
+          <a:prstGeom prst="line">
+            <a:avLst/>
+          </a:prstGeom>
+          <a:noFill/>
+          <a:ln w="15875">
+            <a:solidFill>
+              <a:srgbClr val="1A1A1A"/>
+            </a:solidFill>
+            <a:prstDash val="solid"/>
+          </a:ln>
+        </p:spPr>
+      </p:sp>
+      <p:sp>
+        <p:nvSpPr>
+          <p:cNvPr id="20" name="Shape 18"/>
+          <p:cNvSpPr/>
+          <p:nvPr/>
+        </p:nvSpPr>
+        <p:spPr>
+          <a:xfrm>
+            <a:off x="7562088" y="2555748"/>
+            <a:ext cx="1088136" cy="466344"/>
+          </a:xfrm>
+          <a:prstGeom prst="line">
+            <a:avLst/>
+          </a:prstGeom>
+          <a:noFill/>
+          <a:ln w="31750">
+            <a:solidFill>
+              <a:srgbClr val="1BAF7A"/>
+            </a:solidFill>
+            <a:prstDash val="solid"/>
+          </a:ln>
+        </p:spPr>
+      </p:sp>
+      <p:sp>
+        <p:nvSpPr>
+          <p:cNvPr id="21" name="Text 19"/>
+          <p:cNvSpPr/>
+          <p:nvPr/>
+        </p:nvSpPr>
+        <p:spPr>
+          <a:xfrm>
+            <a:off x="7054596" y="3703320"/>
+            <a:ext cx="2103120" cy="320040"/>
+          </a:xfrm>
+          <a:prstGeom prst="rect">
+            <a:avLst/>
+          </a:prstGeom>
+          <a:noFill/>
+          <a:ln/>
+        </p:spPr>
+        <p:txBody>
+          <a:bodyPr wrap="square" rtlCol="0" anchor="ctr"/>
+          <a:lstStyle/>
+          <a:p>
+            <a:pPr algn="ctr" indent="0" marL="0">
+              <a:buNone/>
+            </a:pPr>
+            <a:r>
+              <a:rPr lang="en-US" sz="1200" b="1" dirty="0">
+                <a:solidFill>
+                  <a:srgbClr val="1E2761"/>
+                </a:solidFill>
+                <a:latin typeface="Calibri" pitchFamily="34" charset="0"/>
+                <a:ea typeface="Calibri" pitchFamily="34" charset="-122"/>
+                <a:cs typeface="Calibri" pitchFamily="34" charset="-120"/>
+              </a:rPr>
+              <a:t>Elastic</a:t>
+            </a:r>
+            <a:endParaRPr lang="en-US" sz="1200" dirty="0"/>
+          </a:p>
+        </p:txBody>
+      </p:sp>
+      <p:sp>
+        <p:nvSpPr>
+          <p:cNvPr id="22" name="Text 20"/>
+          <p:cNvSpPr/>
+          <p:nvPr/>
+        </p:nvSpPr>
+        <p:spPr>
+          <a:xfrm>
+            <a:off x="7054596" y="4023360"/>
+            <a:ext cx="2103120" cy="274320"/>
+          </a:xfrm>
+          <a:prstGeom prst="rect">
+            <a:avLst/>
+          </a:prstGeom>
+          <a:noFill/>
+          <a:ln/>
+        </p:spPr>
+        <p:txBody>
+          <a:bodyPr wrap="square" rtlCol="0" anchor="ctr"/>
+          <a:lstStyle/>
+          <a:p>
+            <a:pPr algn="ctr" indent="0" marL="0">
+              <a:buNone/>
+            </a:pPr>
+            <a:r>
+              <a:rPr lang="en-US" sz="1100" dirty="0">
+                <a:solidFill>
+                  <a:srgbClr val="5B5B5B"/>
+                </a:solidFill>
+                <a:latin typeface="Calibri" pitchFamily="34" charset="0"/>
+                <a:ea typeface="Calibri" pitchFamily="34" charset="-122"/>
+                <a:cs typeface="Calibri" pitchFamily="34" charset="-120"/>
+              </a:rPr>
+              <a:t>PES &gt; 1</a:t>
+            </a:r>
+            <a:endParaRPr lang="en-US" sz="1100" dirty="0"/>
+          </a:p>
+        </p:txBody>
+      </p:sp>
+      <p:sp>
+        <p:nvSpPr>
+          <p:cNvPr id="23" name="Shape 21"/>
+          <p:cNvSpPr/>
+          <p:nvPr/>
+        </p:nvSpPr>
+        <p:spPr>
+          <a:xfrm>
+            <a:off x="9340596" y="2011680"/>
+            <a:ext cx="0" cy="1554480"/>
+          </a:xfrm>
+          <a:prstGeom prst="line">
+            <a:avLst/>
+          </a:prstGeom>
+          <a:noFill/>
+          <a:ln w="15875">
+            <a:solidFill>
+              <a:srgbClr val="1A1A1A"/>
+            </a:solidFill>
+            <a:prstDash val="solid"/>
+          </a:ln>
+        </p:spPr>
+      </p:sp>
+      <p:sp>
+        <p:nvSpPr>
+          <p:cNvPr id="24" name="Shape 22"/>
+          <p:cNvSpPr/>
+          <p:nvPr/>
+        </p:nvSpPr>
+        <p:spPr>
+          <a:xfrm>
+            <a:off x="9340596" y="3566160"/>
+            <a:ext cx="1554480" cy="0"/>
+          </a:xfrm>
+          <a:prstGeom prst="line">
+            <a:avLst/>
+          </a:prstGeom>
+          <a:noFill/>
+          <a:ln w="15875">
+            <a:solidFill>
+              <a:srgbClr val="1A1A1A"/>
+            </a:solidFill>
+            <a:prstDash val="solid"/>
+          </a:ln>
+        </p:spPr>
+      </p:sp>
+      <p:sp>
+        <p:nvSpPr>
+          <p:cNvPr id="25" name="Shape 23"/>
+          <p:cNvSpPr/>
+          <p:nvPr/>
+        </p:nvSpPr>
+        <p:spPr>
+          <a:xfrm>
+            <a:off x="9573768" y="2788920"/>
+            <a:ext cx="1088136" cy="0"/>
+          </a:xfrm>
+          <a:prstGeom prst="line">
+            <a:avLst/>
+          </a:prstGeom>
+          <a:noFill/>
+          <a:ln w="31750">
+            <a:solidFill>
+              <a:srgbClr val="1BAF7A"/>
+            </a:solidFill>
+            <a:prstDash val="solid"/>
+          </a:ln>
+        </p:spPr>
+      </p:sp>
+      <p:sp>
+        <p:nvSpPr>
+          <p:cNvPr id="26" name="Text 24"/>
+          <p:cNvSpPr/>
+          <p:nvPr/>
+        </p:nvSpPr>
+        <p:spPr>
+          <a:xfrm>
+            <a:off x="9066276" y="3703320"/>
+            <a:ext cx="2103120" cy="320040"/>
+          </a:xfrm>
+          <a:prstGeom prst="rect">
+            <a:avLst/>
+          </a:prstGeom>
+          <a:noFill/>
+          <a:ln/>
+        </p:spPr>
+        <p:txBody>
+          <a:bodyPr wrap="square" rtlCol="0" anchor="ctr"/>
+          <a:lstStyle/>
+          <a:p>
+            <a:pPr algn="ctr" indent="0" marL="0">
+              <a:buNone/>
+            </a:pPr>
+            <a:r>
+              <a:rPr lang="en-US" sz="1200" b="1" dirty="0">
+                <a:solidFill>
+                  <a:srgbClr val="1E2761"/>
+                </a:solidFill>
+                <a:latin typeface="Calibri" pitchFamily="34" charset="0"/>
+                <a:ea typeface="Calibri" pitchFamily="34" charset="-122"/>
+                <a:cs typeface="Calibri" pitchFamily="34" charset="-120"/>
+              </a:rPr>
+              <a:t>Perfectly elastic</a:t>
+            </a:r>
+            <a:endParaRPr lang="en-US" sz="1200" dirty="0"/>
+          </a:p>
+        </p:txBody>
+      </p:sp>
+      <p:sp>
+        <p:nvSpPr>
+          <p:cNvPr id="27" name="Text 25"/>
+          <p:cNvSpPr/>
+          <p:nvPr/>
+        </p:nvSpPr>
+        <p:spPr>
+          <a:xfrm>
+            <a:off x="9066276" y="4023360"/>
+            <a:ext cx="2103120" cy="274320"/>
+          </a:xfrm>
+          <a:prstGeom prst="rect">
+            <a:avLst/>
+          </a:prstGeom>
+          <a:noFill/>
+          <a:ln/>
+        </p:spPr>
+        <p:txBody>
+          <a:bodyPr wrap="square" rtlCol="0" anchor="ctr"/>
+          <a:lstStyle/>
+          <a:p>
+            <a:pPr algn="ctr" indent="0" marL="0">
+              <a:buNone/>
+            </a:pPr>
+            <a:r>
+              <a:rPr lang="en-US" sz="1100" dirty="0">
+                <a:solidFill>
+                  <a:srgbClr val="5B5B5B"/>
+                </a:solidFill>
+                <a:latin typeface="Calibri" pitchFamily="34" charset="0"/>
+                <a:ea typeface="Calibri" pitchFamily="34" charset="-122"/>
+                <a:cs typeface="Calibri" pitchFamily="34" charset="-120"/>
+              </a:rPr>
+              <a:t>PES = ∞</a:t>
+            </a:r>
+            <a:endParaRPr lang="en-US" sz="1100" dirty="0"/>
           </a:p>
         </p:txBody>
       </p:sp>
@@ -4974,7 +5623,7 @@
     <p:bg>
       <p:bgPr>
         <a:solidFill>
-          <a:srgbClr val="1E2761"/>
+          <a:srgbClr val="FFFFFF"/>
         </a:solidFill>
       </p:bgPr>
     </p:bg>
@@ -5000,8 +5649,8 @@
         </p:nvSpPr>
         <p:spPr>
           <a:xfrm>
-            <a:off x="640080" y="2103120"/>
-            <a:ext cx="10881360" cy="457200"/>
+            <a:off x="640080" y="548640"/>
+            <a:ext cx="10881360" cy="731520"/>
           </a:xfrm>
           <a:prstGeom prst="rect">
             <a:avLst/>
@@ -5017,58 +5666,41 @@
               <a:buNone/>
             </a:pPr>
             <a:r>
-              <a:rPr lang="en-US" sz="1400" b="1" spc="200" kern="0" dirty="0">
-                <a:solidFill>
-                  <a:srgbClr val="CADCFC"/>
-                </a:solidFill>
-                <a:latin typeface="Calibri" pitchFamily="34" charset="0"/>
-                <a:ea typeface="Calibri" pitchFamily="34" charset="-122"/>
-                <a:cs typeface="Calibri" pitchFamily="34" charset="-120"/>
-              </a:rPr>
-              <a:t>NEXT LESSON</a:t>
-            </a:r>
-            <a:endParaRPr lang="en-US" sz="1400" dirty="0"/>
-          </a:p>
-        </p:txBody>
-      </p:sp>
-      <p:sp>
-        <p:nvSpPr>
-          <p:cNvPr id="3" name="Text 1"/>
-          <p:cNvSpPr/>
-          <p:nvPr/>
-        </p:nvSpPr>
-        <p:spPr>
-          <a:xfrm>
-            <a:off x="640080" y="2560320"/>
-            <a:ext cx="10881360" cy="1463040"/>
-          </a:xfrm>
-          <a:prstGeom prst="rect">
-            <a:avLst/>
-          </a:prstGeom>
-          <a:noFill/>
-          <a:ln/>
-        </p:spPr>
-        <p:txBody>
-          <a:bodyPr wrap="square" rtlCol="0" anchor="ctr"/>
-          <a:lstStyle/>
-          <a:p>
-            <a:pPr indent="0" marL="0">
-              <a:buNone/>
-            </a:pPr>
-            <a:r>
-              <a:rPr lang="en-US" sz="4400" b="1" dirty="0">
-                <a:solidFill>
-                  <a:srgbClr val="FFFFFF"/>
+              <a:rPr lang="en-US" sz="3000" b="1" dirty="0">
+                <a:solidFill>
+                  <a:srgbClr val="1E2761"/>
                 </a:solidFill>
                 <a:latin typeface="Cambria" pitchFamily="34" charset="0"/>
                 <a:ea typeface="Cambria" pitchFamily="34" charset="-122"/>
                 <a:cs typeface="Cambria" pitchFamily="34" charset="-120"/>
               </a:rPr>
-              <a:t>The market economic system</a:t>
-            </a:r>
-            <a:endParaRPr lang="en-US" sz="4400" dirty="0"/>
-          </a:p>
-        </p:txBody>
+              <a:t>Determinants of PES (1/2)</a:t>
+            </a:r>
+            <a:endParaRPr lang="en-US" sz="3000" dirty="0"/>
+          </a:p>
+        </p:txBody>
+      </p:sp>
+      <p:sp>
+        <p:nvSpPr>
+          <p:cNvPr id="3" name="Shape 1"/>
+          <p:cNvSpPr/>
+          <p:nvPr/>
+        </p:nvSpPr>
+        <p:spPr>
+          <a:xfrm>
+            <a:off x="790956" y="1828800"/>
+            <a:ext cx="3291840" cy="3108960"/>
+          </a:xfrm>
+          <a:prstGeom prst="roundRect">
+            <a:avLst>
+              <a:gd name="adj" fmla="val 3529"/>
+            </a:avLst>
+          </a:prstGeom>
+          <a:solidFill>
+            <a:srgbClr val="F4F5F7"/>
+          </a:solidFill>
+          <a:ln/>
+        </p:spPr>
       </p:sp>
       <p:sp>
         <p:nvSpPr>
@@ -5078,8 +5710,8 @@
         </p:nvSpPr>
         <p:spPr>
           <a:xfrm>
-            <a:off x="640080" y="3931920"/>
-            <a:ext cx="9601200" cy="731520"/>
+            <a:off x="1065276" y="2103120"/>
+            <a:ext cx="2743200" cy="548640"/>
           </a:xfrm>
           <a:prstGeom prst="rect">
             <a:avLst/>
@@ -5095,15 +5727,782 @@
               <a:buNone/>
             </a:pPr>
             <a:r>
+              <a:rPr lang="en-US" sz="1600" b="1" dirty="0">
+                <a:solidFill>
+                  <a:srgbClr val="1E2761"/>
+                </a:solidFill>
+                <a:latin typeface="Calibri" pitchFamily="34" charset="0"/>
+                <a:ea typeface="Calibri" pitchFamily="34" charset="-122"/>
+                <a:cs typeface="Calibri" pitchFamily="34" charset="-120"/>
+              </a:rPr>
+              <a:t>Spare capacity</a:t>
+            </a:r>
+            <a:endParaRPr lang="en-US" sz="1600" dirty="0"/>
+          </a:p>
+        </p:txBody>
+      </p:sp>
+      <p:sp>
+        <p:nvSpPr>
+          <p:cNvPr id="5" name="Text 3"/>
+          <p:cNvSpPr/>
+          <p:nvPr/>
+        </p:nvSpPr>
+        <p:spPr>
+          <a:xfrm>
+            <a:off x="1065276" y="2697480"/>
+            <a:ext cx="2743200" cy="2011680"/>
+          </a:xfrm>
+          <a:prstGeom prst="rect">
+            <a:avLst/>
+          </a:prstGeom>
+          <a:noFill/>
+          <a:ln/>
+        </p:spPr>
+        <p:txBody>
+          <a:bodyPr wrap="square" rtlCol="0" anchor="t"/>
+          <a:lstStyle/>
+          <a:p>
+            <a:pPr indent="0" marL="0">
+              <a:lnSpc>
+                <a:spcPct val="125000"/>
+              </a:lnSpc>
+              <a:buNone/>
+            </a:pPr>
+            <a:r>
+              <a:rPr lang="en-US" sz="1250" dirty="0">
+                <a:solidFill>
+                  <a:srgbClr val="1A1A1A"/>
+                </a:solidFill>
+                <a:latin typeface="Calibri" pitchFamily="34" charset="0"/>
+                <a:ea typeface="Calibri" pitchFamily="34" charset="-122"/>
+                <a:cs typeface="Calibri" pitchFamily="34" charset="-120"/>
+              </a:rPr>
+              <a:t>Unused machinery/staff time = more elastic. Tom's idle second printer can start immediately.</a:t>
+            </a:r>
+            <a:endParaRPr lang="en-US" sz="1250" dirty="0"/>
+          </a:p>
+        </p:txBody>
+      </p:sp>
+      <p:sp>
+        <p:nvSpPr>
+          <p:cNvPr id="6" name="Shape 4"/>
+          <p:cNvSpPr/>
+          <p:nvPr/>
+        </p:nvSpPr>
+        <p:spPr>
+          <a:xfrm>
+            <a:off x="4448556" y="1828800"/>
+            <a:ext cx="3291840" cy="3108960"/>
+          </a:xfrm>
+          <a:prstGeom prst="roundRect">
+            <a:avLst>
+              <a:gd name="adj" fmla="val 3529"/>
+            </a:avLst>
+          </a:prstGeom>
+          <a:solidFill>
+            <a:srgbClr val="F4F5F7"/>
+          </a:solidFill>
+          <a:ln/>
+        </p:spPr>
+      </p:sp>
+      <p:sp>
+        <p:nvSpPr>
+          <p:cNvPr id="7" name="Text 5"/>
+          <p:cNvSpPr/>
+          <p:nvPr/>
+        </p:nvSpPr>
+        <p:spPr>
+          <a:xfrm>
+            <a:off x="4722876" y="2103120"/>
+            <a:ext cx="2743200" cy="548640"/>
+          </a:xfrm>
+          <a:prstGeom prst="rect">
+            <a:avLst/>
+          </a:prstGeom>
+          <a:noFill/>
+          <a:ln/>
+        </p:spPr>
+        <p:txBody>
+          <a:bodyPr wrap="square" rtlCol="0" anchor="ctr"/>
+          <a:lstStyle/>
+          <a:p>
+            <a:pPr indent="0" marL="0">
+              <a:buNone/>
+            </a:pPr>
+            <a:r>
+              <a:rPr lang="en-US" sz="1600" b="1" dirty="0">
+                <a:solidFill>
+                  <a:srgbClr val="1E2761"/>
+                </a:solidFill>
+                <a:latin typeface="Calibri" pitchFamily="34" charset="0"/>
+                <a:ea typeface="Calibri" pitchFamily="34" charset="-122"/>
+                <a:cs typeface="Calibri" pitchFamily="34" charset="-120"/>
+              </a:rPr>
+              <a:t>Factor mobility</a:t>
+            </a:r>
+            <a:endParaRPr lang="en-US" sz="1600" dirty="0"/>
+          </a:p>
+        </p:txBody>
+      </p:sp>
+      <p:sp>
+        <p:nvSpPr>
+          <p:cNvPr id="8" name="Text 6"/>
+          <p:cNvSpPr/>
+          <p:nvPr/>
+        </p:nvSpPr>
+        <p:spPr>
+          <a:xfrm>
+            <a:off x="4722876" y="2697480"/>
+            <a:ext cx="2743200" cy="2011680"/>
+          </a:xfrm>
+          <a:prstGeom prst="rect">
+            <a:avLst/>
+          </a:prstGeom>
+          <a:noFill/>
+          <a:ln/>
+        </p:spPr>
+        <p:txBody>
+          <a:bodyPr wrap="square" rtlCol="0" anchor="t"/>
+          <a:lstStyle/>
+          <a:p>
+            <a:pPr indent="0" marL="0">
+              <a:lnSpc>
+                <a:spcPct val="125000"/>
+              </a:lnSpc>
+              <a:buNone/>
+            </a:pPr>
+            <a:r>
+              <a:rPr lang="en-US" sz="1250" dirty="0">
+                <a:solidFill>
+                  <a:srgbClr val="1A1A1A"/>
+                </a:solidFill>
+                <a:latin typeface="Calibri" pitchFamily="34" charset="0"/>
+                <a:ea typeface="Calibri" pitchFamily="34" charset="-122"/>
+                <a:cs typeface="Calibri" pitchFamily="34" charset="-120"/>
+              </a:rPr>
+              <a:t>Easy for labour/capital to switch tasks = more elastic. Hard-to-retrain specialist staff = more inelastic.</a:t>
+            </a:r>
+            <a:endParaRPr lang="en-US" sz="1250" dirty="0"/>
+          </a:p>
+        </p:txBody>
+      </p:sp>
+      <p:sp>
+        <p:nvSpPr>
+          <p:cNvPr id="9" name="Shape 7"/>
+          <p:cNvSpPr/>
+          <p:nvPr/>
+        </p:nvSpPr>
+        <p:spPr>
+          <a:xfrm>
+            <a:off x="8106156" y="1828800"/>
+            <a:ext cx="3291840" cy="3108960"/>
+          </a:xfrm>
+          <a:prstGeom prst="roundRect">
+            <a:avLst>
+              <a:gd name="adj" fmla="val 3529"/>
+            </a:avLst>
+          </a:prstGeom>
+          <a:solidFill>
+            <a:srgbClr val="F4F5F7"/>
+          </a:solidFill>
+          <a:ln/>
+        </p:spPr>
+      </p:sp>
+      <p:sp>
+        <p:nvSpPr>
+          <p:cNvPr id="10" name="Text 8"/>
+          <p:cNvSpPr/>
+          <p:nvPr/>
+        </p:nvSpPr>
+        <p:spPr>
+          <a:xfrm>
+            <a:off x="8380476" y="2103120"/>
+            <a:ext cx="2743200" cy="548640"/>
+          </a:xfrm>
+          <a:prstGeom prst="rect">
+            <a:avLst/>
+          </a:prstGeom>
+          <a:noFill/>
+          <a:ln/>
+        </p:spPr>
+        <p:txBody>
+          <a:bodyPr wrap="square" rtlCol="0" anchor="ctr"/>
+          <a:lstStyle/>
+          <a:p>
+            <a:pPr indent="0" marL="0">
+              <a:buNone/>
+            </a:pPr>
+            <a:r>
+              <a:rPr lang="en-US" sz="1600" b="1" dirty="0">
+                <a:solidFill>
+                  <a:srgbClr val="1E2761"/>
+                </a:solidFill>
+                <a:latin typeface="Calibri" pitchFamily="34" charset="0"/>
+                <a:ea typeface="Calibri" pitchFamily="34" charset="-122"/>
+                <a:cs typeface="Calibri" pitchFamily="34" charset="-120"/>
+              </a:rPr>
+              <a:t>Time period</a:t>
+            </a:r>
+            <a:endParaRPr lang="en-US" sz="1600" dirty="0"/>
+          </a:p>
+        </p:txBody>
+      </p:sp>
+      <p:sp>
+        <p:nvSpPr>
+          <p:cNvPr id="11" name="Text 9"/>
+          <p:cNvSpPr/>
+          <p:nvPr/>
+        </p:nvSpPr>
+        <p:spPr>
+          <a:xfrm>
+            <a:off x="8380476" y="2697480"/>
+            <a:ext cx="2743200" cy="2011680"/>
+          </a:xfrm>
+          <a:prstGeom prst="rect">
+            <a:avLst/>
+          </a:prstGeom>
+          <a:noFill/>
+          <a:ln/>
+        </p:spPr>
+        <p:txBody>
+          <a:bodyPr wrap="square" rtlCol="0" anchor="t"/>
+          <a:lstStyle/>
+          <a:p>
+            <a:pPr indent="0" marL="0">
+              <a:lnSpc>
+                <a:spcPct val="125000"/>
+              </a:lnSpc>
+              <a:buNone/>
+            </a:pPr>
+            <a:r>
+              <a:rPr lang="en-US" sz="1250" dirty="0">
+                <a:solidFill>
+                  <a:srgbClr val="1A1A1A"/>
+                </a:solidFill>
+                <a:latin typeface="Calibri" pitchFamily="34" charset="0"/>
+                <a:ea typeface="Calibri" pitchFamily="34" charset="-122"/>
+                <a:cs typeface="Calibri" pitchFamily="34" charset="-120"/>
+              </a:rPr>
+              <a:t>More elastic in the long run — more time to build capacity, hire staff, or build new courts.</a:t>
+            </a:r>
+            <a:endParaRPr lang="en-US" sz="1250" dirty="0"/>
+          </a:p>
+        </p:txBody>
+      </p:sp>
+    </p:spTree>
+  </p:cSld>
+  <p:clrMapOvr>
+    <a:masterClrMapping/>
+  </p:clrMapOvr>
+</p:sld>
+</file>
+
+<file path=ppt/slides/slide18.xml><?xml version="1.0" encoding="utf-8"?>
+<p:sld xmlns:a="http://schemas.openxmlformats.org/drawingml/2006/main" xmlns:r="http://schemas.openxmlformats.org/officeDocument/2006/relationships" xmlns:p="http://schemas.openxmlformats.org/presentationml/2006/main">
+  <p:cSld name="Slide 18">
+    <p:bg>
+      <p:bgPr>
+        <a:solidFill>
+          <a:srgbClr val="FFFFFF"/>
+        </a:solidFill>
+      </p:bgPr>
+    </p:bg>
+    <p:spTree>
+      <p:nvGrpSpPr>
+        <p:cNvPr id="1" name=""/>
+        <p:cNvGrpSpPr/>
+        <p:nvPr/>
+      </p:nvGrpSpPr>
+      <p:grpSpPr>
+        <a:xfrm>
+          <a:off x="0" y="0"/>
+          <a:ext cx="0" cy="0"/>
+          <a:chOff x="0" y="0"/>
+          <a:chExt cx="0" cy="0"/>
+        </a:xfrm>
+      </p:grpSpPr>
+      <p:sp>
+        <p:nvSpPr>
+          <p:cNvPr id="2" name="Text 0"/>
+          <p:cNvSpPr/>
+          <p:nvPr/>
+        </p:nvSpPr>
+        <p:spPr>
+          <a:xfrm>
+            <a:off x="640080" y="548640"/>
+            <a:ext cx="10881360" cy="731520"/>
+          </a:xfrm>
+          <a:prstGeom prst="rect">
+            <a:avLst/>
+          </a:prstGeom>
+          <a:noFill/>
+          <a:ln/>
+        </p:spPr>
+        <p:txBody>
+          <a:bodyPr wrap="square" rtlCol="0" anchor="ctr"/>
+          <a:lstStyle/>
+          <a:p>
+            <a:pPr indent="0" marL="0">
+              <a:buNone/>
+            </a:pPr>
+            <a:r>
+              <a:rPr lang="en-US" sz="3000" b="1" dirty="0">
+                <a:solidFill>
+                  <a:srgbClr val="1E2761"/>
+                </a:solidFill>
+                <a:latin typeface="Cambria" pitchFamily="34" charset="0"/>
+                <a:ea typeface="Cambria" pitchFamily="34" charset="-122"/>
+                <a:cs typeface="Cambria" pitchFamily="34" charset="-120"/>
+              </a:rPr>
+              <a:t>Determinants of PES (2/2)</a:t>
+            </a:r>
+            <a:endParaRPr lang="en-US" sz="3000" dirty="0"/>
+          </a:p>
+        </p:txBody>
+      </p:sp>
+      <p:sp>
+        <p:nvSpPr>
+          <p:cNvPr id="3" name="Shape 1"/>
+          <p:cNvSpPr/>
+          <p:nvPr/>
+        </p:nvSpPr>
+        <p:spPr>
+          <a:xfrm>
+            <a:off x="790956" y="1828800"/>
+            <a:ext cx="3291840" cy="3108960"/>
+          </a:xfrm>
+          <a:prstGeom prst="roundRect">
+            <a:avLst>
+              <a:gd name="adj" fmla="val 3529"/>
+            </a:avLst>
+          </a:prstGeom>
+          <a:solidFill>
+            <a:srgbClr val="F4F5F7"/>
+          </a:solidFill>
+          <a:ln/>
+        </p:spPr>
+      </p:sp>
+      <p:sp>
+        <p:nvSpPr>
+          <p:cNvPr id="4" name="Text 2"/>
+          <p:cNvSpPr/>
+          <p:nvPr/>
+        </p:nvSpPr>
+        <p:spPr>
+          <a:xfrm>
+            <a:off x="1065276" y="2103120"/>
+            <a:ext cx="2743200" cy="548640"/>
+          </a:xfrm>
+          <a:prstGeom prst="rect">
+            <a:avLst/>
+          </a:prstGeom>
+          <a:noFill/>
+          <a:ln/>
+        </p:spPr>
+        <p:txBody>
+          <a:bodyPr wrap="square" rtlCol="0" anchor="ctr"/>
+          <a:lstStyle/>
+          <a:p>
+            <a:pPr indent="0" marL="0">
+              <a:buNone/>
+            </a:pPr>
+            <a:r>
+              <a:rPr lang="en-US" sz="1600" b="1" dirty="0">
+                <a:solidFill>
+                  <a:srgbClr val="1E2761"/>
+                </a:solidFill>
+                <a:latin typeface="Calibri" pitchFamily="34" charset="0"/>
+                <a:ea typeface="Calibri" pitchFamily="34" charset="-122"/>
+                <a:cs typeface="Calibri" pitchFamily="34" charset="-120"/>
+              </a:rPr>
+              <a:t>Ability to store stock</a:t>
+            </a:r>
+            <a:endParaRPr lang="en-US" sz="1600" dirty="0"/>
+          </a:p>
+        </p:txBody>
+      </p:sp>
+      <p:sp>
+        <p:nvSpPr>
+          <p:cNvPr id="5" name="Text 3"/>
+          <p:cNvSpPr/>
+          <p:nvPr/>
+        </p:nvSpPr>
+        <p:spPr>
+          <a:xfrm>
+            <a:off x="1065276" y="2697480"/>
+            <a:ext cx="2743200" cy="2011680"/>
+          </a:xfrm>
+          <a:prstGeom prst="rect">
+            <a:avLst/>
+          </a:prstGeom>
+          <a:noFill/>
+          <a:ln/>
+        </p:spPr>
+        <p:txBody>
+          <a:bodyPr wrap="square" rtlCol="0" anchor="t"/>
+          <a:lstStyle/>
+          <a:p>
+            <a:pPr indent="0" marL="0">
+              <a:lnSpc>
+                <a:spcPct val="125000"/>
+              </a:lnSpc>
+              <a:buNone/>
+            </a:pPr>
+            <a:r>
+              <a:rPr lang="en-US" sz="1250" dirty="0">
+                <a:solidFill>
+                  <a:srgbClr val="1A1A1A"/>
+                </a:solidFill>
+                <a:latin typeface="Calibri" pitchFamily="34" charset="0"/>
+                <a:ea typeface="Calibri" pitchFamily="34" charset="-122"/>
+                <a:cs typeface="Calibri" pitchFamily="34" charset="-120"/>
+              </a:rPr>
+              <a:t>Goods that can be stockpiled and released later = more elastic. A padel lesson (a service) can't be stored — more inelastic.</a:t>
+            </a:r>
+            <a:endParaRPr lang="en-US" sz="1250" dirty="0"/>
+          </a:p>
+        </p:txBody>
+      </p:sp>
+      <p:sp>
+        <p:nvSpPr>
+          <p:cNvPr id="6" name="Shape 4"/>
+          <p:cNvSpPr/>
+          <p:nvPr/>
+        </p:nvSpPr>
+        <p:spPr>
+          <a:xfrm>
+            <a:off x="4448556" y="1828800"/>
+            <a:ext cx="3291840" cy="3108960"/>
+          </a:xfrm>
+          <a:prstGeom prst="roundRect">
+            <a:avLst>
+              <a:gd name="adj" fmla="val 3529"/>
+            </a:avLst>
+          </a:prstGeom>
+          <a:solidFill>
+            <a:srgbClr val="F4F5F7"/>
+          </a:solidFill>
+          <a:ln/>
+        </p:spPr>
+      </p:sp>
+      <p:sp>
+        <p:nvSpPr>
+          <p:cNvPr id="7" name="Text 5"/>
+          <p:cNvSpPr/>
+          <p:nvPr/>
+        </p:nvSpPr>
+        <p:spPr>
+          <a:xfrm>
+            <a:off x="4722876" y="2103120"/>
+            <a:ext cx="2743200" cy="548640"/>
+          </a:xfrm>
+          <a:prstGeom prst="rect">
+            <a:avLst/>
+          </a:prstGeom>
+          <a:noFill/>
+          <a:ln/>
+        </p:spPr>
+        <p:txBody>
+          <a:bodyPr wrap="square" rtlCol="0" anchor="ctr"/>
+          <a:lstStyle/>
+          <a:p>
+            <a:pPr indent="0" marL="0">
+              <a:buNone/>
+            </a:pPr>
+            <a:r>
+              <a:rPr lang="en-US" sz="1600" b="1" dirty="0">
+                <a:solidFill>
+                  <a:srgbClr val="1E2761"/>
+                </a:solidFill>
+                <a:latin typeface="Calibri" pitchFamily="34" charset="0"/>
+                <a:ea typeface="Calibri" pitchFamily="34" charset="-122"/>
+                <a:cs typeface="Calibri" pitchFamily="34" charset="-120"/>
+              </a:rPr>
+              <a:t>Production period</a:t>
+            </a:r>
+            <a:endParaRPr lang="en-US" sz="1600" dirty="0"/>
+          </a:p>
+        </p:txBody>
+      </p:sp>
+      <p:sp>
+        <p:nvSpPr>
+          <p:cNvPr id="8" name="Text 6"/>
+          <p:cNvSpPr/>
+          <p:nvPr/>
+        </p:nvSpPr>
+        <p:spPr>
+          <a:xfrm>
+            <a:off x="4722876" y="2697480"/>
+            <a:ext cx="2743200" cy="2011680"/>
+          </a:xfrm>
+          <a:prstGeom prst="rect">
+            <a:avLst/>
+          </a:prstGeom>
+          <a:noFill/>
+          <a:ln/>
+        </p:spPr>
+        <p:txBody>
+          <a:bodyPr wrap="square" rtlCol="0" anchor="t"/>
+          <a:lstStyle/>
+          <a:p>
+            <a:pPr indent="0" marL="0">
+              <a:lnSpc>
+                <a:spcPct val="125000"/>
+              </a:lnSpc>
+              <a:buNone/>
+            </a:pPr>
+            <a:r>
+              <a:rPr lang="en-US" sz="1250" dirty="0">
+                <a:solidFill>
+                  <a:srgbClr val="1A1A1A"/>
+                </a:solidFill>
+                <a:latin typeface="Calibri" pitchFamily="34" charset="0"/>
+                <a:ea typeface="Calibri" pitchFamily="34" charset="-122"/>
+                <a:cs typeface="Calibri" pitchFamily="34" charset="-120"/>
+              </a:rPr>
+              <a:t>Quick to make = more elastic (a grip prints in minutes). Slow to make = more inelastic (a new court takes months).</a:t>
+            </a:r>
+            <a:endParaRPr lang="en-US" sz="1250" dirty="0"/>
+          </a:p>
+        </p:txBody>
+      </p:sp>
+      <p:sp>
+        <p:nvSpPr>
+          <p:cNvPr id="9" name="Shape 7"/>
+          <p:cNvSpPr/>
+          <p:nvPr/>
+        </p:nvSpPr>
+        <p:spPr>
+          <a:xfrm>
+            <a:off x="8106156" y="1828800"/>
+            <a:ext cx="3291840" cy="3108960"/>
+          </a:xfrm>
+          <a:prstGeom prst="roundRect">
+            <a:avLst>
+              <a:gd name="adj" fmla="val 3529"/>
+            </a:avLst>
+          </a:prstGeom>
+          <a:solidFill>
+            <a:srgbClr val="F4F5F7"/>
+          </a:solidFill>
+          <a:ln/>
+        </p:spPr>
+      </p:sp>
+      <p:sp>
+        <p:nvSpPr>
+          <p:cNvPr id="10" name="Text 8"/>
+          <p:cNvSpPr/>
+          <p:nvPr/>
+        </p:nvSpPr>
+        <p:spPr>
+          <a:xfrm>
+            <a:off x="8380476" y="2103120"/>
+            <a:ext cx="2743200" cy="548640"/>
+          </a:xfrm>
+          <a:prstGeom prst="rect">
+            <a:avLst/>
+          </a:prstGeom>
+          <a:noFill/>
+          <a:ln/>
+        </p:spPr>
+        <p:txBody>
+          <a:bodyPr wrap="square" rtlCol="0" anchor="ctr"/>
+          <a:lstStyle/>
+          <a:p>
+            <a:pPr indent="0" marL="0">
+              <a:buNone/>
+            </a:pPr>
+            <a:r>
+              <a:rPr lang="en-US" sz="1600" b="1" dirty="0">
+                <a:solidFill>
+                  <a:srgbClr val="1E2761"/>
+                </a:solidFill>
+                <a:latin typeface="Calibri" pitchFamily="34" charset="0"/>
+                <a:ea typeface="Calibri" pitchFamily="34" charset="-122"/>
+                <a:cs typeface="Calibri" pitchFamily="34" charset="-120"/>
+              </a:rPr>
+              <a:t>Number of producers</a:t>
+            </a:r>
+            <a:endParaRPr lang="en-US" sz="1600" dirty="0"/>
+          </a:p>
+        </p:txBody>
+      </p:sp>
+      <p:sp>
+        <p:nvSpPr>
+          <p:cNvPr id="11" name="Text 9"/>
+          <p:cNvSpPr/>
+          <p:nvPr/>
+        </p:nvSpPr>
+        <p:spPr>
+          <a:xfrm>
+            <a:off x="8380476" y="2697480"/>
+            <a:ext cx="2743200" cy="2011680"/>
+          </a:xfrm>
+          <a:prstGeom prst="rect">
+            <a:avLst/>
+          </a:prstGeom>
+          <a:noFill/>
+          <a:ln/>
+        </p:spPr>
+        <p:txBody>
+          <a:bodyPr wrap="square" rtlCol="0" anchor="t"/>
+          <a:lstStyle/>
+          <a:p>
+            <a:pPr indent="0" marL="0">
+              <a:lnSpc>
+                <a:spcPct val="125000"/>
+              </a:lnSpc>
+              <a:buNone/>
+            </a:pPr>
+            <a:r>
+              <a:rPr lang="en-US" sz="1250" dirty="0">
+                <a:solidFill>
+                  <a:srgbClr val="1A1A1A"/>
+                </a:solidFill>
+                <a:latin typeface="Calibri" pitchFamily="34" charset="0"/>
+                <a:ea typeface="Calibri" pitchFamily="34" charset="-122"/>
+                <a:cs typeface="Calibri" pitchFamily="34" charset="-120"/>
+              </a:rPr>
+              <a:t>More producers able to enter the market = more elastic supply, especially in the long run.</a:t>
+            </a:r>
+            <a:endParaRPr lang="en-US" sz="1250" dirty="0"/>
+          </a:p>
+        </p:txBody>
+      </p:sp>
+    </p:spTree>
+  </p:cSld>
+  <p:clrMapOvr>
+    <a:masterClrMapping/>
+  </p:clrMapOvr>
+</p:sld>
+</file>
+
+<file path=ppt/slides/slide19.xml><?xml version="1.0" encoding="utf-8"?>
+<p:sld xmlns:a="http://schemas.openxmlformats.org/drawingml/2006/main" xmlns:r="http://schemas.openxmlformats.org/officeDocument/2006/relationships" xmlns:p="http://schemas.openxmlformats.org/presentationml/2006/main">
+  <p:cSld name="Slide 19">
+    <p:bg>
+      <p:bgPr>
+        <a:solidFill>
+          <a:srgbClr val="FFFFFF"/>
+        </a:solidFill>
+      </p:bgPr>
+    </p:bg>
+    <p:spTree>
+      <p:nvGrpSpPr>
+        <p:cNvPr id="1" name=""/>
+        <p:cNvGrpSpPr/>
+        <p:nvPr/>
+      </p:nvGrpSpPr>
+      <p:grpSpPr>
+        <a:xfrm>
+          <a:off x="0" y="0"/>
+          <a:ext cx="0" cy="0"/>
+          <a:chOff x="0" y="0"/>
+          <a:chExt cx="0" cy="0"/>
+        </a:xfrm>
+      </p:grpSpPr>
+      <p:sp>
+        <p:nvSpPr>
+          <p:cNvPr id="2" name="Text 0"/>
+          <p:cNvSpPr/>
+          <p:nvPr/>
+        </p:nvSpPr>
+        <p:spPr>
+          <a:xfrm>
+            <a:off x="640080" y="548640"/>
+            <a:ext cx="10881360" cy="822960"/>
+          </a:xfrm>
+          <a:prstGeom prst="rect">
+            <a:avLst/>
+          </a:prstGeom>
+          <a:noFill/>
+          <a:ln/>
+        </p:spPr>
+        <p:txBody>
+          <a:bodyPr wrap="square" rtlCol="0" anchor="ctr"/>
+          <a:lstStyle/>
+          <a:p>
+            <a:pPr indent="0" marL="0">
+              <a:buNone/>
+            </a:pPr>
+            <a:r>
+              <a:rPr lang="en-US" sz="3200" b="1" dirty="0">
+                <a:solidFill>
+                  <a:srgbClr val="1E2761"/>
+                </a:solidFill>
+                <a:latin typeface="Cambria" pitchFamily="34" charset="0"/>
+                <a:ea typeface="Cambria" pitchFamily="34" charset="-122"/>
+                <a:cs typeface="Cambria" pitchFamily="34" charset="-120"/>
+              </a:rPr>
+              <a:t>Quick check</a:t>
+            </a:r>
+            <a:endParaRPr lang="en-US" sz="3200" dirty="0"/>
+          </a:p>
+        </p:txBody>
+      </p:sp>
+      <p:sp>
+        <p:nvSpPr>
+          <p:cNvPr id="3" name="Text 1"/>
+          <p:cNvSpPr/>
+          <p:nvPr/>
+        </p:nvSpPr>
+        <p:spPr>
+          <a:xfrm>
+            <a:off x="822960" y="1828800"/>
+            <a:ext cx="9875520" cy="4114800"/>
+          </a:xfrm>
+          <a:prstGeom prst="rect">
+            <a:avLst/>
+          </a:prstGeom>
+          <a:noFill/>
+          <a:ln/>
+        </p:spPr>
+        <p:txBody>
+          <a:bodyPr wrap="square" rtlCol="0" anchor="t"/>
+          <a:lstStyle/>
+          <a:p>
+            <a:pPr indent="0" marL="0">
+              <a:lnSpc>
+                <a:spcPct val="130000"/>
+              </a:lnSpc>
+              <a:spcAft>
+                <a:spcPts val="1400"/>
+              </a:spcAft>
+              <a:buNone/>
+            </a:pPr>
+            <a:r>
               <a:rPr lang="en-US" sz="1800" dirty="0">
                 <a:solidFill>
-                  <a:srgbClr val="CADCFC"/>
-                </a:solidFill>
-                <a:latin typeface="Calibri" pitchFamily="34" charset="0"/>
-                <a:ea typeface="Calibri" pitchFamily="34" charset="-122"/>
-                <a:cs typeface="Calibri" pitchFamily="34" charset="-120"/>
-              </a:rPr>
-              <a:t>Zooming out from single markets to a whole economy — how does a market system decide what gets made, with nobody in charge?</a:t>
+                  <a:srgbClr val="1A1A1A"/>
+                </a:solidFill>
+                <a:latin typeface="Calibri" pitchFamily="34" charset="0"/>
+                <a:ea typeface="Calibri" pitchFamily="34" charset="-122"/>
+                <a:cs typeface="Calibri" pitchFamily="34" charset="-120"/>
+              </a:rPr>
+              <a:t>A padel club can't add courts this season no matter the price. What's its PES this season?</a:t>
+            </a:r>
+            <a:endParaRPr lang="en-US" sz="1800" dirty="0"/>
+          </a:p>
+          <a:p>
+            <a:pPr indent="0" marL="0">
+              <a:lnSpc>
+                <a:spcPct val="130000"/>
+              </a:lnSpc>
+              <a:spcAft>
+                <a:spcPts val="1400"/>
+              </a:spcAft>
+              <a:buNone/>
+            </a:pPr>
+            <a:r>
+              <a:rPr lang="en-US" sz="1800" dirty="0">
+                <a:solidFill>
+                  <a:srgbClr val="1A1A1A"/>
+                </a:solidFill>
+                <a:latin typeface="Calibri" pitchFamily="34" charset="0"/>
+                <a:ea typeface="Calibri" pitchFamily="34" charset="-122"/>
+                <a:cs typeface="Calibri" pitchFamily="34" charset="-120"/>
+              </a:rPr>
+              <a:t>Which makes Tom's grip supply MORE elastic: running at full capacity, or having a spare idle printer?</a:t>
             </a:r>
             <a:endParaRPr lang="en-US" sz="1800" dirty="0"/>
           </a:p>
@@ -5279,6 +6678,317 @@
 </p:sld>
 </file>
 
+<file path=ppt/slides/slide20.xml><?xml version="1.0" encoding="utf-8"?>
+<p:sld xmlns:a="http://schemas.openxmlformats.org/drawingml/2006/main" xmlns:r="http://schemas.openxmlformats.org/officeDocument/2006/relationships" xmlns:p="http://schemas.openxmlformats.org/presentationml/2006/main">
+  <p:cSld name="Slide 20">
+    <p:bg>
+      <p:bgPr>
+        <a:solidFill>
+          <a:srgbClr val="FFFFFF"/>
+        </a:solidFill>
+      </p:bgPr>
+    </p:bg>
+    <p:spTree>
+      <p:nvGrpSpPr>
+        <p:cNvPr id="1" name=""/>
+        <p:cNvGrpSpPr/>
+        <p:nvPr/>
+      </p:nvGrpSpPr>
+      <p:grpSpPr>
+        <a:xfrm>
+          <a:off x="0" y="0"/>
+          <a:ext cx="0" cy="0"/>
+          <a:chOff x="0" y="0"/>
+          <a:chExt cx="0" cy="0"/>
+        </a:xfrm>
+      </p:grpSpPr>
+      <p:sp>
+        <p:nvSpPr>
+          <p:cNvPr id="2" name="Text 0"/>
+          <p:cNvSpPr/>
+          <p:nvPr/>
+        </p:nvSpPr>
+        <p:spPr>
+          <a:xfrm>
+            <a:off x="640080" y="548640"/>
+            <a:ext cx="10881360" cy="822960"/>
+          </a:xfrm>
+          <a:prstGeom prst="rect">
+            <a:avLst/>
+          </a:prstGeom>
+          <a:noFill/>
+          <a:ln/>
+        </p:spPr>
+        <p:txBody>
+          <a:bodyPr wrap="square" rtlCol="0" anchor="ctr"/>
+          <a:lstStyle/>
+          <a:p>
+            <a:pPr indent="0" marL="0">
+              <a:buNone/>
+            </a:pPr>
+            <a:r>
+              <a:rPr lang="en-US" sz="3200" b="1" dirty="0">
+                <a:solidFill>
+                  <a:srgbClr val="1E2761"/>
+                </a:solidFill>
+                <a:latin typeface="Cambria" pitchFamily="34" charset="0"/>
+                <a:ea typeface="Cambria" pitchFamily="34" charset="-122"/>
+                <a:cs typeface="Cambria" pitchFamily="34" charset="-120"/>
+              </a:rPr>
+              <a:t>Recap</a:t>
+            </a:r>
+            <a:endParaRPr lang="en-US" sz="3200" dirty="0"/>
+          </a:p>
+        </p:txBody>
+      </p:sp>
+      <p:sp>
+        <p:nvSpPr>
+          <p:cNvPr id="3" name="Text 1"/>
+          <p:cNvSpPr/>
+          <p:nvPr/>
+        </p:nvSpPr>
+        <p:spPr>
+          <a:xfrm>
+            <a:off x="822960" y="1828800"/>
+            <a:ext cx="9875520" cy="4114800"/>
+          </a:xfrm>
+          <a:prstGeom prst="rect">
+            <a:avLst/>
+          </a:prstGeom>
+          <a:noFill/>
+          <a:ln/>
+        </p:spPr>
+        <p:txBody>
+          <a:bodyPr wrap="square" rtlCol="0" anchor="t"/>
+          <a:lstStyle/>
+          <a:p>
+            <a:pPr indent="0" marL="0">
+              <a:lnSpc>
+                <a:spcPct val="130000"/>
+              </a:lnSpc>
+              <a:spcAft>
+                <a:spcPts val="1400"/>
+              </a:spcAft>
+              <a:buNone/>
+            </a:pPr>
+            <a:r>
+              <a:rPr lang="en-US" sz="1800" dirty="0">
+                <a:solidFill>
+                  <a:srgbClr val="1A1A1A"/>
+                </a:solidFill>
+                <a:latin typeface="Calibri" pitchFamily="34" charset="0"/>
+                <a:ea typeface="Calibri" pitchFamily="34" charset="-122"/>
+                <a:cs typeface="Calibri" pitchFamily="34" charset="-120"/>
+              </a:rPr>
+              <a:t>PES = %ΔQs ÷ %ΔP — almost always positive.</a:t>
+            </a:r>
+            <a:endParaRPr lang="en-US" sz="1800" dirty="0"/>
+          </a:p>
+          <a:p>
+            <a:pPr indent="0" marL="0">
+              <a:lnSpc>
+                <a:spcPct val="130000"/>
+              </a:lnSpc>
+              <a:spcAft>
+                <a:spcPts val="1400"/>
+              </a:spcAft>
+              <a:buNone/>
+            </a:pPr>
+            <a:r>
+              <a:rPr lang="en-US" sz="1800" dirty="0">
+                <a:solidFill>
+                  <a:srgbClr val="1A1A1A"/>
+                </a:solidFill>
+                <a:latin typeface="Calibri" pitchFamily="34" charset="0"/>
+                <a:ea typeface="Calibri" pitchFamily="34" charset="-122"/>
+                <a:cs typeface="Calibri" pitchFamily="34" charset="-120"/>
+              </a:rPr>
+              <a:t>0 → perfectly inelastic  ·  0–1 → inelastic  ·  1 → unitary  ·  &gt;1 → elastic  ·  ∞ → perfectly elastic</a:t>
+            </a:r>
+            <a:endParaRPr lang="en-US" sz="1800" dirty="0"/>
+          </a:p>
+          <a:p>
+            <a:pPr indent="0" marL="0">
+              <a:lnSpc>
+                <a:spcPct val="130000"/>
+              </a:lnSpc>
+              <a:spcAft>
+                <a:spcPts val="1400"/>
+              </a:spcAft>
+              <a:buNone/>
+            </a:pPr>
+            <a:r>
+              <a:rPr lang="en-US" sz="1800" dirty="0">
+                <a:solidFill>
+                  <a:srgbClr val="1A1A1A"/>
+                </a:solidFill>
+                <a:latin typeface="Calibri" pitchFamily="34" charset="0"/>
+                <a:ea typeface="Calibri" pitchFamily="34" charset="-122"/>
+                <a:cs typeface="Calibri" pitchFamily="34" charset="-120"/>
+              </a:rPr>
+              <a:t>Determinants: spare capacity, factor mobility, time period, ability to store stock, production period, number of producers.</a:t>
+            </a:r>
+            <a:endParaRPr lang="en-US" sz="1800" dirty="0"/>
+          </a:p>
+        </p:txBody>
+      </p:sp>
+    </p:spTree>
+  </p:cSld>
+  <p:clrMapOvr>
+    <a:masterClrMapping/>
+  </p:clrMapOvr>
+</p:sld>
+</file>
+
+<file path=ppt/slides/slide21.xml><?xml version="1.0" encoding="utf-8"?>
+<p:sld xmlns:a="http://schemas.openxmlformats.org/drawingml/2006/main" xmlns:r="http://schemas.openxmlformats.org/officeDocument/2006/relationships" xmlns:p="http://schemas.openxmlformats.org/presentationml/2006/main">
+  <p:cSld name="Slide 21">
+    <p:bg>
+      <p:bgPr>
+        <a:solidFill>
+          <a:srgbClr val="1E2761"/>
+        </a:solidFill>
+      </p:bgPr>
+    </p:bg>
+    <p:spTree>
+      <p:nvGrpSpPr>
+        <p:cNvPr id="1" name=""/>
+        <p:cNvGrpSpPr/>
+        <p:nvPr/>
+      </p:nvGrpSpPr>
+      <p:grpSpPr>
+        <a:xfrm>
+          <a:off x="0" y="0"/>
+          <a:ext cx="0" cy="0"/>
+          <a:chOff x="0" y="0"/>
+          <a:chExt cx="0" cy="0"/>
+        </a:xfrm>
+      </p:grpSpPr>
+      <p:sp>
+        <p:nvSpPr>
+          <p:cNvPr id="2" name="Text 0"/>
+          <p:cNvSpPr/>
+          <p:nvPr/>
+        </p:nvSpPr>
+        <p:spPr>
+          <a:xfrm>
+            <a:off x="640080" y="2103120"/>
+            <a:ext cx="10881360" cy="457200"/>
+          </a:xfrm>
+          <a:prstGeom prst="rect">
+            <a:avLst/>
+          </a:prstGeom>
+          <a:noFill/>
+          <a:ln/>
+        </p:spPr>
+        <p:txBody>
+          <a:bodyPr wrap="square" rtlCol="0" anchor="ctr"/>
+          <a:lstStyle/>
+          <a:p>
+            <a:pPr indent="0" marL="0">
+              <a:buNone/>
+            </a:pPr>
+            <a:r>
+              <a:rPr lang="en-US" sz="1400" b="1" spc="200" kern="0" dirty="0">
+                <a:solidFill>
+                  <a:srgbClr val="CADCFC"/>
+                </a:solidFill>
+                <a:latin typeface="Calibri" pitchFamily="34" charset="0"/>
+                <a:ea typeface="Calibri" pitchFamily="34" charset="-122"/>
+                <a:cs typeface="Calibri" pitchFamily="34" charset="-120"/>
+              </a:rPr>
+              <a:t>NEXT LESSON</a:t>
+            </a:r>
+            <a:endParaRPr lang="en-US" sz="1400" dirty="0"/>
+          </a:p>
+        </p:txBody>
+      </p:sp>
+      <p:sp>
+        <p:nvSpPr>
+          <p:cNvPr id="3" name="Text 1"/>
+          <p:cNvSpPr/>
+          <p:nvPr/>
+        </p:nvSpPr>
+        <p:spPr>
+          <a:xfrm>
+            <a:off x="640080" y="2560320"/>
+            <a:ext cx="10881360" cy="1463040"/>
+          </a:xfrm>
+          <a:prstGeom prst="rect">
+            <a:avLst/>
+          </a:prstGeom>
+          <a:noFill/>
+          <a:ln/>
+        </p:spPr>
+        <p:txBody>
+          <a:bodyPr wrap="square" rtlCol="0" anchor="ctr"/>
+          <a:lstStyle/>
+          <a:p>
+            <a:pPr indent="0" marL="0">
+              <a:buNone/>
+            </a:pPr>
+            <a:r>
+              <a:rPr lang="en-US" sz="4400" b="1" dirty="0">
+                <a:solidFill>
+                  <a:srgbClr val="FFFFFF"/>
+                </a:solidFill>
+                <a:latin typeface="Cambria" pitchFamily="34" charset="0"/>
+                <a:ea typeface="Cambria" pitchFamily="34" charset="-122"/>
+                <a:cs typeface="Cambria" pitchFamily="34" charset="-120"/>
+              </a:rPr>
+              <a:t>The market economic system</a:t>
+            </a:r>
+            <a:endParaRPr lang="en-US" sz="4400" dirty="0"/>
+          </a:p>
+        </p:txBody>
+      </p:sp>
+      <p:sp>
+        <p:nvSpPr>
+          <p:cNvPr id="4" name="Text 2"/>
+          <p:cNvSpPr/>
+          <p:nvPr/>
+        </p:nvSpPr>
+        <p:spPr>
+          <a:xfrm>
+            <a:off x="640080" y="3931920"/>
+            <a:ext cx="9601200" cy="731520"/>
+          </a:xfrm>
+          <a:prstGeom prst="rect">
+            <a:avLst/>
+          </a:prstGeom>
+          <a:noFill/>
+          <a:ln/>
+        </p:spPr>
+        <p:txBody>
+          <a:bodyPr wrap="square" rtlCol="0" anchor="ctr"/>
+          <a:lstStyle/>
+          <a:p>
+            <a:pPr indent="0" marL="0">
+              <a:buNone/>
+            </a:pPr>
+            <a:r>
+              <a:rPr lang="en-US" sz="1800" dirty="0">
+                <a:solidFill>
+                  <a:srgbClr val="CADCFC"/>
+                </a:solidFill>
+                <a:latin typeface="Calibri" pitchFamily="34" charset="0"/>
+                <a:ea typeface="Calibri" pitchFamily="34" charset="-122"/>
+                <a:cs typeface="Calibri" pitchFamily="34" charset="-120"/>
+              </a:rPr>
+              <a:t>Zooming out from single markets to a whole economy — how does a market system decide what gets made, with nobody in charge?</a:t>
+            </a:r>
+            <a:endParaRPr lang="en-US" sz="1800" dirty="0"/>
+          </a:p>
+        </p:txBody>
+      </p:sp>
+    </p:spTree>
+  </p:cSld>
+  <p:clrMapOvr>
+    <a:masterClrMapping/>
+  </p:clrMapOvr>
+</p:sld>
+</file>
+
 <file path=ppt/slides/slide3.xml><?xml version="1.0" encoding="utf-8"?>
 <p:sld xmlns:a="http://schemas.openxmlformats.org/drawingml/2006/main" xmlns:r="http://schemas.openxmlformats.org/officeDocument/2006/relationships" xmlns:p="http://schemas.openxmlformats.org/presentationml/2006/main">
   <p:cSld name="Slide 3">
@@ -5305,14 +7015,38 @@
       </p:grpSpPr>
       <p:sp>
         <p:nvSpPr>
-          <p:cNvPr id="2" name="Text 0"/>
-          <p:cNvSpPr/>
-          <p:nvPr/>
-        </p:nvSpPr>
-        <p:spPr>
-          <a:xfrm>
-            <a:off x="640080" y="548640"/>
-            <a:ext cx="10881360" cy="822960"/>
+          <p:cNvPr id="2" name="Shape 0"/>
+          <p:cNvSpPr/>
+          <p:nvPr/>
+        </p:nvSpPr>
+        <p:spPr>
+          <a:xfrm>
+            <a:off x="640080" y="502920"/>
+            <a:ext cx="1527048" cy="365760"/>
+          </a:xfrm>
+          <a:prstGeom prst="roundRect">
+            <a:avLst>
+              <a:gd name="adj" fmla="val 50000"/>
+            </a:avLst>
+          </a:prstGeom>
+          <a:solidFill>
+            <a:srgbClr val="F96167">
+              <a:alpha val="18000"/>
+            </a:srgbClr>
+          </a:solidFill>
+          <a:ln/>
+        </p:spPr>
+      </p:sp>
+      <p:sp>
+        <p:nvSpPr>
+          <p:cNvPr id="3" name="Text 1"/>
+          <p:cNvSpPr/>
+          <p:nvPr/>
+        </p:nvSpPr>
+        <p:spPr>
+          <a:xfrm>
+            <a:off x="640080" y="502920"/>
+            <a:ext cx="1527048" cy="365760"/>
           </a:xfrm>
           <a:prstGeom prst="rect">
             <a:avLst/>
@@ -5324,34 +7058,134 @@
           <a:bodyPr wrap="square" rtlCol="0" anchor="ctr"/>
           <a:lstStyle/>
           <a:p>
-            <a:pPr indent="0" marL="0">
-              <a:buNone/>
-            </a:pPr>
-            <a:r>
-              <a:rPr lang="en-US" sz="3200" b="1" dirty="0">
+            <a:pPr algn="ctr" indent="0" marL="0">
+              <a:buNone/>
+            </a:pPr>
+            <a:r>
+              <a:rPr lang="en-US" sz="1200" b="1" dirty="0">
+                <a:solidFill>
+                  <a:srgbClr val="F96167"/>
+                </a:solidFill>
+                <a:latin typeface="Calibri" pitchFamily="34" charset="0"/>
+                <a:ea typeface="Calibri" pitchFamily="34" charset="-122"/>
+                <a:cs typeface="Calibri" pitchFamily="34" charset="-120"/>
+              </a:rPr>
+              <a:t>✍️ Your turn</a:t>
+            </a:r>
+            <a:endParaRPr lang="en-US" sz="1200" dirty="0"/>
+          </a:p>
+        </p:txBody>
+      </p:sp>
+      <p:sp>
+        <p:nvSpPr>
+          <p:cNvPr id="4" name="Text 2"/>
+          <p:cNvSpPr/>
+          <p:nvPr/>
+        </p:nvSpPr>
+        <p:spPr>
+          <a:xfrm>
+            <a:off x="640080" y="1051560"/>
+            <a:ext cx="10881360" cy="548640"/>
+          </a:xfrm>
+          <a:prstGeom prst="rect">
+            <a:avLst/>
+          </a:prstGeom>
+          <a:noFill/>
+          <a:ln/>
+        </p:spPr>
+        <p:txBody>
+          <a:bodyPr wrap="square" rtlCol="0" anchor="ctr"/>
+          <a:lstStyle/>
+          <a:p>
+            <a:pPr indent="0" marL="0">
+              <a:buNone/>
+            </a:pPr>
+            <a:r>
+              <a:rPr lang="en-US" sz="2200" b="1" dirty="0">
                 <a:solidFill>
                   <a:srgbClr val="1E2761"/>
                 </a:solidFill>
-                <a:latin typeface="Cambria" pitchFamily="34" charset="0"/>
-                <a:ea typeface="Cambria" pitchFamily="34" charset="-122"/>
-                <a:cs typeface="Cambria" pitchFamily="34" charset="-120"/>
-              </a:rPr>
-              <a:t>Who can react faster?</a:t>
-            </a:r>
-            <a:endParaRPr lang="en-US" sz="3200" dirty="0"/>
-          </a:p>
-        </p:txBody>
-      </p:sp>
-      <p:sp>
-        <p:nvSpPr>
-          <p:cNvPr id="3" name="Text 1"/>
-          <p:cNvSpPr/>
-          <p:nvPr/>
-        </p:nvSpPr>
-        <p:spPr>
-          <a:xfrm>
-            <a:off x="822960" y="1828800"/>
-            <a:ext cx="9875520" cy="4114800"/>
+                <a:latin typeface="Calibri" pitchFamily="34" charset="0"/>
+                <a:ea typeface="Calibri" pitchFamily="34" charset="-122"/>
+                <a:cs typeface="Calibri" pitchFamily="34" charset="-120"/>
+              </a:rPr>
+              <a:t>🔑 Warm-up: Tom's Print Co keychain</a:t>
+            </a:r>
+            <a:endParaRPr lang="en-US" sz="2200" dirty="0"/>
+          </a:p>
+        </p:txBody>
+      </p:sp>
+      <p:sp>
+        <p:nvSpPr>
+          <p:cNvPr id="5" name="Shape 3"/>
+          <p:cNvSpPr/>
+          <p:nvPr/>
+        </p:nvSpPr>
+        <p:spPr>
+          <a:xfrm>
+            <a:off x="3566160" y="1920240"/>
+            <a:ext cx="5029200" cy="3108960"/>
+          </a:xfrm>
+          <a:prstGeom prst="roundRect">
+            <a:avLst>
+              <a:gd name="adj" fmla="val 4118"/>
+            </a:avLst>
+          </a:prstGeom>
+          <a:solidFill>
+            <a:srgbClr val="F4F5F7"/>
+          </a:solidFill>
+          <a:ln/>
+        </p:spPr>
+      </p:sp>
+      <p:sp>
+        <p:nvSpPr>
+          <p:cNvPr id="6" name="Text 4"/>
+          <p:cNvSpPr/>
+          <p:nvPr/>
+        </p:nvSpPr>
+        <p:spPr>
+          <a:xfrm>
+            <a:off x="3840480" y="2194560"/>
+            <a:ext cx="4480560" cy="365760"/>
+          </a:xfrm>
+          <a:prstGeom prst="rect">
+            <a:avLst/>
+          </a:prstGeom>
+          <a:noFill/>
+          <a:ln/>
+        </p:spPr>
+        <p:txBody>
+          <a:bodyPr wrap="square" rtlCol="0" anchor="ctr"/>
+          <a:lstStyle/>
+          <a:p>
+            <a:pPr indent="0" marL="0">
+              <a:buNone/>
+            </a:pPr>
+            <a:r>
+              <a:rPr lang="en-US" sz="1400" b="1" dirty="0">
+                <a:solidFill>
+                  <a:srgbClr val="5B5B5B"/>
+                </a:solidFill>
+                <a:latin typeface="Calibri" pitchFamily="34" charset="0"/>
+                <a:ea typeface="Calibri" pitchFamily="34" charset="-122"/>
+                <a:cs typeface="Calibri" pitchFamily="34" charset="-120"/>
+              </a:rPr>
+              <a:t>Your turn — PED practice</a:t>
+            </a:r>
+            <a:endParaRPr lang="en-US" sz="1400" dirty="0"/>
+          </a:p>
+        </p:txBody>
+      </p:sp>
+      <p:sp>
+        <p:nvSpPr>
+          <p:cNvPr id="7" name="Text 5"/>
+          <p:cNvSpPr/>
+          <p:nvPr/>
+        </p:nvSpPr>
+        <p:spPr>
+          <a:xfrm>
+            <a:off x="3840480" y="2651760"/>
+            <a:ext cx="4480560" cy="1280160"/>
           </a:xfrm>
           <a:prstGeom prst="rect">
             <a:avLst/>
@@ -5364,16 +7198,13 @@
           <a:lstStyle/>
           <a:p>
             <a:pPr indent="0" marL="0">
-              <a:lnSpc>
-                <a:spcPct val="130000"/>
-              </a:lnSpc>
               <a:spcAft>
-                <a:spcPts val="1400"/>
+                <a:spcPts val="800"/>
               </a:spcAft>
               <a:buNone/>
             </a:pPr>
             <a:r>
-              <a:rPr lang="en-US" sz="1800" dirty="0">
+              <a:rPr lang="en-US" sz="1500" dirty="0">
                 <a:solidFill>
                   <a:srgbClr val="1A1A1A"/>
                 </a:solidFill>
@@ -5381,22 +7212,19 @@
                 <a:ea typeface="Calibri" pitchFamily="34" charset="-122"/>
                 <a:cs typeface="Calibri" pitchFamily="34" charset="-120"/>
               </a:rPr>
-              <a:t>The padel club wants more courts this summer because demand is booming.</a:t>
-            </a:r>
-            <a:endParaRPr lang="en-US" sz="1800" dirty="0"/>
-          </a:p>
-          <a:p>
-            <a:pPr indent="0" marL="0">
-              <a:lnSpc>
-                <a:spcPct val="130000"/>
-              </a:lnSpc>
+              <a:t>Price: $4 → $5  (+25%)</a:t>
+            </a:r>
+            <a:endParaRPr lang="en-US" sz="1500" dirty="0"/>
+          </a:p>
+          <a:p>
+            <a:pPr indent="0" marL="0">
               <a:spcAft>
-                <a:spcPts val="1400"/>
+                <a:spcPts val="800"/>
               </a:spcAft>
               <a:buNone/>
             </a:pPr>
             <a:r>
-              <a:rPr lang="en-US" sz="1800" dirty="0">
+              <a:rPr lang="en-US" sz="1500" dirty="0">
                 <a:solidFill>
                   <a:srgbClr val="1A1A1A"/>
                 </a:solidFill>
@@ -5404,22 +7232,61 @@
                 <a:ea typeface="Calibri" pitchFamily="34" charset="-122"/>
                 <a:cs typeface="Calibri" pitchFamily="34" charset="-120"/>
               </a:rPr>
-              <a:t>Tom wants to make more grips this week because a big order just came in.</a:t>
-            </a:r>
-            <a:endParaRPr lang="en-US" sz="1800" dirty="0"/>
-          </a:p>
-          <a:p>
-            <a:pPr indent="0" marL="0">
-              <a:lnSpc>
-                <a:spcPct val="130000"/>
-              </a:lnSpc>
-              <a:spcAft>
-                <a:spcPts val="1400"/>
-              </a:spcAft>
-              <a:buNone/>
-            </a:pPr>
-            <a:r>
-              <a:rPr lang="en-US" sz="1800" dirty="0">
+              <a:t>Quantity: 80 → 60 per week  (−25%)</a:t>
+            </a:r>
+            <a:endParaRPr lang="en-US" sz="1500" dirty="0"/>
+          </a:p>
+        </p:txBody>
+      </p:sp>
+      <p:sp>
+        <p:nvSpPr>
+          <p:cNvPr id="8" name="Shape 6"/>
+          <p:cNvSpPr/>
+          <p:nvPr/>
+        </p:nvSpPr>
+        <p:spPr>
+          <a:xfrm>
+            <a:off x="3840480" y="4343400"/>
+            <a:ext cx="1828800" cy="0"/>
+          </a:xfrm>
+          <a:prstGeom prst="line">
+            <a:avLst/>
+          </a:prstGeom>
+          <a:noFill/>
+          <a:ln w="19050">
+            <a:solidFill>
+              <a:srgbClr val="5B5B5B"/>
+            </a:solidFill>
+            <a:prstDash val="solid"/>
+          </a:ln>
+        </p:spPr>
+      </p:sp>
+      <p:sp>
+        <p:nvSpPr>
+          <p:cNvPr id="9" name="Text 7"/>
+          <p:cNvSpPr/>
+          <p:nvPr/>
+        </p:nvSpPr>
+        <p:spPr>
+          <a:xfrm>
+            <a:off x="3840480" y="3977640"/>
+            <a:ext cx="4206240" cy="320040"/>
+          </a:xfrm>
+          <a:prstGeom prst="rect">
+            <a:avLst/>
+          </a:prstGeom>
+          <a:noFill/>
+          <a:ln/>
+        </p:spPr>
+        <p:txBody>
+          <a:bodyPr wrap="square" rtlCol="0" anchor="ctr"/>
+          <a:lstStyle/>
+          <a:p>
+            <a:pPr indent="0" marL="0">
+              <a:buNone/>
+            </a:pPr>
+            <a:r>
+              <a:rPr lang="en-US" sz="1400" dirty="0">
                 <a:solidFill>
                   <a:srgbClr val="1A1A1A"/>
                 </a:solidFill>
@@ -5427,9 +7294,71 @@
                 <a:ea typeface="Calibri" pitchFamily="34" charset="-122"/>
                 <a:cs typeface="Calibri" pitchFamily="34" charset="-120"/>
               </a:rPr>
-              <a:t>Which one can actually ramp up supply faster — and why?</a:t>
-            </a:r>
-            <a:endParaRPr lang="en-US" sz="1800" dirty="0"/>
+              <a:t>TR before = $____</a:t>
+            </a:r>
+            <a:endParaRPr lang="en-US" sz="1400" dirty="0"/>
+          </a:p>
+        </p:txBody>
+      </p:sp>
+      <p:sp>
+        <p:nvSpPr>
+          <p:cNvPr id="10" name="Shape 8"/>
+          <p:cNvSpPr/>
+          <p:nvPr/>
+        </p:nvSpPr>
+        <p:spPr>
+          <a:xfrm>
+            <a:off x="3840480" y="4709160"/>
+            <a:ext cx="1828800" cy="0"/>
+          </a:xfrm>
+          <a:prstGeom prst="line">
+            <a:avLst/>
+          </a:prstGeom>
+          <a:noFill/>
+          <a:ln w="19050">
+            <a:solidFill>
+              <a:srgbClr val="5B5B5B"/>
+            </a:solidFill>
+            <a:prstDash val="solid"/>
+          </a:ln>
+        </p:spPr>
+      </p:sp>
+      <p:sp>
+        <p:nvSpPr>
+          <p:cNvPr id="11" name="Text 9"/>
+          <p:cNvSpPr/>
+          <p:nvPr/>
+        </p:nvSpPr>
+        <p:spPr>
+          <a:xfrm>
+            <a:off x="3840480" y="4343400"/>
+            <a:ext cx="4206240" cy="320040"/>
+          </a:xfrm>
+          <a:prstGeom prst="rect">
+            <a:avLst/>
+          </a:prstGeom>
+          <a:noFill/>
+          <a:ln/>
+        </p:spPr>
+        <p:txBody>
+          <a:bodyPr wrap="square" rtlCol="0" anchor="ctr"/>
+          <a:lstStyle/>
+          <a:p>
+            <a:pPr indent="0" marL="0">
+              <a:buNone/>
+            </a:pPr>
+            <a:r>
+              <a:rPr lang="en-US" sz="1400" dirty="0">
+                <a:solidFill>
+                  <a:srgbClr val="1A1A1A"/>
+                </a:solidFill>
+                <a:latin typeface="Calibri" pitchFamily="34" charset="0"/>
+                <a:ea typeface="Calibri" pitchFamily="34" charset="-122"/>
+                <a:cs typeface="Calibri" pitchFamily="34" charset="-120"/>
+              </a:rPr>
+              <a:t>TR after = $____</a:t>
+            </a:r>
+            <a:endParaRPr lang="en-US" sz="1400" dirty="0"/>
           </a:p>
         </p:txBody>
       </p:sp>
@@ -5467,14 +7396,38 @@
       </p:grpSpPr>
       <p:sp>
         <p:nvSpPr>
-          <p:cNvPr id="2" name="Text 0"/>
-          <p:cNvSpPr/>
-          <p:nvPr/>
-        </p:nvSpPr>
-        <p:spPr>
-          <a:xfrm>
-            <a:off x="640080" y="640080"/>
-            <a:ext cx="10881360" cy="731520"/>
+          <p:cNvPr id="2" name="Shape 0"/>
+          <p:cNvSpPr/>
+          <p:nvPr/>
+        </p:nvSpPr>
+        <p:spPr>
+          <a:xfrm>
+            <a:off x="640080" y="502920"/>
+            <a:ext cx="1325880" cy="365760"/>
+          </a:xfrm>
+          <a:prstGeom prst="roundRect">
+            <a:avLst>
+              <a:gd name="adj" fmla="val 50000"/>
+            </a:avLst>
+          </a:prstGeom>
+          <a:solidFill>
+            <a:srgbClr val="1BAF7A">
+              <a:alpha val="18000"/>
+            </a:srgbClr>
+          </a:solidFill>
+          <a:ln/>
+        </p:spPr>
+      </p:sp>
+      <p:sp>
+        <p:nvSpPr>
+          <p:cNvPr id="3" name="Text 1"/>
+          <p:cNvSpPr/>
+          <p:nvPr/>
+        </p:nvSpPr>
+        <p:spPr>
+          <a:xfrm>
+            <a:off x="640080" y="502920"/>
+            <a:ext cx="1325880" cy="365760"/>
           </a:xfrm>
           <a:prstGeom prst="rect">
             <a:avLst/>
@@ -5486,160 +7439,222 @@
           <a:bodyPr wrap="square" rtlCol="0" anchor="ctr"/>
           <a:lstStyle/>
           <a:p>
-            <a:pPr indent="0" marL="0">
-              <a:buNone/>
-            </a:pPr>
-            <a:r>
-              <a:rPr lang="en-US" sz="3000" b="1" dirty="0">
+            <a:pPr algn="ctr" indent="0" marL="0">
+              <a:buNone/>
+            </a:pPr>
+            <a:r>
+              <a:rPr lang="en-US" sz="1200" b="1" dirty="0">
+                <a:solidFill>
+                  <a:srgbClr val="1BAF7A"/>
+                </a:solidFill>
+                <a:latin typeface="Calibri" pitchFamily="34" charset="0"/>
+                <a:ea typeface="Calibri" pitchFamily="34" charset="-122"/>
+                <a:cs typeface="Calibri" pitchFamily="34" charset="-120"/>
+              </a:rPr>
+              <a:t>✅ Revealed</a:t>
+            </a:r>
+            <a:endParaRPr lang="en-US" sz="1200" dirty="0"/>
+          </a:p>
+        </p:txBody>
+      </p:sp>
+      <p:sp>
+        <p:nvSpPr>
+          <p:cNvPr id="4" name="Text 2"/>
+          <p:cNvSpPr/>
+          <p:nvPr/>
+        </p:nvSpPr>
+        <p:spPr>
+          <a:xfrm>
+            <a:off x="640080" y="1051560"/>
+            <a:ext cx="10881360" cy="548640"/>
+          </a:xfrm>
+          <a:prstGeom prst="rect">
+            <a:avLst/>
+          </a:prstGeom>
+          <a:noFill/>
+          <a:ln/>
+        </p:spPr>
+        <p:txBody>
+          <a:bodyPr wrap="square" rtlCol="0" anchor="ctr"/>
+          <a:lstStyle/>
+          <a:p>
+            <a:pPr indent="0" marL="0">
+              <a:buNone/>
+            </a:pPr>
+            <a:r>
+              <a:rPr lang="en-US" sz="2200" b="1" dirty="0">
                 <a:solidFill>
                   <a:srgbClr val="1E2761"/>
+                </a:solidFill>
+                <a:latin typeface="Calibri" pitchFamily="34" charset="0"/>
+                <a:ea typeface="Calibri" pitchFamily="34" charset="-122"/>
+                <a:cs typeface="Calibri" pitchFamily="34" charset="-120"/>
+              </a:rPr>
+              <a:t>🔑 Keychain — answer</a:t>
+            </a:r>
+            <a:endParaRPr lang="en-US" sz="2200" dirty="0"/>
+          </a:p>
+        </p:txBody>
+      </p:sp>
+      <p:sp>
+        <p:nvSpPr>
+          <p:cNvPr id="5" name="Shape 3"/>
+          <p:cNvSpPr/>
+          <p:nvPr/>
+        </p:nvSpPr>
+        <p:spPr>
+          <a:xfrm>
+            <a:off x="3566160" y="1920240"/>
+            <a:ext cx="5029200" cy="3108960"/>
+          </a:xfrm>
+          <a:prstGeom prst="roundRect">
+            <a:avLst>
+              <a:gd name="adj" fmla="val 4118"/>
+            </a:avLst>
+          </a:prstGeom>
+          <a:solidFill>
+            <a:srgbClr val="F4F5F7"/>
+          </a:solidFill>
+          <a:ln/>
+        </p:spPr>
+      </p:sp>
+      <p:sp>
+        <p:nvSpPr>
+          <p:cNvPr id="6" name="Text 4"/>
+          <p:cNvSpPr/>
+          <p:nvPr/>
+        </p:nvSpPr>
+        <p:spPr>
+          <a:xfrm>
+            <a:off x="3840480" y="2194560"/>
+            <a:ext cx="4480560" cy="365760"/>
+          </a:xfrm>
+          <a:prstGeom prst="rect">
+            <a:avLst/>
+          </a:prstGeom>
+          <a:noFill/>
+          <a:ln/>
+        </p:spPr>
+        <p:txBody>
+          <a:bodyPr wrap="square" rtlCol="0" anchor="ctr"/>
+          <a:lstStyle/>
+          <a:p>
+            <a:pPr indent="0" marL="0">
+              <a:buNone/>
+            </a:pPr>
+            <a:r>
+              <a:rPr lang="en-US" sz="1400" b="1" dirty="0">
+                <a:solidFill>
+                  <a:srgbClr val="5B5B5B"/>
+                </a:solidFill>
+                <a:latin typeface="Calibri" pitchFamily="34" charset="0"/>
+                <a:ea typeface="Calibri" pitchFamily="34" charset="-122"/>
+                <a:cs typeface="Calibri" pitchFamily="34" charset="-120"/>
+              </a:rPr>
+              <a:t>Check your answer</a:t>
+            </a:r>
+            <a:endParaRPr lang="en-US" sz="1400" dirty="0"/>
+          </a:p>
+        </p:txBody>
+      </p:sp>
+      <p:sp>
+        <p:nvSpPr>
+          <p:cNvPr id="7" name="Text 5"/>
+          <p:cNvSpPr/>
+          <p:nvPr/>
+        </p:nvSpPr>
+        <p:spPr>
+          <a:xfrm>
+            <a:off x="3840480" y="2651760"/>
+            <a:ext cx="4480560" cy="1463040"/>
+          </a:xfrm>
+          <a:prstGeom prst="rect">
+            <a:avLst/>
+          </a:prstGeom>
+          <a:noFill/>
+          <a:ln/>
+        </p:spPr>
+        <p:txBody>
+          <a:bodyPr wrap="square" rtlCol="0" anchor="t"/>
+          <a:lstStyle/>
+          <a:p>
+            <a:pPr indent="0" marL="0">
+              <a:spcAft>
+                <a:spcPts val="600"/>
+              </a:spcAft>
+              <a:buNone/>
+            </a:pPr>
+            <a:r>
+              <a:rPr lang="en-US" sz="1500" dirty="0">
+                <a:solidFill>
+                  <a:srgbClr val="1A1A1A"/>
+                </a:solidFill>
+                <a:latin typeface="Calibri" pitchFamily="34" charset="0"/>
+                <a:ea typeface="Calibri" pitchFamily="34" charset="-122"/>
+                <a:cs typeface="Calibri" pitchFamily="34" charset="-120"/>
+              </a:rPr>
+              <a:t>% change in price = +25%</a:t>
+            </a:r>
+            <a:endParaRPr lang="en-US" sz="1500" dirty="0"/>
+          </a:p>
+          <a:p>
+            <a:pPr indent="0" marL="0">
+              <a:spcAft>
+                <a:spcPts val="600"/>
+              </a:spcAft>
+              <a:buNone/>
+            </a:pPr>
+            <a:r>
+              <a:rPr lang="en-US" sz="1500" dirty="0">
+                <a:solidFill>
+                  <a:srgbClr val="1A1A1A"/>
+                </a:solidFill>
+                <a:latin typeface="Calibri" pitchFamily="34" charset="0"/>
+                <a:ea typeface="Calibri" pitchFamily="34" charset="-122"/>
+                <a:cs typeface="Calibri" pitchFamily="34" charset="-120"/>
+              </a:rPr>
+              <a:t>% change in quantity = −25%</a:t>
+            </a:r>
+            <a:endParaRPr lang="en-US" sz="1500" dirty="0"/>
+          </a:p>
+        </p:txBody>
+      </p:sp>
+      <p:sp>
+        <p:nvSpPr>
+          <p:cNvPr id="8" name="Text 6"/>
+          <p:cNvSpPr/>
+          <p:nvPr/>
+        </p:nvSpPr>
+        <p:spPr>
+          <a:xfrm>
+            <a:off x="3840480" y="4206240"/>
+            <a:ext cx="4480560" cy="731520"/>
+          </a:xfrm>
+          <a:prstGeom prst="rect">
+            <a:avLst/>
+          </a:prstGeom>
+          <a:noFill/>
+          <a:ln/>
+        </p:spPr>
+        <p:txBody>
+          <a:bodyPr wrap="square" rtlCol="0" anchor="ctr"/>
+          <a:lstStyle/>
+          <a:p>
+            <a:pPr indent="0" marL="0">
+              <a:buNone/>
+            </a:pPr>
+            <a:r>
+              <a:rPr lang="en-US" sz="1800" b="1" dirty="0">
+                <a:solidFill>
+                  <a:srgbClr val="1BAF7A"/>
                 </a:solidFill>
                 <a:latin typeface="Cambria" pitchFamily="34" charset="0"/>
                 <a:ea typeface="Cambria" pitchFamily="34" charset="-122"/>
                 <a:cs typeface="Cambria" pitchFamily="34" charset="-120"/>
               </a:rPr>
-              <a:t>Definition &amp; formula</a:t>
-            </a:r>
-            <a:endParaRPr lang="en-US" sz="3000" dirty="0"/>
-          </a:p>
-        </p:txBody>
-      </p:sp>
-      <p:sp>
-        <p:nvSpPr>
-          <p:cNvPr id="3" name="Text 1"/>
-          <p:cNvSpPr/>
-          <p:nvPr/>
-        </p:nvSpPr>
-        <p:spPr>
-          <a:xfrm>
-            <a:off x="822960" y="1645920"/>
-            <a:ext cx="9601200" cy="640080"/>
-          </a:xfrm>
-          <a:prstGeom prst="rect">
-            <a:avLst/>
-          </a:prstGeom>
-          <a:noFill/>
-          <a:ln/>
-        </p:spPr>
-        <p:txBody>
-          <a:bodyPr wrap="square" rtlCol="0" anchor="ctr"/>
-          <a:lstStyle/>
-          <a:p>
-            <a:pPr indent="0" marL="0">
-              <a:buNone/>
-            </a:pPr>
-            <a:r>
-              <a:rPr lang="en-US" sz="1700" dirty="0">
-                <a:solidFill>
-                  <a:srgbClr val="1A1A1A"/>
-                </a:solidFill>
-                <a:latin typeface="Calibri" pitchFamily="34" charset="0"/>
-                <a:ea typeface="Calibri" pitchFamily="34" charset="-122"/>
-                <a:cs typeface="Calibri" pitchFamily="34" charset="-120"/>
-              </a:rPr>
-              <a:t>PES measures how responsive quantity supplied is to a change in price.</a:t>
-            </a:r>
-            <a:endParaRPr lang="en-US" sz="1700" dirty="0"/>
-          </a:p>
-        </p:txBody>
-      </p:sp>
-      <p:sp>
-        <p:nvSpPr>
-          <p:cNvPr id="4" name="Shape 2"/>
-          <p:cNvSpPr/>
-          <p:nvPr/>
-        </p:nvSpPr>
-        <p:spPr>
-          <a:xfrm>
-            <a:off x="2651760" y="2468880"/>
-            <a:ext cx="6858000" cy="1188720"/>
-          </a:xfrm>
-          <a:prstGeom prst="roundRect">
-            <a:avLst>
-              <a:gd name="adj" fmla="val 10769"/>
-            </a:avLst>
-          </a:prstGeom>
-          <a:solidFill>
-            <a:srgbClr val="1E2761"/>
-          </a:solidFill>
-          <a:ln/>
-        </p:spPr>
-      </p:sp>
-      <p:sp>
-        <p:nvSpPr>
-          <p:cNvPr id="5" name="Text 3"/>
-          <p:cNvSpPr/>
-          <p:nvPr/>
-        </p:nvSpPr>
-        <p:spPr>
-          <a:xfrm>
-            <a:off x="2651760" y="2468880"/>
-            <a:ext cx="6858000" cy="1188720"/>
-          </a:xfrm>
-          <a:prstGeom prst="rect">
-            <a:avLst/>
-          </a:prstGeom>
-          <a:noFill/>
-          <a:ln/>
-        </p:spPr>
-        <p:txBody>
-          <a:bodyPr wrap="square" rtlCol="0" anchor="ctr"/>
-          <a:lstStyle/>
-          <a:p>
-            <a:pPr algn="ctr" indent="0" marL="0">
-              <a:buNone/>
-            </a:pPr>
-            <a:r>
-              <a:rPr lang="en-US" sz="3000" b="1" dirty="0">
-                <a:solidFill>
-                  <a:srgbClr val="CADCFC"/>
-                </a:solidFill>
-                <a:latin typeface="Cambria" pitchFamily="34" charset="0"/>
-                <a:ea typeface="Cambria" pitchFamily="34" charset="-122"/>
-                <a:cs typeface="Cambria" pitchFamily="34" charset="-120"/>
-              </a:rPr>
-              <a:t>PES = %ΔQs ÷ %ΔP</a:t>
-            </a:r>
-            <a:endParaRPr lang="en-US" sz="3000" dirty="0"/>
-          </a:p>
-        </p:txBody>
-      </p:sp>
-      <p:sp>
-        <p:nvSpPr>
-          <p:cNvPr id="6" name="Text 4"/>
-          <p:cNvSpPr/>
-          <p:nvPr/>
-        </p:nvSpPr>
-        <p:spPr>
-          <a:xfrm>
-            <a:off x="822960" y="3931920"/>
-            <a:ext cx="9601200" cy="822960"/>
-          </a:xfrm>
-          <a:prstGeom prst="rect">
-            <a:avLst/>
-          </a:prstGeom>
-          <a:noFill/>
-          <a:ln/>
-        </p:spPr>
-        <p:txBody>
-          <a:bodyPr wrap="square" rtlCol="0" anchor="ctr"/>
-          <a:lstStyle/>
-          <a:p>
-            <a:pPr indent="0" marL="0">
-              <a:buNone/>
-            </a:pPr>
-            <a:r>
-              <a:rPr lang="en-US" sz="1500" i="1" dirty="0">
-                <a:solidFill>
-                  <a:srgbClr val="5B5B5B"/>
-                </a:solidFill>
-                <a:latin typeface="Calibri" pitchFamily="34" charset="0"/>
-                <a:ea typeface="Calibri" pitchFamily="34" charset="-122"/>
-                <a:cs typeface="Calibri" pitchFamily="34" charset="-120"/>
-              </a:rPr>
-              <a:t>Unlike PED, PES is almost always positive — the law of supply says price and quantity supplied move in the same direction, so there's no minus sign to ignore this time.</a:t>
-            </a:r>
-            <a:endParaRPr lang="en-US" sz="1500" dirty="0"/>
+              <a:t>PED = −25 ÷ 25 = −1 → Unitary</a:t>
+            </a:r>
+            <a:endParaRPr lang="en-US" sz="1800" dirty="0"/>
           </a:p>
         </p:txBody>
       </p:sp>
@@ -5677,13 +7692,76 @@
       </p:grpSpPr>
       <p:sp>
         <p:nvSpPr>
-          <p:cNvPr id="2" name="Text 0"/>
-          <p:cNvSpPr/>
-          <p:nvPr/>
-        </p:nvSpPr>
-        <p:spPr>
-          <a:xfrm>
-            <a:off x="640080" y="640080"/>
+          <p:cNvPr id="2" name="Shape 0"/>
+          <p:cNvSpPr/>
+          <p:nvPr/>
+        </p:nvSpPr>
+        <p:spPr>
+          <a:xfrm>
+            <a:off x="640080" y="502920"/>
+            <a:ext cx="1527048" cy="365760"/>
+          </a:xfrm>
+          <a:prstGeom prst="roundRect">
+            <a:avLst>
+              <a:gd name="adj" fmla="val 50000"/>
+            </a:avLst>
+          </a:prstGeom>
+          <a:solidFill>
+            <a:srgbClr val="F96167">
+              <a:alpha val="18000"/>
+            </a:srgbClr>
+          </a:solidFill>
+          <a:ln/>
+        </p:spPr>
+      </p:sp>
+      <p:sp>
+        <p:nvSpPr>
+          <p:cNvPr id="3" name="Text 1"/>
+          <p:cNvSpPr/>
+          <p:nvPr/>
+        </p:nvSpPr>
+        <p:spPr>
+          <a:xfrm>
+            <a:off x="640080" y="502920"/>
+            <a:ext cx="1527048" cy="365760"/>
+          </a:xfrm>
+          <a:prstGeom prst="rect">
+            <a:avLst/>
+          </a:prstGeom>
+          <a:noFill/>
+          <a:ln/>
+        </p:spPr>
+        <p:txBody>
+          <a:bodyPr wrap="square" rtlCol="0" anchor="ctr"/>
+          <a:lstStyle/>
+          <a:p>
+            <a:pPr algn="ctr" indent="0" marL="0">
+              <a:buNone/>
+            </a:pPr>
+            <a:r>
+              <a:rPr lang="en-US" sz="1200" b="1" dirty="0">
+                <a:solidFill>
+                  <a:srgbClr val="F96167"/>
+                </a:solidFill>
+                <a:latin typeface="Calibri" pitchFamily="34" charset="0"/>
+                <a:ea typeface="Calibri" pitchFamily="34" charset="-122"/>
+                <a:cs typeface="Calibri" pitchFamily="34" charset="-120"/>
+              </a:rPr>
+              <a:t>✍️ Your turn</a:t>
+            </a:r>
+            <a:endParaRPr lang="en-US" sz="1200" dirty="0"/>
+          </a:p>
+        </p:txBody>
+      </p:sp>
+      <p:sp>
+        <p:nvSpPr>
+          <p:cNvPr id="4" name="Text 2"/>
+          <p:cNvSpPr/>
+          <p:nvPr/>
+        </p:nvSpPr>
+        <p:spPr>
+          <a:xfrm>
+            <a:off x="640080" y="1051560"/>
             <a:ext cx="10881360" cy="548640"/>
           </a:xfrm>
           <a:prstGeom prst="rect">
@@ -5708,7 +7786,7 @@
                 <a:ea typeface="Calibri" pitchFamily="34" charset="-122"/>
                 <a:cs typeface="Calibri" pitchFamily="34" charset="-120"/>
               </a:rPr>
-              <a:t>🖨️ Worked example: Tom's grips</a:t>
+              <a:t>🎾 Warm-up: padel kids' coaching</a:t>
             </a:r>
             <a:endParaRPr lang="en-US" sz="2200" dirty="0"/>
           </a:p>
@@ -5716,7 +7794,7 @@
       </p:sp>
       <p:sp>
         <p:nvSpPr>
-          <p:cNvPr id="3" name="Shape 1"/>
+          <p:cNvPr id="5" name="Shape 3"/>
           <p:cNvSpPr/>
           <p:nvPr/>
         </p:nvSpPr>
@@ -5738,7 +7816,7 @@
       </p:sp>
       <p:sp>
         <p:nvSpPr>
-          <p:cNvPr id="4" name="Text 2"/>
+          <p:cNvPr id="6" name="Text 4"/>
           <p:cNvSpPr/>
           <p:nvPr/>
         </p:nvSpPr>
@@ -5769,7 +7847,7 @@
                 <a:ea typeface="Calibri" pitchFamily="34" charset="-122"/>
                 <a:cs typeface="Calibri" pitchFamily="34" charset="-120"/>
               </a:rPr>
-              <a:t>An order surge</a:t>
+              <a:t>Your turn — PED + TR practice</a:t>
             </a:r>
             <a:endParaRPr lang="en-US" sz="1400" dirty="0"/>
           </a:p>
@@ -5777,14 +7855,14 @@
       </p:sp>
       <p:sp>
         <p:nvSpPr>
-          <p:cNvPr id="5" name="Text 3"/>
+          <p:cNvPr id="7" name="Text 5"/>
           <p:cNvSpPr/>
           <p:nvPr/>
         </p:nvSpPr>
         <p:spPr>
           <a:xfrm>
             <a:off x="3840480" y="2651760"/>
-            <a:ext cx="4480560" cy="1463040"/>
+            <a:ext cx="4480560" cy="1280160"/>
           </a:xfrm>
           <a:prstGeom prst="rect">
             <a:avLst/>
@@ -5798,7 +7876,7 @@
           <a:p>
             <a:pPr indent="0" marL="0">
               <a:spcAft>
-                <a:spcPts val="600"/>
+                <a:spcPts val="800"/>
               </a:spcAft>
               <a:buNone/>
             </a:pPr>
@@ -5811,14 +7889,14 @@
                 <a:ea typeface="Calibri" pitchFamily="34" charset="-122"/>
                 <a:cs typeface="Calibri" pitchFamily="34" charset="-120"/>
               </a:rPr>
-              <a:t>Price: $8 → $10  (+25%)</a:t>
+              <a:t>Price: $15 → $18  (+20%)</a:t>
             </a:r>
             <a:endParaRPr lang="en-US" sz="1500" dirty="0"/>
           </a:p>
           <a:p>
             <a:pPr indent="0" marL="0">
               <a:spcAft>
-                <a:spcPts val="600"/>
+                <a:spcPts val="800"/>
               </a:spcAft>
               <a:buNone/>
             </a:pPr>
@@ -5831,7 +7909,7 @@
                 <a:ea typeface="Calibri" pitchFamily="34" charset="-122"/>
                 <a:cs typeface="Calibri" pitchFamily="34" charset="-120"/>
               </a:rPr>
-              <a:t>Quantity supplied: 60 → 90 grips/week  (+50%)</a:t>
+              <a:t>Quantity: 40 → 36 sessions/week  (−10%)</a:t>
             </a:r>
             <a:endParaRPr lang="en-US" sz="1500" dirty="0"/>
           </a:p>
@@ -5839,14 +7917,37 @@
       </p:sp>
       <p:sp>
         <p:nvSpPr>
-          <p:cNvPr id="6" name="Text 4"/>
-          <p:cNvSpPr/>
-          <p:nvPr/>
-        </p:nvSpPr>
-        <p:spPr>
-          <a:xfrm>
-            <a:off x="3840480" y="4206240"/>
-            <a:ext cx="4480560" cy="731520"/>
+          <p:cNvPr id="8" name="Shape 6"/>
+          <p:cNvSpPr/>
+          <p:nvPr/>
+        </p:nvSpPr>
+        <p:spPr>
+          <a:xfrm>
+            <a:off x="3840480" y="4343400"/>
+            <a:ext cx="1828800" cy="0"/>
+          </a:xfrm>
+          <a:prstGeom prst="line">
+            <a:avLst/>
+          </a:prstGeom>
+          <a:noFill/>
+          <a:ln w="19050">
+            <a:solidFill>
+              <a:srgbClr val="5B5B5B"/>
+            </a:solidFill>
+            <a:prstDash val="solid"/>
+          </a:ln>
+        </p:spPr>
+      </p:sp>
+      <p:sp>
+        <p:nvSpPr>
+          <p:cNvPr id="9" name="Text 7"/>
+          <p:cNvSpPr/>
+          <p:nvPr/>
+        </p:nvSpPr>
+        <p:spPr>
+          <a:xfrm>
+            <a:off x="3840480" y="3977640"/>
+            <a:ext cx="4206240" cy="320040"/>
           </a:xfrm>
           <a:prstGeom prst="rect">
             <a:avLst/>
@@ -5862,17 +7963,79 @@
               <a:buNone/>
             </a:pPr>
             <a:r>
-              <a:rPr lang="en-US" sz="1800" b="1" dirty="0">
-                <a:solidFill>
-                  <a:srgbClr val="1E2761"/>
-                </a:solidFill>
-                <a:latin typeface="Cambria" pitchFamily="34" charset="0"/>
-                <a:ea typeface="Cambria" pitchFamily="34" charset="-122"/>
-                <a:cs typeface="Cambria" pitchFamily="34" charset="-120"/>
-              </a:rPr>
-              <a:t>PES = 50 ÷ 25 = 2 → Elastic</a:t>
-            </a:r>
-            <a:endParaRPr lang="en-US" sz="1800" dirty="0"/>
+              <a:rPr lang="en-US" sz="1400" dirty="0">
+                <a:solidFill>
+                  <a:srgbClr val="1A1A1A"/>
+                </a:solidFill>
+                <a:latin typeface="Calibri" pitchFamily="34" charset="0"/>
+                <a:ea typeface="Calibri" pitchFamily="34" charset="-122"/>
+                <a:cs typeface="Calibri" pitchFamily="34" charset="-120"/>
+              </a:rPr>
+              <a:t>TR before = $____</a:t>
+            </a:r>
+            <a:endParaRPr lang="en-US" sz="1400" dirty="0"/>
+          </a:p>
+        </p:txBody>
+      </p:sp>
+      <p:sp>
+        <p:nvSpPr>
+          <p:cNvPr id="10" name="Shape 8"/>
+          <p:cNvSpPr/>
+          <p:nvPr/>
+        </p:nvSpPr>
+        <p:spPr>
+          <a:xfrm>
+            <a:off x="3840480" y="4709160"/>
+            <a:ext cx="1828800" cy="0"/>
+          </a:xfrm>
+          <a:prstGeom prst="line">
+            <a:avLst/>
+          </a:prstGeom>
+          <a:noFill/>
+          <a:ln w="19050">
+            <a:solidFill>
+              <a:srgbClr val="5B5B5B"/>
+            </a:solidFill>
+            <a:prstDash val="solid"/>
+          </a:ln>
+        </p:spPr>
+      </p:sp>
+      <p:sp>
+        <p:nvSpPr>
+          <p:cNvPr id="11" name="Text 9"/>
+          <p:cNvSpPr/>
+          <p:nvPr/>
+        </p:nvSpPr>
+        <p:spPr>
+          <a:xfrm>
+            <a:off x="3840480" y="4343400"/>
+            <a:ext cx="4206240" cy="320040"/>
+          </a:xfrm>
+          <a:prstGeom prst="rect">
+            <a:avLst/>
+          </a:prstGeom>
+          <a:noFill/>
+          <a:ln/>
+        </p:spPr>
+        <p:txBody>
+          <a:bodyPr wrap="square" rtlCol="0" anchor="ctr"/>
+          <a:lstStyle/>
+          <a:p>
+            <a:pPr indent="0" marL="0">
+              <a:buNone/>
+            </a:pPr>
+            <a:r>
+              <a:rPr lang="en-US" sz="1400" dirty="0">
+                <a:solidFill>
+                  <a:srgbClr val="1A1A1A"/>
+                </a:solidFill>
+                <a:latin typeface="Calibri" pitchFamily="34" charset="0"/>
+                <a:ea typeface="Calibri" pitchFamily="34" charset="-122"/>
+                <a:cs typeface="Calibri" pitchFamily="34" charset="-120"/>
+              </a:rPr>
+              <a:t>TR after = $____</a:t>
+            </a:r>
+            <a:endParaRPr lang="en-US" sz="1400" dirty="0"/>
           </a:p>
         </p:txBody>
       </p:sp>
@@ -5917,7 +8080,7 @@
         <p:spPr>
           <a:xfrm>
             <a:off x="640080" y="502920"/>
-            <a:ext cx="1527048" cy="365760"/>
+            <a:ext cx="1325880" cy="365760"/>
           </a:xfrm>
           <a:prstGeom prst="roundRect">
             <a:avLst>
@@ -5925,7 +8088,7 @@
             </a:avLst>
           </a:prstGeom>
           <a:solidFill>
-            <a:srgbClr val="F96167">
+            <a:srgbClr val="1BAF7A">
               <a:alpha val="18000"/>
             </a:srgbClr>
           </a:solidFill>
@@ -5941,7 +8104,7 @@
         <p:spPr>
           <a:xfrm>
             <a:off x="640080" y="502920"/>
-            <a:ext cx="1527048" cy="365760"/>
+            <a:ext cx="1325880" cy="365760"/>
           </a:xfrm>
           <a:prstGeom prst="rect">
             <a:avLst/>
@@ -5959,13 +8122,13 @@
             <a:r>
               <a:rPr lang="en-US" sz="1200" b="1" dirty="0">
                 <a:solidFill>
-                  <a:srgbClr val="F96167"/>
-                </a:solidFill>
-                <a:latin typeface="Calibri" pitchFamily="34" charset="0"/>
-                <a:ea typeface="Calibri" pitchFamily="34" charset="-122"/>
-                <a:cs typeface="Calibri" pitchFamily="34" charset="-120"/>
-              </a:rPr>
-              <a:t>✍️ Your turn</a:t>
+                  <a:srgbClr val="1BAF7A"/>
+                </a:solidFill>
+                <a:latin typeface="Calibri" pitchFamily="34" charset="0"/>
+                <a:ea typeface="Calibri" pitchFamily="34" charset="-122"/>
+                <a:cs typeface="Calibri" pitchFamily="34" charset="-120"/>
+              </a:rPr>
+              <a:t>✅ Revealed</a:t>
             </a:r>
             <a:endParaRPr lang="en-US" sz="1200" dirty="0"/>
           </a:p>
@@ -6004,7 +8167,7 @@
                 <a:ea typeface="Calibri" pitchFamily="34" charset="-122"/>
                 <a:cs typeface="Calibri" pitchFamily="34" charset="-120"/>
               </a:rPr>
-              <a:t>🎾 Padel courts this summer</a:t>
+              <a:t>🎾 Kids' coaching — answer</a:t>
             </a:r>
             <a:endParaRPr lang="en-US" sz="2200" dirty="0"/>
           </a:p>
@@ -6065,7 +8228,7 @@
                 <a:ea typeface="Calibri" pitchFamily="34" charset="-122"/>
                 <a:cs typeface="Calibri" pitchFamily="34" charset="-120"/>
               </a:rPr>
-              <a:t>Your turn — work it out</a:t>
+              <a:t>Check your answer</a:t>
             </a:r>
             <a:endParaRPr lang="en-US" sz="1400" dirty="0"/>
           </a:p>
@@ -6080,7 +8243,7 @@
         <p:spPr>
           <a:xfrm>
             <a:off x="3840480" y="2651760"/>
-            <a:ext cx="4480560" cy="1280160"/>
+            <a:ext cx="4480560" cy="1463040"/>
           </a:xfrm>
           <a:prstGeom prst="rect">
             <a:avLst/>
@@ -6094,7 +8257,7 @@
           <a:p>
             <a:pPr indent="0" marL="0">
               <a:spcAft>
-                <a:spcPts val="800"/>
+                <a:spcPts val="600"/>
               </a:spcAft>
               <a:buNone/>
             </a:pPr>
@@ -6107,14 +8270,14 @@
                 <a:ea typeface="Calibri" pitchFamily="34" charset="-122"/>
                 <a:cs typeface="Calibri" pitchFamily="34" charset="-120"/>
               </a:rPr>
-              <a:t>Price: court hire +20%</a:t>
+              <a:t>PED = −10 ÷ 20 = −0.5 (inelastic)</a:t>
             </a:r>
             <a:endParaRPr lang="en-US" sz="1500" dirty="0"/>
           </a:p>
           <a:p>
             <a:pPr indent="0" marL="0">
               <a:spcAft>
-                <a:spcPts val="800"/>
+                <a:spcPts val="600"/>
               </a:spcAft>
               <a:buNone/>
             </a:pPr>
@@ -6127,45 +8290,42 @@
                 <a:ea typeface="Calibri" pitchFamily="34" charset="-122"/>
                 <a:cs typeface="Calibri" pitchFamily="34" charset="-120"/>
               </a:rPr>
-              <a:t>Quantity supplied: fixed — no new courts before autumn</a:t>
+              <a:t>TR before = $15 × 40 = $600</a:t>
             </a:r>
             <a:endParaRPr lang="en-US" sz="1500" dirty="0"/>
           </a:p>
-        </p:txBody>
-      </p:sp>
-      <p:sp>
-        <p:nvSpPr>
-          <p:cNvPr id="8" name="Shape 6"/>
-          <p:cNvSpPr/>
-          <p:nvPr/>
-        </p:nvSpPr>
-        <p:spPr>
-          <a:xfrm>
-            <a:off x="3840480" y="4343400"/>
-            <a:ext cx="1828800" cy="0"/>
-          </a:xfrm>
-          <a:prstGeom prst="line">
-            <a:avLst/>
-          </a:prstGeom>
-          <a:noFill/>
-          <a:ln w="19050">
-            <a:solidFill>
-              <a:srgbClr val="5B5B5B"/>
-            </a:solidFill>
-            <a:prstDash val="solid"/>
-          </a:ln>
-        </p:spPr>
-      </p:sp>
-      <p:sp>
-        <p:nvSpPr>
-          <p:cNvPr id="9" name="Text 7"/>
-          <p:cNvSpPr/>
-          <p:nvPr/>
-        </p:nvSpPr>
-        <p:spPr>
-          <a:xfrm>
-            <a:off x="3840480" y="3977640"/>
-            <a:ext cx="4206240" cy="320040"/>
+          <a:p>
+            <a:pPr indent="0" marL="0">
+              <a:spcAft>
+                <a:spcPts val="600"/>
+              </a:spcAft>
+              <a:buNone/>
+            </a:pPr>
+            <a:r>
+              <a:rPr lang="en-US" sz="1500" dirty="0">
+                <a:solidFill>
+                  <a:srgbClr val="1A1A1A"/>
+                </a:solidFill>
+                <a:latin typeface="Calibri" pitchFamily="34" charset="0"/>
+                <a:ea typeface="Calibri" pitchFamily="34" charset="-122"/>
+                <a:cs typeface="Calibri" pitchFamily="34" charset="-120"/>
+              </a:rPr>
+              <a:t>TR after = $18 × 36 = $648</a:t>
+            </a:r>
+            <a:endParaRPr lang="en-US" sz="1500" dirty="0"/>
+          </a:p>
+        </p:txBody>
+      </p:sp>
+      <p:sp>
+        <p:nvSpPr>
+          <p:cNvPr id="8" name="Text 6"/>
+          <p:cNvSpPr/>
+          <p:nvPr/>
+        </p:nvSpPr>
+        <p:spPr>
+          <a:xfrm>
+            <a:off x="3840480" y="4206240"/>
+            <a:ext cx="4480560" cy="731520"/>
           </a:xfrm>
           <a:prstGeom prst="rect">
             <a:avLst/>
@@ -6181,79 +8341,17 @@
               <a:buNone/>
             </a:pPr>
             <a:r>
-              <a:rPr lang="en-US" sz="1400" dirty="0">
-                <a:solidFill>
-                  <a:srgbClr val="1A1A1A"/>
-                </a:solidFill>
-                <a:latin typeface="Calibri" pitchFamily="34" charset="0"/>
-                <a:ea typeface="Calibri" pitchFamily="34" charset="-122"/>
-                <a:cs typeface="Calibri" pitchFamily="34" charset="-120"/>
-              </a:rPr>
-              <a:t>TR before = $____</a:t>
-            </a:r>
-            <a:endParaRPr lang="en-US" sz="1400" dirty="0"/>
-          </a:p>
-        </p:txBody>
-      </p:sp>
-      <p:sp>
-        <p:nvSpPr>
-          <p:cNvPr id="10" name="Shape 8"/>
-          <p:cNvSpPr/>
-          <p:nvPr/>
-        </p:nvSpPr>
-        <p:spPr>
-          <a:xfrm>
-            <a:off x="3840480" y="4709160"/>
-            <a:ext cx="1828800" cy="0"/>
-          </a:xfrm>
-          <a:prstGeom prst="line">
-            <a:avLst/>
-          </a:prstGeom>
-          <a:noFill/>
-          <a:ln w="19050">
-            <a:solidFill>
-              <a:srgbClr val="5B5B5B"/>
-            </a:solidFill>
-            <a:prstDash val="solid"/>
-          </a:ln>
-        </p:spPr>
-      </p:sp>
-      <p:sp>
-        <p:nvSpPr>
-          <p:cNvPr id="11" name="Text 9"/>
-          <p:cNvSpPr/>
-          <p:nvPr/>
-        </p:nvSpPr>
-        <p:spPr>
-          <a:xfrm>
-            <a:off x="3840480" y="4343400"/>
-            <a:ext cx="4206240" cy="320040"/>
-          </a:xfrm>
-          <a:prstGeom prst="rect">
-            <a:avLst/>
-          </a:prstGeom>
-          <a:noFill/>
-          <a:ln/>
-        </p:spPr>
-        <p:txBody>
-          <a:bodyPr wrap="square" rtlCol="0" anchor="ctr"/>
-          <a:lstStyle/>
-          <a:p>
-            <a:pPr indent="0" marL="0">
-              <a:buNone/>
-            </a:pPr>
-            <a:r>
-              <a:rPr lang="en-US" sz="1400" dirty="0">
-                <a:solidFill>
-                  <a:srgbClr val="1A1A1A"/>
-                </a:solidFill>
-                <a:latin typeface="Calibri" pitchFamily="34" charset="0"/>
-                <a:ea typeface="Calibri" pitchFamily="34" charset="-122"/>
-                <a:cs typeface="Calibri" pitchFamily="34" charset="-120"/>
-              </a:rPr>
-              <a:t>TR after = $____</a:t>
-            </a:r>
-            <a:endParaRPr lang="en-US" sz="1400" dirty="0"/>
+              <a:rPr lang="en-US" sz="1800" b="1" dirty="0">
+                <a:solidFill>
+                  <a:srgbClr val="1BAF7A"/>
+                </a:solidFill>
+                <a:latin typeface="Cambria" pitchFamily="34" charset="0"/>
+                <a:ea typeface="Cambria" pitchFamily="34" charset="-122"/>
+                <a:cs typeface="Cambria" pitchFamily="34" charset="-120"/>
+              </a:rPr>
+              <a:t>Revenue ROSE — inelastic + price rise</a:t>
+            </a:r>
+            <a:endParaRPr lang="en-US" sz="1800" dirty="0"/>
           </a:p>
         </p:txBody>
       </p:sp>
@@ -6291,38 +8389,14 @@
       </p:grpSpPr>
       <p:sp>
         <p:nvSpPr>
-          <p:cNvPr id="2" name="Shape 0"/>
-          <p:cNvSpPr/>
-          <p:nvPr/>
-        </p:nvSpPr>
-        <p:spPr>
-          <a:xfrm>
-            <a:off x="640080" y="502920"/>
-            <a:ext cx="1325880" cy="365760"/>
-          </a:xfrm>
-          <a:prstGeom prst="roundRect">
-            <a:avLst>
-              <a:gd name="adj" fmla="val 50000"/>
-            </a:avLst>
-          </a:prstGeom>
-          <a:solidFill>
-            <a:srgbClr val="1BAF7A">
-              <a:alpha val="18000"/>
-            </a:srgbClr>
-          </a:solidFill>
-          <a:ln/>
-        </p:spPr>
-      </p:sp>
-      <p:sp>
-        <p:nvSpPr>
-          <p:cNvPr id="3" name="Text 1"/>
-          <p:cNvSpPr/>
-          <p:nvPr/>
-        </p:nvSpPr>
-        <p:spPr>
-          <a:xfrm>
-            <a:off x="640080" y="502920"/>
-            <a:ext cx="1325880" cy="365760"/>
+          <p:cNvPr id="2" name="Text 0"/>
+          <p:cNvSpPr/>
+          <p:nvPr/>
+        </p:nvSpPr>
+        <p:spPr>
+          <a:xfrm>
+            <a:off x="640080" y="548640"/>
+            <a:ext cx="10881360" cy="822960"/>
           </a:xfrm>
           <a:prstGeom prst="rect">
             <a:avLst/>
@@ -6334,220 +8408,110 @@
           <a:bodyPr wrap="square" rtlCol="0" anchor="ctr"/>
           <a:lstStyle/>
           <a:p>
-            <a:pPr algn="ctr" indent="0" marL="0">
-              <a:buNone/>
-            </a:pPr>
-            <a:r>
-              <a:rPr lang="en-US" sz="1200" b="1" dirty="0">
-                <a:solidFill>
-                  <a:srgbClr val="1BAF7A"/>
-                </a:solidFill>
-                <a:latin typeface="Calibri" pitchFamily="34" charset="0"/>
-                <a:ea typeface="Calibri" pitchFamily="34" charset="-122"/>
-                <a:cs typeface="Calibri" pitchFamily="34" charset="-120"/>
-              </a:rPr>
-              <a:t>✅ Revealed</a:t>
-            </a:r>
-            <a:endParaRPr lang="en-US" sz="1200" dirty="0"/>
-          </a:p>
-        </p:txBody>
-      </p:sp>
-      <p:sp>
-        <p:nvSpPr>
-          <p:cNvPr id="4" name="Text 2"/>
-          <p:cNvSpPr/>
-          <p:nvPr/>
-        </p:nvSpPr>
-        <p:spPr>
-          <a:xfrm>
-            <a:off x="640080" y="1051560"/>
-            <a:ext cx="10881360" cy="548640"/>
-          </a:xfrm>
-          <a:prstGeom prst="rect">
-            <a:avLst/>
-          </a:prstGeom>
-          <a:noFill/>
-          <a:ln/>
-        </p:spPr>
-        <p:txBody>
-          <a:bodyPr wrap="square" rtlCol="0" anchor="ctr"/>
-          <a:lstStyle/>
-          <a:p>
-            <a:pPr indent="0" marL="0">
-              <a:buNone/>
-            </a:pPr>
-            <a:r>
-              <a:rPr lang="en-US" sz="2200" b="1" dirty="0">
+            <a:pPr indent="0" marL="0">
+              <a:buNone/>
+            </a:pPr>
+            <a:r>
+              <a:rPr lang="en-US" sz="3200" b="1" dirty="0">
                 <a:solidFill>
                   <a:srgbClr val="1E2761"/>
-                </a:solidFill>
-                <a:latin typeface="Calibri" pitchFamily="34" charset="0"/>
-                <a:ea typeface="Calibri" pitchFamily="34" charset="-122"/>
-                <a:cs typeface="Calibri" pitchFamily="34" charset="-120"/>
-              </a:rPr>
-              <a:t>🎾 Padel courts — answer</a:t>
-            </a:r>
-            <a:endParaRPr lang="en-US" sz="2200" dirty="0"/>
-          </a:p>
-        </p:txBody>
-      </p:sp>
-      <p:sp>
-        <p:nvSpPr>
-          <p:cNvPr id="5" name="Shape 3"/>
-          <p:cNvSpPr/>
-          <p:nvPr/>
-        </p:nvSpPr>
-        <p:spPr>
-          <a:xfrm>
-            <a:off x="3566160" y="1920240"/>
-            <a:ext cx="5029200" cy="3108960"/>
-          </a:xfrm>
-          <a:prstGeom prst="roundRect">
-            <a:avLst>
-              <a:gd name="adj" fmla="val 4118"/>
-            </a:avLst>
-          </a:prstGeom>
-          <a:solidFill>
-            <a:srgbClr val="F4F5F7"/>
-          </a:solidFill>
-          <a:ln/>
-        </p:spPr>
-      </p:sp>
-      <p:sp>
-        <p:nvSpPr>
-          <p:cNvPr id="6" name="Text 4"/>
-          <p:cNvSpPr/>
-          <p:nvPr/>
-        </p:nvSpPr>
-        <p:spPr>
-          <a:xfrm>
-            <a:off x="3840480" y="2194560"/>
-            <a:ext cx="4480560" cy="365760"/>
-          </a:xfrm>
-          <a:prstGeom prst="rect">
-            <a:avLst/>
-          </a:prstGeom>
-          <a:noFill/>
-          <a:ln/>
-        </p:spPr>
-        <p:txBody>
-          <a:bodyPr wrap="square" rtlCol="0" anchor="ctr"/>
-          <a:lstStyle/>
-          <a:p>
-            <a:pPr indent="0" marL="0">
-              <a:buNone/>
-            </a:pPr>
-            <a:r>
-              <a:rPr lang="en-US" sz="1400" b="1" dirty="0">
-                <a:solidFill>
-                  <a:srgbClr val="5B5B5B"/>
-                </a:solidFill>
-                <a:latin typeface="Calibri" pitchFamily="34" charset="0"/>
-                <a:ea typeface="Calibri" pitchFamily="34" charset="-122"/>
-                <a:cs typeface="Calibri" pitchFamily="34" charset="-120"/>
-              </a:rPr>
-              <a:t>Check your answer</a:t>
-            </a:r>
-            <a:endParaRPr lang="en-US" sz="1400" dirty="0"/>
-          </a:p>
-        </p:txBody>
-      </p:sp>
-      <p:sp>
-        <p:nvSpPr>
-          <p:cNvPr id="7" name="Text 5"/>
-          <p:cNvSpPr/>
-          <p:nvPr/>
-        </p:nvSpPr>
-        <p:spPr>
-          <a:xfrm>
-            <a:off x="3840480" y="2651760"/>
-            <a:ext cx="4480560" cy="1463040"/>
-          </a:xfrm>
-          <a:prstGeom prst="rect">
-            <a:avLst/>
-          </a:prstGeom>
-          <a:noFill/>
-          <a:ln/>
-        </p:spPr>
-        <p:txBody>
-          <a:bodyPr wrap="square" rtlCol="0" anchor="t"/>
-          <a:lstStyle/>
-          <a:p>
-            <a:pPr indent="0" marL="0">
-              <a:spcAft>
-                <a:spcPts val="600"/>
-              </a:spcAft>
-              <a:buNone/>
-            </a:pPr>
-            <a:r>
-              <a:rPr lang="en-US" sz="1500" dirty="0">
-                <a:solidFill>
-                  <a:srgbClr val="1A1A1A"/>
-                </a:solidFill>
-                <a:latin typeface="Calibri" pitchFamily="34" charset="0"/>
-                <a:ea typeface="Calibri" pitchFamily="34" charset="-122"/>
-                <a:cs typeface="Calibri" pitchFamily="34" charset="-120"/>
-              </a:rPr>
-              <a:t>% change in price = +20%</a:t>
-            </a:r>
-            <a:endParaRPr lang="en-US" sz="1500" dirty="0"/>
-          </a:p>
-          <a:p>
-            <a:pPr indent="0" marL="0">
-              <a:spcAft>
-                <a:spcPts val="600"/>
-              </a:spcAft>
-              <a:buNone/>
-            </a:pPr>
-            <a:r>
-              <a:rPr lang="en-US" sz="1500" dirty="0">
-                <a:solidFill>
-                  <a:srgbClr val="1A1A1A"/>
-                </a:solidFill>
-                <a:latin typeface="Calibri" pitchFamily="34" charset="0"/>
-                <a:ea typeface="Calibri" pitchFamily="34" charset="-122"/>
-                <a:cs typeface="Calibri" pitchFamily="34" charset="-120"/>
-              </a:rPr>
-              <a:t>% change in quantity supplied = 0%</a:t>
-            </a:r>
-            <a:endParaRPr lang="en-US" sz="1500" dirty="0"/>
-          </a:p>
-        </p:txBody>
-      </p:sp>
-      <p:sp>
-        <p:nvSpPr>
-          <p:cNvPr id="8" name="Text 6"/>
-          <p:cNvSpPr/>
-          <p:nvPr/>
-        </p:nvSpPr>
-        <p:spPr>
-          <a:xfrm>
-            <a:off x="3840480" y="4206240"/>
-            <a:ext cx="4480560" cy="731520"/>
-          </a:xfrm>
-          <a:prstGeom prst="rect">
-            <a:avLst/>
-          </a:prstGeom>
-          <a:noFill/>
-          <a:ln/>
-        </p:spPr>
-        <p:txBody>
-          <a:bodyPr wrap="square" rtlCol="0" anchor="ctr"/>
-          <a:lstStyle/>
-          <a:p>
-            <a:pPr indent="0" marL="0">
-              <a:buNone/>
-            </a:pPr>
-            <a:r>
-              <a:rPr lang="en-US" sz="1800" b="1" dirty="0">
-                <a:solidFill>
-                  <a:srgbClr val="1BAF7A"/>
                 </a:solidFill>
                 <a:latin typeface="Cambria" pitchFamily="34" charset="0"/>
                 <a:ea typeface="Cambria" pitchFamily="34" charset="-122"/>
                 <a:cs typeface="Cambria" pitchFamily="34" charset="-120"/>
               </a:rPr>
-              <a:t>PES = 0 ÷ 20 = 0 → Perfectly inelastic</a:t>
+              <a:t>Who can react faster?</a:t>
+            </a:r>
+            <a:endParaRPr lang="en-US" sz="3200" dirty="0"/>
+          </a:p>
+        </p:txBody>
+      </p:sp>
+      <p:sp>
+        <p:nvSpPr>
+          <p:cNvPr id="3" name="Text 1"/>
+          <p:cNvSpPr/>
+          <p:nvPr/>
+        </p:nvSpPr>
+        <p:spPr>
+          <a:xfrm>
+            <a:off x="822960" y="1828800"/>
+            <a:ext cx="9875520" cy="4114800"/>
+          </a:xfrm>
+          <a:prstGeom prst="rect">
+            <a:avLst/>
+          </a:prstGeom>
+          <a:noFill/>
+          <a:ln/>
+        </p:spPr>
+        <p:txBody>
+          <a:bodyPr wrap="square" rtlCol="0" anchor="t"/>
+          <a:lstStyle/>
+          <a:p>
+            <a:pPr indent="0" marL="0">
+              <a:lnSpc>
+                <a:spcPct val="130000"/>
+              </a:lnSpc>
+              <a:spcAft>
+                <a:spcPts val="1400"/>
+              </a:spcAft>
+              <a:buNone/>
+            </a:pPr>
+            <a:r>
+              <a:rPr lang="en-US" sz="1800" dirty="0">
+                <a:solidFill>
+                  <a:srgbClr val="1A1A1A"/>
+                </a:solidFill>
+                <a:latin typeface="Calibri" pitchFamily="34" charset="0"/>
+                <a:ea typeface="Calibri" pitchFamily="34" charset="-122"/>
+                <a:cs typeface="Calibri" pitchFamily="34" charset="-120"/>
+              </a:rPr>
+              <a:t>The padel club wants more courts this summer because demand is booming.</a:t>
+            </a:r>
+            <a:endParaRPr lang="en-US" sz="1800" dirty="0"/>
+          </a:p>
+          <a:p>
+            <a:pPr indent="0" marL="0">
+              <a:lnSpc>
+                <a:spcPct val="130000"/>
+              </a:lnSpc>
+              <a:spcAft>
+                <a:spcPts val="1400"/>
+              </a:spcAft>
+              <a:buNone/>
+            </a:pPr>
+            <a:r>
+              <a:rPr lang="en-US" sz="1800" dirty="0">
+                <a:solidFill>
+                  <a:srgbClr val="1A1A1A"/>
+                </a:solidFill>
+                <a:latin typeface="Calibri" pitchFamily="34" charset="0"/>
+                <a:ea typeface="Calibri" pitchFamily="34" charset="-122"/>
+                <a:cs typeface="Calibri" pitchFamily="34" charset="-120"/>
+              </a:rPr>
+              <a:t>Tom wants to make more grips this week because a big order just came in.</a:t>
+            </a:r>
+            <a:endParaRPr lang="en-US" sz="1800" dirty="0"/>
+          </a:p>
+          <a:p>
+            <a:pPr indent="0" marL="0">
+              <a:lnSpc>
+                <a:spcPct val="130000"/>
+              </a:lnSpc>
+              <a:spcAft>
+                <a:spcPts val="1400"/>
+              </a:spcAft>
+              <a:buNone/>
+            </a:pPr>
+            <a:r>
+              <a:rPr lang="en-US" sz="1800" dirty="0">
+                <a:solidFill>
+                  <a:srgbClr val="1A1A1A"/>
+                </a:solidFill>
+                <a:latin typeface="Calibri" pitchFamily="34" charset="0"/>
+                <a:ea typeface="Calibri" pitchFamily="34" charset="-122"/>
+                <a:cs typeface="Calibri" pitchFamily="34" charset="-120"/>
+              </a:rPr>
+              <a:t>Which one can actually ramp up supply faster — and why?</a:t>
             </a:r>
             <a:endParaRPr lang="en-US" sz="1800" dirty="0"/>
           </a:p>
@@ -6587,38 +8551,114 @@
       </p:grpSpPr>
       <p:sp>
         <p:nvSpPr>
-          <p:cNvPr id="2" name="Shape 0"/>
-          <p:cNvSpPr/>
-          <p:nvPr/>
-        </p:nvSpPr>
-        <p:spPr>
-          <a:xfrm>
-            <a:off x="640080" y="502920"/>
-            <a:ext cx="1527048" cy="365760"/>
+          <p:cNvPr id="2" name="Text 0"/>
+          <p:cNvSpPr/>
+          <p:nvPr/>
+        </p:nvSpPr>
+        <p:spPr>
+          <a:xfrm>
+            <a:off x="640080" y="640080"/>
+            <a:ext cx="10881360" cy="731520"/>
+          </a:xfrm>
+          <a:prstGeom prst="rect">
+            <a:avLst/>
+          </a:prstGeom>
+          <a:noFill/>
+          <a:ln/>
+        </p:spPr>
+        <p:txBody>
+          <a:bodyPr wrap="square" rtlCol="0" anchor="ctr"/>
+          <a:lstStyle/>
+          <a:p>
+            <a:pPr indent="0" marL="0">
+              <a:buNone/>
+            </a:pPr>
+            <a:r>
+              <a:rPr lang="en-US" sz="3000" b="1" dirty="0">
+                <a:solidFill>
+                  <a:srgbClr val="1E2761"/>
+                </a:solidFill>
+                <a:latin typeface="Cambria" pitchFamily="34" charset="0"/>
+                <a:ea typeface="Cambria" pitchFamily="34" charset="-122"/>
+                <a:cs typeface="Cambria" pitchFamily="34" charset="-120"/>
+              </a:rPr>
+              <a:t>Definition &amp; formula</a:t>
+            </a:r>
+            <a:endParaRPr lang="en-US" sz="3000" dirty="0"/>
+          </a:p>
+        </p:txBody>
+      </p:sp>
+      <p:sp>
+        <p:nvSpPr>
+          <p:cNvPr id="3" name="Text 1"/>
+          <p:cNvSpPr/>
+          <p:nvPr/>
+        </p:nvSpPr>
+        <p:spPr>
+          <a:xfrm>
+            <a:off x="822960" y="1645920"/>
+            <a:ext cx="9601200" cy="640080"/>
+          </a:xfrm>
+          <a:prstGeom prst="rect">
+            <a:avLst/>
+          </a:prstGeom>
+          <a:noFill/>
+          <a:ln/>
+        </p:spPr>
+        <p:txBody>
+          <a:bodyPr wrap="square" rtlCol="0" anchor="ctr"/>
+          <a:lstStyle/>
+          <a:p>
+            <a:pPr indent="0" marL="0">
+              <a:buNone/>
+            </a:pPr>
+            <a:r>
+              <a:rPr lang="en-US" sz="1700" dirty="0">
+                <a:solidFill>
+                  <a:srgbClr val="1A1A1A"/>
+                </a:solidFill>
+                <a:latin typeface="Calibri" pitchFamily="34" charset="0"/>
+                <a:ea typeface="Calibri" pitchFamily="34" charset="-122"/>
+                <a:cs typeface="Calibri" pitchFamily="34" charset="-120"/>
+              </a:rPr>
+              <a:t>PES measures how responsive quantity supplied is to a change in price.</a:t>
+            </a:r>
+            <a:endParaRPr lang="en-US" sz="1700" dirty="0"/>
+          </a:p>
+        </p:txBody>
+      </p:sp>
+      <p:sp>
+        <p:nvSpPr>
+          <p:cNvPr id="4" name="Shape 2"/>
+          <p:cNvSpPr/>
+          <p:nvPr/>
+        </p:nvSpPr>
+        <p:spPr>
+          <a:xfrm>
+            <a:off x="2651760" y="2468880"/>
+            <a:ext cx="6858000" cy="1188720"/>
           </a:xfrm>
           <a:prstGeom prst="roundRect">
             <a:avLst>
-              <a:gd name="adj" fmla="val 50000"/>
+              <a:gd name="adj" fmla="val 10769"/>
             </a:avLst>
           </a:prstGeom>
           <a:solidFill>
-            <a:srgbClr val="F96167">
-              <a:alpha val="18000"/>
-            </a:srgbClr>
+            <a:srgbClr val="1E2761"/>
           </a:solidFill>
           <a:ln/>
         </p:spPr>
       </p:sp>
       <p:sp>
         <p:nvSpPr>
-          <p:cNvPr id="3" name="Text 1"/>
-          <p:cNvSpPr/>
-          <p:nvPr/>
-        </p:nvSpPr>
-        <p:spPr>
-          <a:xfrm>
-            <a:off x="640080" y="502920"/>
-            <a:ext cx="1527048" cy="365760"/>
+          <p:cNvPr id="5" name="Text 3"/>
+          <p:cNvSpPr/>
+          <p:nvPr/>
+        </p:nvSpPr>
+        <p:spPr>
+          <a:xfrm>
+            <a:off x="2651760" y="2468880"/>
+            <a:ext cx="6858000" cy="1188720"/>
           </a:xfrm>
           <a:prstGeom prst="rect">
             <a:avLst/>
@@ -6634,30 +8674,30 @@
               <a:buNone/>
             </a:pPr>
             <a:r>
-              <a:rPr lang="en-US" sz="1200" b="1" dirty="0">
-                <a:solidFill>
-                  <a:srgbClr val="F96167"/>
-                </a:solidFill>
-                <a:latin typeface="Calibri" pitchFamily="34" charset="0"/>
-                <a:ea typeface="Calibri" pitchFamily="34" charset="-122"/>
-                <a:cs typeface="Calibri" pitchFamily="34" charset="-120"/>
-              </a:rPr>
-              <a:t>✍️ Your turn</a:t>
-            </a:r>
-            <a:endParaRPr lang="en-US" sz="1200" dirty="0"/>
-          </a:p>
-        </p:txBody>
-      </p:sp>
-      <p:sp>
-        <p:nvSpPr>
-          <p:cNvPr id="4" name="Text 2"/>
-          <p:cNvSpPr/>
-          <p:nvPr/>
-        </p:nvSpPr>
-        <p:spPr>
-          <a:xfrm>
-            <a:off x="640080" y="1051560"/>
-            <a:ext cx="10881360" cy="548640"/>
+              <a:rPr lang="en-US" sz="3000" b="1" dirty="0">
+                <a:solidFill>
+                  <a:srgbClr val="CADCFC"/>
+                </a:solidFill>
+                <a:latin typeface="Cambria" pitchFamily="34" charset="0"/>
+                <a:ea typeface="Cambria" pitchFamily="34" charset="-122"/>
+                <a:cs typeface="Cambria" pitchFamily="34" charset="-120"/>
+              </a:rPr>
+              <a:t>PES = %ΔQs ÷ %ΔP</a:t>
+            </a:r>
+            <a:endParaRPr lang="en-US" sz="3000" dirty="0"/>
+          </a:p>
+        </p:txBody>
+      </p:sp>
+      <p:sp>
+        <p:nvSpPr>
+          <p:cNvPr id="6" name="Text 4"/>
+          <p:cNvSpPr/>
+          <p:nvPr/>
+        </p:nvSpPr>
+        <p:spPr>
+          <a:xfrm>
+            <a:off x="822960" y="3931920"/>
+            <a:ext cx="9601200" cy="822960"/>
           </a:xfrm>
           <a:prstGeom prst="rect">
             <a:avLst/>
@@ -6673,68 +8713,7 @@
               <a:buNone/>
             </a:pPr>
             <a:r>
-              <a:rPr lang="en-US" sz="2200" b="1" dirty="0">
-                <a:solidFill>
-                  <a:srgbClr val="1E2761"/>
-                </a:solidFill>
-                <a:latin typeface="Calibri" pitchFamily="34" charset="0"/>
-                <a:ea typeface="Calibri" pitchFamily="34" charset="-122"/>
-                <a:cs typeface="Calibri" pitchFamily="34" charset="-120"/>
-              </a:rPr>
-              <a:t>🧩 Custom Lego accessories</a:t>
-            </a:r>
-            <a:endParaRPr lang="en-US" sz="2200" dirty="0"/>
-          </a:p>
-        </p:txBody>
-      </p:sp>
-      <p:sp>
-        <p:nvSpPr>
-          <p:cNvPr id="5" name="Shape 3"/>
-          <p:cNvSpPr/>
-          <p:nvPr/>
-        </p:nvSpPr>
-        <p:spPr>
-          <a:xfrm>
-            <a:off x="3566160" y="1920240"/>
-            <a:ext cx="5029200" cy="3108960"/>
-          </a:xfrm>
-          <a:prstGeom prst="roundRect">
-            <a:avLst>
-              <a:gd name="adj" fmla="val 4118"/>
-            </a:avLst>
-          </a:prstGeom>
-          <a:solidFill>
-            <a:srgbClr val="F4F5F7"/>
-          </a:solidFill>
-          <a:ln/>
-        </p:spPr>
-      </p:sp>
-      <p:sp>
-        <p:nvSpPr>
-          <p:cNvPr id="6" name="Text 4"/>
-          <p:cNvSpPr/>
-          <p:nvPr/>
-        </p:nvSpPr>
-        <p:spPr>
-          <a:xfrm>
-            <a:off x="3840480" y="2194560"/>
-            <a:ext cx="4480560" cy="365760"/>
-          </a:xfrm>
-          <a:prstGeom prst="rect">
-            <a:avLst/>
-          </a:prstGeom>
-          <a:noFill/>
-          <a:ln/>
-        </p:spPr>
-        <p:txBody>
-          <a:bodyPr wrap="square" rtlCol="0" anchor="ctr"/>
-          <a:lstStyle/>
-          <a:p>
-            <a:pPr indent="0" marL="0">
-              <a:buNone/>
-            </a:pPr>
-            <a:r>
-              <a:rPr lang="en-US" sz="1400" b="1" dirty="0">
+              <a:rPr lang="en-US" sz="1500" i="1" dirty="0">
                 <a:solidFill>
                   <a:srgbClr val="5B5B5B"/>
                 </a:solidFill>
@@ -6742,195 +8721,9 @@
                 <a:ea typeface="Calibri" pitchFamily="34" charset="-122"/>
                 <a:cs typeface="Calibri" pitchFamily="34" charset="-120"/>
               </a:rPr>
-              <a:t>Your turn — work it out</a:t>
-            </a:r>
-            <a:endParaRPr lang="en-US" sz="1400" dirty="0"/>
-          </a:p>
-        </p:txBody>
-      </p:sp>
-      <p:sp>
-        <p:nvSpPr>
-          <p:cNvPr id="7" name="Text 5"/>
-          <p:cNvSpPr/>
-          <p:nvPr/>
-        </p:nvSpPr>
-        <p:spPr>
-          <a:xfrm>
-            <a:off x="3840480" y="2651760"/>
-            <a:ext cx="4480560" cy="1280160"/>
-          </a:xfrm>
-          <a:prstGeom prst="rect">
-            <a:avLst/>
-          </a:prstGeom>
-          <a:noFill/>
-          <a:ln/>
-        </p:spPr>
-        <p:txBody>
-          <a:bodyPr wrap="square" rtlCol="0" anchor="t"/>
-          <a:lstStyle/>
-          <a:p>
-            <a:pPr indent="0" marL="0">
-              <a:spcAft>
-                <a:spcPts val="800"/>
-              </a:spcAft>
-              <a:buNone/>
-            </a:pPr>
-            <a:r>
-              <a:rPr lang="en-US" sz="1500" dirty="0">
-                <a:solidFill>
-                  <a:srgbClr val="1A1A1A"/>
-                </a:solidFill>
-                <a:latin typeface="Calibri" pitchFamily="34" charset="0"/>
-                <a:ea typeface="Calibri" pitchFamily="34" charset="-122"/>
-                <a:cs typeface="Calibri" pitchFamily="34" charset="-120"/>
-              </a:rPr>
-              <a:t>Price: +10%</a:t>
+              <a:t>Unlike PED, PES is almost always positive — the law of supply says price and quantity supplied move in the same direction, so there's no minus sign to ignore this time.</a:t>
             </a:r>
             <a:endParaRPr lang="en-US" sz="1500" dirty="0"/>
-          </a:p>
-          <a:p>
-            <a:pPr indent="0" marL="0">
-              <a:spcAft>
-                <a:spcPts val="800"/>
-              </a:spcAft>
-              <a:buNone/>
-            </a:pPr>
-            <a:r>
-              <a:rPr lang="en-US" sz="1500" dirty="0">
-                <a:solidFill>
-                  <a:srgbClr val="1A1A1A"/>
-                </a:solidFill>
-                <a:latin typeface="Calibri" pitchFamily="34" charset="0"/>
-                <a:ea typeface="Calibri" pitchFamily="34" charset="-122"/>
-                <a:cs typeface="Calibri" pitchFamily="34" charset="-120"/>
-              </a:rPr>
-              <a:t>Quantity supplied: +30% (spare printer capacity)</a:t>
-            </a:r>
-            <a:endParaRPr lang="en-US" sz="1500" dirty="0"/>
-          </a:p>
-        </p:txBody>
-      </p:sp>
-      <p:sp>
-        <p:nvSpPr>
-          <p:cNvPr id="8" name="Shape 6"/>
-          <p:cNvSpPr/>
-          <p:nvPr/>
-        </p:nvSpPr>
-        <p:spPr>
-          <a:xfrm>
-            <a:off x="3840480" y="4343400"/>
-            <a:ext cx="1828800" cy="0"/>
-          </a:xfrm>
-          <a:prstGeom prst="line">
-            <a:avLst/>
-          </a:prstGeom>
-          <a:noFill/>
-          <a:ln w="19050">
-            <a:solidFill>
-              <a:srgbClr val="5B5B5B"/>
-            </a:solidFill>
-            <a:prstDash val="solid"/>
-          </a:ln>
-        </p:spPr>
-      </p:sp>
-      <p:sp>
-        <p:nvSpPr>
-          <p:cNvPr id="9" name="Text 7"/>
-          <p:cNvSpPr/>
-          <p:nvPr/>
-        </p:nvSpPr>
-        <p:spPr>
-          <a:xfrm>
-            <a:off x="3840480" y="3977640"/>
-            <a:ext cx="4206240" cy="320040"/>
-          </a:xfrm>
-          <a:prstGeom prst="rect">
-            <a:avLst/>
-          </a:prstGeom>
-          <a:noFill/>
-          <a:ln/>
-        </p:spPr>
-        <p:txBody>
-          <a:bodyPr wrap="square" rtlCol="0" anchor="ctr"/>
-          <a:lstStyle/>
-          <a:p>
-            <a:pPr indent="0" marL="0">
-              <a:buNone/>
-            </a:pPr>
-            <a:r>
-              <a:rPr lang="en-US" sz="1400" dirty="0">
-                <a:solidFill>
-                  <a:srgbClr val="1A1A1A"/>
-                </a:solidFill>
-                <a:latin typeface="Calibri" pitchFamily="34" charset="0"/>
-                <a:ea typeface="Calibri" pitchFamily="34" charset="-122"/>
-                <a:cs typeface="Calibri" pitchFamily="34" charset="-120"/>
-              </a:rPr>
-              <a:t>TR before = $____</a:t>
-            </a:r>
-            <a:endParaRPr lang="en-US" sz="1400" dirty="0"/>
-          </a:p>
-        </p:txBody>
-      </p:sp>
-      <p:sp>
-        <p:nvSpPr>
-          <p:cNvPr id="10" name="Shape 8"/>
-          <p:cNvSpPr/>
-          <p:nvPr/>
-        </p:nvSpPr>
-        <p:spPr>
-          <a:xfrm>
-            <a:off x="3840480" y="4709160"/>
-            <a:ext cx="1828800" cy="0"/>
-          </a:xfrm>
-          <a:prstGeom prst="line">
-            <a:avLst/>
-          </a:prstGeom>
-          <a:noFill/>
-          <a:ln w="19050">
-            <a:solidFill>
-              <a:srgbClr val="5B5B5B"/>
-            </a:solidFill>
-            <a:prstDash val="solid"/>
-          </a:ln>
-        </p:spPr>
-      </p:sp>
-      <p:sp>
-        <p:nvSpPr>
-          <p:cNvPr id="11" name="Text 9"/>
-          <p:cNvSpPr/>
-          <p:nvPr/>
-        </p:nvSpPr>
-        <p:spPr>
-          <a:xfrm>
-            <a:off x="3840480" y="4343400"/>
-            <a:ext cx="4206240" cy="320040"/>
-          </a:xfrm>
-          <a:prstGeom prst="rect">
-            <a:avLst/>
-          </a:prstGeom>
-          <a:noFill/>
-          <a:ln/>
-        </p:spPr>
-        <p:txBody>
-          <a:bodyPr wrap="square" rtlCol="0" anchor="ctr"/>
-          <a:lstStyle/>
-          <a:p>
-            <a:pPr indent="0" marL="0">
-              <a:buNone/>
-            </a:pPr>
-            <a:r>
-              <a:rPr lang="en-US" sz="1400" dirty="0">
-                <a:solidFill>
-                  <a:srgbClr val="1A1A1A"/>
-                </a:solidFill>
-                <a:latin typeface="Calibri" pitchFamily="34" charset="0"/>
-                <a:ea typeface="Calibri" pitchFamily="34" charset="-122"/>
-                <a:cs typeface="Calibri" pitchFamily="34" charset="-120"/>
-              </a:rPr>
-              <a:t>TR after = $____</a:t>
-            </a:r>
-            <a:endParaRPr lang="en-US" sz="1400" dirty="0"/>
           </a:p>
         </p:txBody>
       </p:sp>
@@ -6968,38 +8761,14 @@
       </p:grpSpPr>
       <p:sp>
         <p:nvSpPr>
-          <p:cNvPr id="2" name="Shape 0"/>
-          <p:cNvSpPr/>
-          <p:nvPr/>
-        </p:nvSpPr>
-        <p:spPr>
-          <a:xfrm>
-            <a:off x="640080" y="502920"/>
-            <a:ext cx="1325880" cy="365760"/>
-          </a:xfrm>
-          <a:prstGeom prst="roundRect">
-            <a:avLst>
-              <a:gd name="adj" fmla="val 50000"/>
-            </a:avLst>
-          </a:prstGeom>
-          <a:solidFill>
-            <a:srgbClr val="1BAF7A">
-              <a:alpha val="18000"/>
-            </a:srgbClr>
-          </a:solidFill>
-          <a:ln/>
-        </p:spPr>
-      </p:sp>
-      <p:sp>
-        <p:nvSpPr>
-          <p:cNvPr id="3" name="Text 1"/>
-          <p:cNvSpPr/>
-          <p:nvPr/>
-        </p:nvSpPr>
-        <p:spPr>
-          <a:xfrm>
-            <a:off x="640080" y="502920"/>
-            <a:ext cx="1325880" cy="365760"/>
+          <p:cNvPr id="2" name="Text 0"/>
+          <p:cNvSpPr/>
+          <p:nvPr/>
+        </p:nvSpPr>
+        <p:spPr>
+          <a:xfrm>
+            <a:off x="640080" y="640080"/>
+            <a:ext cx="10881360" cy="548640"/>
           </a:xfrm>
           <a:prstGeom prst="rect">
             <a:avLst/>
@@ -7011,45 +8780,6 @@
           <a:bodyPr wrap="square" rtlCol="0" anchor="ctr"/>
           <a:lstStyle/>
           <a:p>
-            <a:pPr algn="ctr" indent="0" marL="0">
-              <a:buNone/>
-            </a:pPr>
-            <a:r>
-              <a:rPr lang="en-US" sz="1200" b="1" dirty="0">
-                <a:solidFill>
-                  <a:srgbClr val="1BAF7A"/>
-                </a:solidFill>
-                <a:latin typeface="Calibri" pitchFamily="34" charset="0"/>
-                <a:ea typeface="Calibri" pitchFamily="34" charset="-122"/>
-                <a:cs typeface="Calibri" pitchFamily="34" charset="-120"/>
-              </a:rPr>
-              <a:t>✅ Revealed</a:t>
-            </a:r>
-            <a:endParaRPr lang="en-US" sz="1200" dirty="0"/>
-          </a:p>
-        </p:txBody>
-      </p:sp>
-      <p:sp>
-        <p:nvSpPr>
-          <p:cNvPr id="4" name="Text 2"/>
-          <p:cNvSpPr/>
-          <p:nvPr/>
-        </p:nvSpPr>
-        <p:spPr>
-          <a:xfrm>
-            <a:off x="640080" y="1051560"/>
-            <a:ext cx="10881360" cy="548640"/>
-          </a:xfrm>
-          <a:prstGeom prst="rect">
-            <a:avLst/>
-          </a:prstGeom>
-          <a:noFill/>
-          <a:ln/>
-        </p:spPr>
-        <p:txBody>
-          <a:bodyPr wrap="square" rtlCol="0" anchor="ctr"/>
-          <a:lstStyle/>
-          <a:p>
             <a:pPr indent="0" marL="0">
               <a:buNone/>
             </a:pPr>
@@ -7062,7 +8792,7 @@
                 <a:ea typeface="Calibri" pitchFamily="34" charset="-122"/>
                 <a:cs typeface="Calibri" pitchFamily="34" charset="-120"/>
               </a:rPr>
-              <a:t>🧩 Custom Lego accessories — answer</a:t>
+              <a:t>🖨️ Worked example: Tom's grips</a:t>
             </a:r>
             <a:endParaRPr lang="en-US" sz="2200" dirty="0"/>
           </a:p>
@@ -7070,7 +8800,7 @@
       </p:sp>
       <p:sp>
         <p:nvSpPr>
-          <p:cNvPr id="5" name="Shape 3"/>
+          <p:cNvPr id="3" name="Shape 1"/>
           <p:cNvSpPr/>
           <p:nvPr/>
         </p:nvSpPr>
@@ -7092,7 +8822,7 @@
       </p:sp>
       <p:sp>
         <p:nvSpPr>
-          <p:cNvPr id="6" name="Text 4"/>
+          <p:cNvPr id="4" name="Text 2"/>
           <p:cNvSpPr/>
           <p:nvPr/>
         </p:nvSpPr>
@@ -7123,7 +8853,7 @@
                 <a:ea typeface="Calibri" pitchFamily="34" charset="-122"/>
                 <a:cs typeface="Calibri" pitchFamily="34" charset="-120"/>
               </a:rPr>
-              <a:t>Check your answer</a:t>
+              <a:t>An order surge</a:t>
             </a:r>
             <a:endParaRPr lang="en-US" sz="1400" dirty="0"/>
           </a:p>
@@ -7131,7 +8861,7 @@
       </p:sp>
       <p:sp>
         <p:nvSpPr>
-          <p:cNvPr id="7" name="Text 5"/>
+          <p:cNvPr id="5" name="Text 3"/>
           <p:cNvSpPr/>
           <p:nvPr/>
         </p:nvSpPr>
@@ -7165,7 +8895,7 @@
                 <a:ea typeface="Calibri" pitchFamily="34" charset="-122"/>
                 <a:cs typeface="Calibri" pitchFamily="34" charset="-120"/>
               </a:rPr>
-              <a:t>% change in price = +10%</a:t>
+              <a:t>Price: $8 → $10  (+25%)</a:t>
             </a:r>
             <a:endParaRPr lang="en-US" sz="1500" dirty="0"/>
           </a:p>
@@ -7185,7 +8915,7 @@
                 <a:ea typeface="Calibri" pitchFamily="34" charset="-122"/>
                 <a:cs typeface="Calibri" pitchFamily="34" charset="-120"/>
               </a:rPr>
-              <a:t>% change in quantity supplied = +30%</a:t>
+              <a:t>Quantity supplied: 60 → 90 grips/week  (+50%)</a:t>
             </a:r>
             <a:endParaRPr lang="en-US" sz="1500" dirty="0"/>
           </a:p>
@@ -7193,7 +8923,7 @@
       </p:sp>
       <p:sp>
         <p:nvSpPr>
-          <p:cNvPr id="8" name="Text 6"/>
+          <p:cNvPr id="6" name="Text 4"/>
           <p:cNvSpPr/>
           <p:nvPr/>
         </p:nvSpPr>
@@ -7218,13 +8948,13 @@
             <a:r>
               <a:rPr lang="en-US" sz="1800" b="1" dirty="0">
                 <a:solidFill>
-                  <a:srgbClr val="1BAF7A"/>
+                  <a:srgbClr val="1E2761"/>
                 </a:solidFill>
                 <a:latin typeface="Cambria" pitchFamily="34" charset="0"/>
                 <a:ea typeface="Cambria" pitchFamily="34" charset="-122"/>
                 <a:cs typeface="Cambria" pitchFamily="34" charset="-120"/>
               </a:rPr>
-              <a:t>PES = 30 ÷ 10 = 3 → Elastic</a:t>
+              <a:t>PES = 50 ÷ 25 = 2 → Elastic</a:t>
             </a:r>
             <a:endParaRPr lang="en-US" sz="1800" dirty="0"/>
           </a:p>
